--- a/slides/modules/m16-networking-dev-devops.pptx
+++ b/slides/modules/m16-networking-dev-devops.pptx
@@ -14,6 +14,8 @@
     <p:sldId id="262" r:id="rId14"/>
     <p:sldId id="263" r:id="rId15"/>
     <p:sldId id="264" r:id="rId16"/>
+    <p:sldId id="265" r:id="rId17"/>
+    <p:sldId id="266" r:id="rId18"/>
   </p:sldIdLst>
   <p:sldSz cx="12191695" cy="6858000" type="screen4x3"/>
   <p:notesSz cx="6858000" cy="9144000"/>
@@ -535,6 +537,76 @@
 </p:notes>
 </file>
 
+<file path=ppt/notesSlides/notesSlide10.xml><?xml version="1.0" encoding="utf-8"?>
+<p:notes xmlns:a="http://schemas.openxmlformats.org/drawingml/2006/main" xmlns:p="http://schemas.openxmlformats.org/presentationml/2006/main" xmlns:r="http://schemas.openxmlformats.org/officeDocument/2006/relationships">
+  <p:cSld>
+    <p:spTree>
+      <p:nvGrpSpPr>
+        <p:cNvPr id="1" name=""/>
+        <p:cNvGrpSpPr/>
+        <p:nvPr/>
+      </p:nvGrpSpPr>
+      <p:grpSpPr>
+        <a:xfrm>
+          <a:off x="0" y="0"/>
+          <a:ext cx="0" cy="0"/>
+          <a:chOff x="0" y="0"/>
+          <a:chExt cx="0" cy="0"/>
+        </a:xfrm>
+      </p:grpSpPr>
+      <p:sp>
+        <p:nvSpPr>
+          <p:cNvPr id="2" name="Slide Image Placeholder 1"/>
+          <p:cNvSpPr>
+            <a:spLocks noGrp="1"/>
+          </p:cNvSpPr>
+          <p:nvPr>
+            <p:ph type="sldImg" idx="2"/>
+          </p:nvPr>
+        </p:nvSpPr>
+        <p:spPr/>
+      </p:sp>
+      <p:sp>
+        <p:nvSpPr>
+          <p:cNvPr id="3" name="Notes Placeholder 2"/>
+          <p:cNvSpPr>
+            <a:spLocks noGrp="1"/>
+          </p:cNvSpPr>
+          <p:nvPr>
+            <p:ph type="body" idx="3" sz="quarter"/>
+          </p:nvPr>
+        </p:nvSpPr>
+        <p:spPr/>
+        <p:txBody>
+          <a:bodyPr/>
+          <a:lstStyle/>
+          <a:p>
+            <a:r>
+              <a:t>Concept diagram: Network policy layers.</a:t>
+            </a:r>
+          </a:p>
+        </p:txBody>
+      </p:sp>
+      <p:sp>
+        <p:nvSpPr>
+          <p:cNvPr id="4" name="Slide Number Placeholder 3"/>
+          <p:cNvSpPr>
+            <a:spLocks noGrp="1"/>
+          </p:cNvSpPr>
+          <p:nvPr>
+            <p:ph type="sldNum" idx="5" sz="quarter"/>
+          </p:nvPr>
+        </p:nvSpPr>
+        <p:spPr/>
+      </p:sp>
+    </p:spTree>
+  </p:cSld>
+  <p:clrMapOvr>
+    <a:masterClrMapping/>
+  </p:clrMapOvr>
+</p:notes>
+</file>
+
 <file path=ppt/notesSlides/notesSlide2.xml><?xml version="1.0" encoding="utf-8"?>
 <p:notes xmlns:a="http://schemas.openxmlformats.org/drawingml/2006/main" xmlns:p="http://schemas.openxmlformats.org/presentationml/2006/main" xmlns:r="http://schemas.openxmlformats.org/officeDocument/2006/relationships">
   <p:cSld>
@@ -1001,6 +1073,76 @@
           <a:p>
             <a:r>
               <a:t>Set expectations for the hands-on, all in the attendee's own claims-app namespace, then land the transfer. You trace a packet and break a Service selector to feel the #1 bug; expose the front end with an edge Route and see NodePort and LoadBalancer honestly (the latter stuck at &lt;pending&gt;); apply default-deny, watch the app and DNS break, re-open only what's needed, and prove a debug pod is now blocked from the database while the API still gets through; then meet a partner namespace isolated natively by a UDN with zero policy. Take the questions back: if someone deployed a debug pod in your most sensitive namespace right now, what could it reach — and could you produce, from policy alone, the list of flows your app is actually allowed? And stay honest about restraint: don't hand-write netpols where a UDN fits, don't fight a Route to do L4, don't reach for LoadBalancer when a Route will do, and never default-deny without the DNS allow.</a:t>
+            </a:r>
+          </a:p>
+        </p:txBody>
+      </p:sp>
+      <p:sp>
+        <p:nvSpPr>
+          <p:cNvPr id="4" name="Slide Number Placeholder 3"/>
+          <p:cNvSpPr>
+            <a:spLocks noGrp="1"/>
+          </p:cNvSpPr>
+          <p:nvPr>
+            <p:ph type="sldNum" idx="5" sz="quarter"/>
+          </p:nvPr>
+        </p:nvSpPr>
+        <p:spPr/>
+      </p:sp>
+    </p:spTree>
+  </p:cSld>
+  <p:clrMapOvr>
+    <a:masterClrMapping/>
+  </p:clrMapOvr>
+</p:notes>
+</file>
+
+<file path=ppt/notesSlides/notesSlide9.xml><?xml version="1.0" encoding="utf-8"?>
+<p:notes xmlns:a="http://schemas.openxmlformats.org/drawingml/2006/main" xmlns:p="http://schemas.openxmlformats.org/presentationml/2006/main" xmlns:r="http://schemas.openxmlformats.org/officeDocument/2006/relationships">
+  <p:cSld>
+    <p:spTree>
+      <p:nvGrpSpPr>
+        <p:cNvPr id="1" name=""/>
+        <p:cNvGrpSpPr/>
+        <p:nvPr/>
+      </p:nvGrpSpPr>
+      <p:grpSpPr>
+        <a:xfrm>
+          <a:off x="0" y="0"/>
+          <a:ext cx="0" cy="0"/>
+          <a:chOff x="0" y="0"/>
+          <a:chExt cx="0" cy="0"/>
+        </a:xfrm>
+      </p:grpSpPr>
+      <p:sp>
+        <p:nvSpPr>
+          <p:cNvPr id="2" name="Slide Image Placeholder 1"/>
+          <p:cNvSpPr>
+            <a:spLocks noGrp="1"/>
+          </p:cNvSpPr>
+          <p:nvPr>
+            <p:ph type="sldImg" idx="2"/>
+          </p:nvPr>
+        </p:nvSpPr>
+        <p:spPr/>
+      </p:sp>
+      <p:sp>
+        <p:nvSpPr>
+          <p:cNvPr id="3" name="Notes Placeholder 2"/>
+          <p:cNvSpPr>
+            <a:spLocks noGrp="1"/>
+          </p:cNvSpPr>
+          <p:nvPr>
+            <p:ph type="body" idx="3" sz="quarter"/>
+          </p:nvPr>
+        </p:nvSpPr>
+        <p:spPr/>
+        <p:txBody>
+          <a:bodyPr/>
+          <a:lstStyle/>
+          <a:p>
+            <a:r>
+              <a:t>Concept diagram: What you built.</a:t>
             </a:r>
           </a:p>
         </p:txBody>
@@ -4209,6 +4351,738 @@
 </p:sld>
 </file>
 
+<file path=ppt/slides/slide10.xml><?xml version="1.0" encoding="utf-8"?>
+<p:sld xmlns:a="http://schemas.openxmlformats.org/drawingml/2006/main" xmlns:p="http://schemas.openxmlformats.org/presentationml/2006/main" xmlns:r="http://schemas.openxmlformats.org/officeDocument/2006/relationships">
+  <p:cSld>
+    <p:spTree>
+      <p:nvGrpSpPr>
+        <p:cNvPr id="1" name=""/>
+        <p:cNvGrpSpPr/>
+        <p:nvPr/>
+      </p:nvGrpSpPr>
+      <p:grpSpPr/>
+      <p:pic>
+        <p:nvPicPr>
+          <p:cNvPr id="2" name="Picture 1" descr="redhat_logo.jpg"/>
+          <p:cNvPicPr>
+            <a:picLocks noChangeAspect="1"/>
+          </p:cNvPicPr>
+          <p:nvPr/>
+        </p:nvPicPr>
+        <p:blipFill>
+          <a:blip r:embed="rId2"/>
+          <a:stretch>
+            <a:fillRect/>
+          </a:stretch>
+        </p:blipFill>
+        <p:spPr>
+          <a:xfrm>
+            <a:off x="10326319" y="475488"/>
+            <a:ext cx="1024128" cy="242248"/>
+          </a:xfrm>
+          <a:prstGeom prst="rect">
+            <a:avLst/>
+          </a:prstGeom>
+        </p:spPr>
+      </p:pic>
+      <p:sp>
+        <p:nvSpPr>
+          <p:cNvPr id="3" name="TextBox 2"/>
+          <p:cNvSpPr txBox="1"/>
+          <p:nvPr/>
+        </p:nvSpPr>
+        <p:spPr>
+          <a:xfrm>
+            <a:off x="841248" y="548640"/>
+            <a:ext cx="8595360" cy="274320"/>
+          </a:xfrm>
+          <a:prstGeom prst="rect">
+            <a:avLst/>
+          </a:prstGeom>
+          <a:noFill/>
+        </p:spPr>
+        <p:txBody>
+          <a:bodyPr wrap="square" anchor="t" lIns="0" rIns="0" tIns="0" bIns="0">
+            <a:spAutoFit/>
+          </a:bodyPr>
+          <a:lstStyle/>
+          <a:p>
+            <a:pPr algn="l">
+              <a:lnSpc>
+                <a:spcPct val="106000"/>
+              </a:lnSpc>
+              <a:spcBef>
+                <a:spcPts val="0"/>
+              </a:spcBef>
+              <a:spcAft>
+                <a:spcPts val="0"/>
+              </a:spcAft>
+            </a:pPr>
+            <a:r>
+              <a:rPr sz="1250" b="1" spc="220">
+                <a:solidFill>
+                  <a:srgbClr val="EE0000"/>
+                </a:solidFill>
+                <a:latin typeface="Red Hat Display"/>
+              </a:rPr>
+              <a:t>M16 · NETWORKING FOR DEV &amp; DEVOPS</a:t>
+            </a:r>
+          </a:p>
+        </p:txBody>
+      </p:sp>
+      <p:sp>
+        <p:nvSpPr>
+          <p:cNvPr id="4" name="TextBox 3"/>
+          <p:cNvSpPr txBox="1"/>
+          <p:nvPr/>
+        </p:nvSpPr>
+        <p:spPr>
+          <a:xfrm>
+            <a:off x="841248" y="877824"/>
+            <a:ext cx="10515600" cy="548640"/>
+          </a:xfrm>
+          <a:prstGeom prst="rect">
+            <a:avLst/>
+          </a:prstGeom>
+          <a:noFill/>
+        </p:spPr>
+        <p:txBody>
+          <a:bodyPr wrap="none" anchor="t" lIns="0" rIns="0" tIns="0" bIns="0">
+            <a:spAutoFit/>
+          </a:bodyPr>
+          <a:lstStyle/>
+          <a:p>
+            <a:pPr algn="l">
+              <a:lnSpc>
+                <a:spcPct val="100000"/>
+              </a:lnSpc>
+              <a:spcBef>
+                <a:spcPts val="0"/>
+              </a:spcBef>
+              <a:spcAft>
+                <a:spcPts val="0"/>
+              </a:spcAft>
+            </a:pPr>
+            <a:r>
+              <a:rPr sz="2500" b="1">
+                <a:solidFill>
+                  <a:srgbClr val="1A1A1A"/>
+                </a:solidFill>
+                <a:latin typeface="Red Hat Display"/>
+              </a:rPr>
+              <a:t>What you built</a:t>
+            </a:r>
+          </a:p>
+        </p:txBody>
+      </p:sp>
+      <p:cxnSp>
+        <p:nvCxnSpPr>
+          <p:cNvPr id="5" name="Connector 4"/>
+          <p:cNvCxnSpPr/>
+          <p:nvPr/>
+        </p:nvCxnSpPr>
+        <p:spPr>
+          <a:xfrm>
+            <a:off x="841248" y="1554480"/>
+            <a:ext cx="1371600" cy="0"/>
+          </a:xfrm>
+          <a:prstGeom prst="bentConnector3">
+            <a:avLst/>
+          </a:prstGeom>
+          <a:ln w="31750">
+            <a:solidFill>
+              <a:srgbClr val="EE0000"/>
+            </a:solidFill>
+          </a:ln>
+          <a:effectLst/>
+        </p:spPr>
+        <p:style>
+          <a:lnRef idx="2">
+            <a:schemeClr val="accent1"/>
+          </a:lnRef>
+          <a:fillRef idx="0">
+            <a:schemeClr val="accent1"/>
+          </a:fillRef>
+          <a:effectRef idx="1">
+            <a:schemeClr val="accent1"/>
+          </a:effectRef>
+          <a:fontRef idx="minor">
+            <a:schemeClr val="tx1"/>
+          </a:fontRef>
+        </p:style>
+      </p:cxnSp>
+      <p:sp>
+        <p:nvSpPr>
+          <p:cNvPr id="6" name="Rounded Rectangle 5"/>
+          <p:cNvSpPr/>
+          <p:nvPr/>
+        </p:nvSpPr>
+        <p:spPr>
+          <a:xfrm>
+            <a:off x="841248" y="2331720"/>
+            <a:ext cx="10509199" cy="3794760"/>
+          </a:xfrm>
+          <a:prstGeom prst="roundRect">
+            <a:avLst>
+              <a:gd name="adj" fmla="val 4000"/>
+            </a:avLst>
+          </a:prstGeom>
+          <a:solidFill>
+            <a:srgbClr val="FFFFFF"/>
+          </a:solidFill>
+          <a:ln w="15240">
+            <a:solidFill>
+              <a:srgbClr val="DDE1E6"/>
+            </a:solidFill>
+          </a:ln>
+          <a:effectLst/>
+        </p:spPr>
+        <p:style>
+          <a:lnRef idx="1">
+            <a:schemeClr val="accent1"/>
+          </a:lnRef>
+          <a:fillRef idx="3">
+            <a:schemeClr val="accent1"/>
+          </a:fillRef>
+          <a:effectRef idx="2">
+            <a:schemeClr val="accent1"/>
+          </a:effectRef>
+          <a:fontRef idx="minor">
+            <a:schemeClr val="lt1"/>
+          </a:fontRef>
+        </p:style>
+        <p:txBody>
+          <a:bodyPr rtlCol="0" anchor="ctr"/>
+          <a:lstStyle/>
+          <a:p>
+            <a:pPr algn="ctr"/>
+          </a:p>
+        </p:txBody>
+      </p:sp>
+      <p:pic>
+        <p:nvPicPr>
+          <p:cNvPr id="7" name="Picture 6" descr="04-what-you-built.png"/>
+          <p:cNvPicPr>
+            <a:picLocks noChangeAspect="1"/>
+          </p:cNvPicPr>
+          <p:nvPr/>
+        </p:nvPicPr>
+        <p:blipFill>
+          <a:blip r:embed="rId3"/>
+          <a:stretch>
+            <a:fillRect/>
+          </a:stretch>
+        </p:blipFill>
+        <p:spPr>
+          <a:xfrm>
+            <a:off x="4633595" y="2532888"/>
+            <a:ext cx="2924503" cy="3392424"/>
+          </a:xfrm>
+          <a:prstGeom prst="rect">
+            <a:avLst/>
+          </a:prstGeom>
+        </p:spPr>
+      </p:pic>
+      <p:cxnSp>
+        <p:nvCxnSpPr>
+          <p:cNvPr id="8" name="Connector 7"/>
+          <p:cNvCxnSpPr/>
+          <p:nvPr/>
+        </p:nvCxnSpPr>
+        <p:spPr>
+          <a:xfrm>
+            <a:off x="841248" y="6437376"/>
+            <a:ext cx="10509199" cy="0"/>
+          </a:xfrm>
+          <a:prstGeom prst="bentConnector3">
+            <a:avLst/>
+          </a:prstGeom>
+          <a:ln w="12700">
+            <a:solidFill>
+              <a:srgbClr val="DDE1E6"/>
+            </a:solidFill>
+          </a:ln>
+          <a:effectLst/>
+        </p:spPr>
+        <p:style>
+          <a:lnRef idx="2">
+            <a:schemeClr val="accent1"/>
+          </a:lnRef>
+          <a:fillRef idx="0">
+            <a:schemeClr val="accent1"/>
+          </a:fillRef>
+          <a:effectRef idx="1">
+            <a:schemeClr val="accent1"/>
+          </a:effectRef>
+          <a:fontRef idx="minor">
+            <a:schemeClr val="tx1"/>
+          </a:fontRef>
+        </p:style>
+      </p:cxnSp>
+      <p:sp>
+        <p:nvSpPr>
+          <p:cNvPr id="9" name="TextBox 8"/>
+          <p:cNvSpPr txBox="1"/>
+          <p:nvPr/>
+        </p:nvSpPr>
+        <p:spPr>
+          <a:xfrm>
+            <a:off x="841248" y="6473952"/>
+            <a:ext cx="7315200" cy="274320"/>
+          </a:xfrm>
+          <a:prstGeom prst="rect">
+            <a:avLst/>
+          </a:prstGeom>
+          <a:noFill/>
+        </p:spPr>
+        <p:txBody>
+          <a:bodyPr wrap="square" anchor="t" lIns="0" rIns="0" tIns="0" bIns="0">
+            <a:spAutoFit/>
+          </a:bodyPr>
+          <a:lstStyle/>
+          <a:p>
+            <a:pPr algn="l">
+              <a:lnSpc>
+                <a:spcPct val="106000"/>
+              </a:lnSpc>
+              <a:spcBef>
+                <a:spcPts val="0"/>
+              </a:spcBef>
+              <a:spcAft>
+                <a:spcPts val="0"/>
+              </a:spcAft>
+            </a:pPr>
+            <a:r>
+              <a:rPr sz="950" b="0">
+                <a:solidFill>
+                  <a:srgbClr val="8A9099"/>
+                </a:solidFill>
+                <a:latin typeface="Red Hat Text"/>
+              </a:rPr>
+              <a:t>CONFIDENTIAL</a:t>
+            </a:r>
+          </a:p>
+        </p:txBody>
+      </p:sp>
+      <p:sp>
+        <p:nvSpPr>
+          <p:cNvPr id="10" name="TextBox 9"/>
+          <p:cNvSpPr txBox="1"/>
+          <p:nvPr/>
+        </p:nvSpPr>
+        <p:spPr>
+          <a:xfrm>
+            <a:off x="10801807" y="6473952"/>
+            <a:ext cx="548640" cy="274320"/>
+          </a:xfrm>
+          <a:prstGeom prst="rect">
+            <a:avLst/>
+          </a:prstGeom>
+          <a:noFill/>
+        </p:spPr>
+        <p:txBody>
+          <a:bodyPr wrap="square" anchor="t" lIns="0" rIns="0" tIns="0" bIns="0">
+            <a:spAutoFit/>
+          </a:bodyPr>
+          <a:lstStyle/>
+          <a:p>
+            <a:pPr algn="r">
+              <a:lnSpc>
+                <a:spcPct val="106000"/>
+              </a:lnSpc>
+              <a:spcBef>
+                <a:spcPts val="0"/>
+              </a:spcBef>
+              <a:spcAft>
+                <a:spcPts val="0"/>
+              </a:spcAft>
+            </a:pPr>
+            <a:r>
+              <a:rPr sz="950" b="0">
+                <a:solidFill>
+                  <a:srgbClr val="8A9099"/>
+                </a:solidFill>
+                <a:latin typeface="Red Hat Text"/>
+              </a:rPr>
+              <a:t>9</a:t>
+            </a:r>
+          </a:p>
+        </p:txBody>
+      </p:sp>
+    </p:spTree>
+  </p:cSld>
+  <p:clrMapOvr>
+    <a:masterClrMapping/>
+  </p:clrMapOvr>
+</p:sld>
+</file>
+
+<file path=ppt/slides/slide11.xml><?xml version="1.0" encoding="utf-8"?>
+<p:sld xmlns:a="http://schemas.openxmlformats.org/drawingml/2006/main" xmlns:p="http://schemas.openxmlformats.org/presentationml/2006/main" xmlns:r="http://schemas.openxmlformats.org/officeDocument/2006/relationships">
+  <p:cSld>
+    <p:spTree>
+      <p:nvGrpSpPr>
+        <p:cNvPr id="1" name=""/>
+        <p:cNvGrpSpPr/>
+        <p:nvPr/>
+      </p:nvGrpSpPr>
+      <p:grpSpPr/>
+      <p:pic>
+        <p:nvPicPr>
+          <p:cNvPr id="2" name="Picture 1" descr="redhat_logo.jpg"/>
+          <p:cNvPicPr>
+            <a:picLocks noChangeAspect="1"/>
+          </p:cNvPicPr>
+          <p:nvPr/>
+        </p:nvPicPr>
+        <p:blipFill>
+          <a:blip r:embed="rId2"/>
+          <a:stretch>
+            <a:fillRect/>
+          </a:stretch>
+        </p:blipFill>
+        <p:spPr>
+          <a:xfrm>
+            <a:off x="10326319" y="475488"/>
+            <a:ext cx="1024128" cy="242248"/>
+          </a:xfrm>
+          <a:prstGeom prst="rect">
+            <a:avLst/>
+          </a:prstGeom>
+        </p:spPr>
+      </p:pic>
+      <p:sp>
+        <p:nvSpPr>
+          <p:cNvPr id="3" name="TextBox 2"/>
+          <p:cNvSpPr txBox="1"/>
+          <p:nvPr/>
+        </p:nvSpPr>
+        <p:spPr>
+          <a:xfrm>
+            <a:off x="841248" y="548640"/>
+            <a:ext cx="8595360" cy="274320"/>
+          </a:xfrm>
+          <a:prstGeom prst="rect">
+            <a:avLst/>
+          </a:prstGeom>
+          <a:noFill/>
+        </p:spPr>
+        <p:txBody>
+          <a:bodyPr wrap="square" anchor="t" lIns="0" rIns="0" tIns="0" bIns="0">
+            <a:spAutoFit/>
+          </a:bodyPr>
+          <a:lstStyle/>
+          <a:p>
+            <a:pPr algn="l">
+              <a:lnSpc>
+                <a:spcPct val="106000"/>
+              </a:lnSpc>
+              <a:spcBef>
+                <a:spcPts val="0"/>
+              </a:spcBef>
+              <a:spcAft>
+                <a:spcPts val="0"/>
+              </a:spcAft>
+            </a:pPr>
+            <a:r>
+              <a:rPr sz="1250" b="1" spc="220">
+                <a:solidFill>
+                  <a:srgbClr val="EE0000"/>
+                </a:solidFill>
+                <a:latin typeface="Red Hat Display"/>
+              </a:rPr>
+              <a:t>M16 · NETWORKING FOR DEV &amp; DEVOPS</a:t>
+            </a:r>
+          </a:p>
+        </p:txBody>
+      </p:sp>
+      <p:sp>
+        <p:nvSpPr>
+          <p:cNvPr id="4" name="TextBox 3"/>
+          <p:cNvSpPr txBox="1"/>
+          <p:nvPr/>
+        </p:nvSpPr>
+        <p:spPr>
+          <a:xfrm>
+            <a:off x="841248" y="877824"/>
+            <a:ext cx="10515600" cy="548640"/>
+          </a:xfrm>
+          <a:prstGeom prst="rect">
+            <a:avLst/>
+          </a:prstGeom>
+          <a:noFill/>
+        </p:spPr>
+        <p:txBody>
+          <a:bodyPr wrap="none" anchor="t" lIns="0" rIns="0" tIns="0" bIns="0">
+            <a:spAutoFit/>
+          </a:bodyPr>
+          <a:lstStyle/>
+          <a:p>
+            <a:pPr algn="l">
+              <a:lnSpc>
+                <a:spcPct val="100000"/>
+              </a:lnSpc>
+              <a:spcBef>
+                <a:spcPts val="0"/>
+              </a:spcBef>
+              <a:spcAft>
+                <a:spcPts val="0"/>
+              </a:spcAft>
+            </a:pPr>
+            <a:r>
+              <a:rPr sz="2500" b="1">
+                <a:solidFill>
+                  <a:srgbClr val="1A1A1A"/>
+                </a:solidFill>
+                <a:latin typeface="Red Hat Display"/>
+              </a:rPr>
+              <a:t>Network policy layers</a:t>
+            </a:r>
+          </a:p>
+        </p:txBody>
+      </p:sp>
+      <p:cxnSp>
+        <p:nvCxnSpPr>
+          <p:cNvPr id="5" name="Connector 4"/>
+          <p:cNvCxnSpPr/>
+          <p:nvPr/>
+        </p:nvCxnSpPr>
+        <p:spPr>
+          <a:xfrm>
+            <a:off x="841248" y="1554480"/>
+            <a:ext cx="1371600" cy="0"/>
+          </a:xfrm>
+          <a:prstGeom prst="bentConnector3">
+            <a:avLst/>
+          </a:prstGeom>
+          <a:ln w="31750">
+            <a:solidFill>
+              <a:srgbClr val="EE0000"/>
+            </a:solidFill>
+          </a:ln>
+          <a:effectLst/>
+        </p:spPr>
+        <p:style>
+          <a:lnRef idx="2">
+            <a:schemeClr val="accent1"/>
+          </a:lnRef>
+          <a:fillRef idx="0">
+            <a:schemeClr val="accent1"/>
+          </a:fillRef>
+          <a:effectRef idx="1">
+            <a:schemeClr val="accent1"/>
+          </a:effectRef>
+          <a:fontRef idx="minor">
+            <a:schemeClr val="tx1"/>
+          </a:fontRef>
+        </p:style>
+      </p:cxnSp>
+      <p:sp>
+        <p:nvSpPr>
+          <p:cNvPr id="6" name="Rounded Rectangle 5"/>
+          <p:cNvSpPr/>
+          <p:nvPr/>
+        </p:nvSpPr>
+        <p:spPr>
+          <a:xfrm>
+            <a:off x="841248" y="2331720"/>
+            <a:ext cx="10509199" cy="3794760"/>
+          </a:xfrm>
+          <a:prstGeom prst="roundRect">
+            <a:avLst>
+              <a:gd name="adj" fmla="val 4000"/>
+            </a:avLst>
+          </a:prstGeom>
+          <a:solidFill>
+            <a:srgbClr val="FFFFFF"/>
+          </a:solidFill>
+          <a:ln w="15240">
+            <a:solidFill>
+              <a:srgbClr val="DDE1E6"/>
+            </a:solidFill>
+          </a:ln>
+          <a:effectLst/>
+        </p:spPr>
+        <p:style>
+          <a:lnRef idx="1">
+            <a:schemeClr val="accent1"/>
+          </a:lnRef>
+          <a:fillRef idx="3">
+            <a:schemeClr val="accent1"/>
+          </a:fillRef>
+          <a:effectRef idx="2">
+            <a:schemeClr val="accent1"/>
+          </a:effectRef>
+          <a:fontRef idx="minor">
+            <a:schemeClr val="lt1"/>
+          </a:fontRef>
+        </p:style>
+        <p:txBody>
+          <a:bodyPr rtlCol="0" anchor="ctr"/>
+          <a:lstStyle/>
+          <a:p>
+            <a:pPr algn="ctr"/>
+          </a:p>
+        </p:txBody>
+      </p:sp>
+      <p:pic>
+        <p:nvPicPr>
+          <p:cNvPr id="7" name="Picture 6" descr="05-network-policy-layers.png"/>
+          <p:cNvPicPr>
+            <a:picLocks noChangeAspect="1"/>
+          </p:cNvPicPr>
+          <p:nvPr/>
+        </p:nvPicPr>
+        <p:blipFill>
+          <a:blip r:embed="rId3"/>
+          <a:stretch>
+            <a:fillRect/>
+          </a:stretch>
+        </p:blipFill>
+        <p:spPr>
+          <a:xfrm>
+            <a:off x="1042416" y="3698489"/>
+            <a:ext cx="10106863" cy="1061220"/>
+          </a:xfrm>
+          <a:prstGeom prst="rect">
+            <a:avLst/>
+          </a:prstGeom>
+        </p:spPr>
+      </p:pic>
+      <p:cxnSp>
+        <p:nvCxnSpPr>
+          <p:cNvPr id="8" name="Connector 7"/>
+          <p:cNvCxnSpPr/>
+          <p:nvPr/>
+        </p:nvCxnSpPr>
+        <p:spPr>
+          <a:xfrm>
+            <a:off x="841248" y="6437376"/>
+            <a:ext cx="10509199" cy="0"/>
+          </a:xfrm>
+          <a:prstGeom prst="bentConnector3">
+            <a:avLst/>
+          </a:prstGeom>
+          <a:ln w="12700">
+            <a:solidFill>
+              <a:srgbClr val="DDE1E6"/>
+            </a:solidFill>
+          </a:ln>
+          <a:effectLst/>
+        </p:spPr>
+        <p:style>
+          <a:lnRef idx="2">
+            <a:schemeClr val="accent1"/>
+          </a:lnRef>
+          <a:fillRef idx="0">
+            <a:schemeClr val="accent1"/>
+          </a:fillRef>
+          <a:effectRef idx="1">
+            <a:schemeClr val="accent1"/>
+          </a:effectRef>
+          <a:fontRef idx="minor">
+            <a:schemeClr val="tx1"/>
+          </a:fontRef>
+        </p:style>
+      </p:cxnSp>
+      <p:sp>
+        <p:nvSpPr>
+          <p:cNvPr id="9" name="TextBox 8"/>
+          <p:cNvSpPr txBox="1"/>
+          <p:nvPr/>
+        </p:nvSpPr>
+        <p:spPr>
+          <a:xfrm>
+            <a:off x="841248" y="6473952"/>
+            <a:ext cx="7315200" cy="274320"/>
+          </a:xfrm>
+          <a:prstGeom prst="rect">
+            <a:avLst/>
+          </a:prstGeom>
+          <a:noFill/>
+        </p:spPr>
+        <p:txBody>
+          <a:bodyPr wrap="square" anchor="t" lIns="0" rIns="0" tIns="0" bIns="0">
+            <a:spAutoFit/>
+          </a:bodyPr>
+          <a:lstStyle/>
+          <a:p>
+            <a:pPr algn="l">
+              <a:lnSpc>
+                <a:spcPct val="106000"/>
+              </a:lnSpc>
+              <a:spcBef>
+                <a:spcPts val="0"/>
+              </a:spcBef>
+              <a:spcAft>
+                <a:spcPts val="0"/>
+              </a:spcAft>
+            </a:pPr>
+            <a:r>
+              <a:rPr sz="950" b="0">
+                <a:solidFill>
+                  <a:srgbClr val="8A9099"/>
+                </a:solidFill>
+                <a:latin typeface="Red Hat Text"/>
+              </a:rPr>
+              <a:t>CONFIDENTIAL</a:t>
+            </a:r>
+          </a:p>
+        </p:txBody>
+      </p:sp>
+      <p:sp>
+        <p:nvSpPr>
+          <p:cNvPr id="10" name="TextBox 9"/>
+          <p:cNvSpPr txBox="1"/>
+          <p:nvPr/>
+        </p:nvSpPr>
+        <p:spPr>
+          <a:xfrm>
+            <a:off x="10801807" y="6473952"/>
+            <a:ext cx="548640" cy="274320"/>
+          </a:xfrm>
+          <a:prstGeom prst="rect">
+            <a:avLst/>
+          </a:prstGeom>
+          <a:noFill/>
+        </p:spPr>
+        <p:txBody>
+          <a:bodyPr wrap="square" anchor="t" lIns="0" rIns="0" tIns="0" bIns="0">
+            <a:spAutoFit/>
+          </a:bodyPr>
+          <a:lstStyle/>
+          <a:p>
+            <a:pPr algn="r">
+              <a:lnSpc>
+                <a:spcPct val="106000"/>
+              </a:lnSpc>
+              <a:spcBef>
+                <a:spcPts val="0"/>
+              </a:spcBef>
+              <a:spcAft>
+                <a:spcPts val="0"/>
+              </a:spcAft>
+            </a:pPr>
+            <a:r>
+              <a:rPr sz="950" b="0">
+                <a:solidFill>
+                  <a:srgbClr val="8A9099"/>
+                </a:solidFill>
+                <a:latin typeface="Red Hat Text"/>
+              </a:rPr>
+              <a:t>10</a:t>
+            </a:r>
+          </a:p>
+        </p:txBody>
+      </p:sp>
+    </p:spTree>
+  </p:cSld>
+  <p:clrMapOvr>
+    <a:masterClrMapping/>
+  </p:clrMapOvr>
+</p:sld>
+</file>
+
 <file path=ppt/slides/slide2.xml><?xml version="1.0" encoding="utf-8"?>
 <p:sld xmlns:a="http://schemas.openxmlformats.org/drawingml/2006/main" xmlns:p="http://schemas.openxmlformats.org/presentationml/2006/main" xmlns:r="http://schemas.openxmlformats.org/officeDocument/2006/relationships">
   <p:cSld>
@@ -4378,11 +5252,11 @@
         <p:spPr>
           <a:xfrm>
             <a:off x="841248" y="2395728"/>
-            <a:ext cx="5715000" cy="530352"/>
+            <a:ext cx="5138928" cy="786384"/>
           </a:xfrm>
           <a:prstGeom prst="roundRect">
             <a:avLst>
-              <a:gd name="adj" fmla="val 6000"/>
+              <a:gd name="adj" fmla="val 7000"/>
             </a:avLst>
           </a:prstGeom>
           <a:solidFill>
@@ -4417,9 +5291,55 @@
           </a:p>
         </p:txBody>
       </p:sp>
+      <p:sp>
+        <p:nvSpPr>
+          <p:cNvPr id="7" name="Rounded Rectangle 6"/>
+          <p:cNvSpPr/>
+          <p:nvPr/>
+        </p:nvSpPr>
+        <p:spPr>
+          <a:xfrm>
+            <a:off x="987552" y="2532888"/>
+            <a:ext cx="512064" cy="512064"/>
+          </a:xfrm>
+          <a:prstGeom prst="roundRect">
+            <a:avLst>
+              <a:gd name="adj" fmla="val 26000"/>
+            </a:avLst>
+          </a:prstGeom>
+          <a:solidFill>
+            <a:srgbClr val="EE0000"/>
+          </a:solidFill>
+          <a:ln>
+            <a:noFill/>
+          </a:ln>
+          <a:effectLst/>
+        </p:spPr>
+        <p:style>
+          <a:lnRef idx="1">
+            <a:schemeClr val="accent1"/>
+          </a:lnRef>
+          <a:fillRef idx="3">
+            <a:schemeClr val="accent1"/>
+          </a:fillRef>
+          <a:effectRef idx="2">
+            <a:schemeClr val="accent1"/>
+          </a:effectRef>
+          <a:fontRef idx="minor">
+            <a:schemeClr val="lt1"/>
+          </a:fontRef>
+        </p:style>
+        <p:txBody>
+          <a:bodyPr rtlCol="0" anchor="ctr"/>
+          <a:lstStyle/>
+          <a:p>
+            <a:pPr algn="ctr"/>
+          </a:p>
+        </p:txBody>
+      </p:sp>
       <p:pic>
         <p:nvPicPr>
-          <p:cNvPr id="7" name="Picture 6" descr="check_steel.png"/>
+          <p:cNvPr id="8" name="Picture 7" descr="check_white.png"/>
           <p:cNvPicPr>
             <a:picLocks noChangeAspect="1"/>
           </p:cNvPicPr>
@@ -4433,8 +5353,8 @@
         </p:blipFill>
         <p:spPr>
           <a:xfrm>
-            <a:off x="987552" y="2542032"/>
-            <a:ext cx="237744" cy="237744"/>
+            <a:off x="1110447" y="2655783"/>
+            <a:ext cx="266273" cy="266273"/>
           </a:xfrm>
           <a:prstGeom prst="rect">
             <a:avLst/>
@@ -4443,14 +5363,14 @@
       </p:pic>
       <p:sp>
         <p:nvSpPr>
-          <p:cNvPr id="8" name="TextBox 7"/>
+          <p:cNvPr id="9" name="TextBox 8"/>
           <p:cNvSpPr txBox="1"/>
           <p:nvPr/>
         </p:nvSpPr>
         <p:spPr>
           <a:xfrm>
-            <a:off x="1353312" y="2395728"/>
-            <a:ext cx="5029200" cy="530352"/>
+            <a:off x="1627632" y="2395728"/>
+            <a:ext cx="4206240" cy="786384"/>
           </a:xfrm>
           <a:prstGeom prst="rect">
             <a:avLst/>
@@ -4475,7 +5395,7 @@
               </a:spcAft>
             </a:pPr>
             <a:r>
-              <a:rPr sz="1200" b="0">
+              <a:rPr sz="1150" b="0">
                 <a:solidFill>
                   <a:srgbClr val="1A1A1A"/>
                 </a:solidFill>
@@ -4488,18 +5408,18 @@
       </p:sp>
       <p:sp>
         <p:nvSpPr>
-          <p:cNvPr id="9" name="Rounded Rectangle 8"/>
+          <p:cNvPr id="10" name="Rounded Rectangle 9"/>
           <p:cNvSpPr/>
           <p:nvPr/>
         </p:nvSpPr>
         <p:spPr>
           <a:xfrm>
-            <a:off x="841248" y="2999232"/>
-            <a:ext cx="5715000" cy="530352"/>
+            <a:off x="6254496" y="2395728"/>
+            <a:ext cx="5138928" cy="786384"/>
           </a:xfrm>
           <a:prstGeom prst="roundRect">
             <a:avLst>
-              <a:gd name="adj" fmla="val 6000"/>
+              <a:gd name="adj" fmla="val 7000"/>
             </a:avLst>
           </a:prstGeom>
           <a:solidFill>
@@ -4534,9 +5454,55 @@
           </a:p>
         </p:txBody>
       </p:sp>
+      <p:sp>
+        <p:nvSpPr>
+          <p:cNvPr id="11" name="Rounded Rectangle 10"/>
+          <p:cNvSpPr/>
+          <p:nvPr/>
+        </p:nvSpPr>
+        <p:spPr>
+          <a:xfrm>
+            <a:off x="6400800" y="2532888"/>
+            <a:ext cx="512064" cy="512064"/>
+          </a:xfrm>
+          <a:prstGeom prst="roundRect">
+            <a:avLst>
+              <a:gd name="adj" fmla="val 26000"/>
+            </a:avLst>
+          </a:prstGeom>
+          <a:solidFill>
+            <a:srgbClr val="EE0000"/>
+          </a:solidFill>
+          <a:ln>
+            <a:noFill/>
+          </a:ln>
+          <a:effectLst/>
+        </p:spPr>
+        <p:style>
+          <a:lnRef idx="1">
+            <a:schemeClr val="accent1"/>
+          </a:lnRef>
+          <a:fillRef idx="3">
+            <a:schemeClr val="accent1"/>
+          </a:fillRef>
+          <a:effectRef idx="2">
+            <a:schemeClr val="accent1"/>
+          </a:effectRef>
+          <a:fontRef idx="minor">
+            <a:schemeClr val="lt1"/>
+          </a:fontRef>
+        </p:style>
+        <p:txBody>
+          <a:bodyPr rtlCol="0" anchor="ctr"/>
+          <a:lstStyle/>
+          <a:p>
+            <a:pPr algn="ctr"/>
+          </a:p>
+        </p:txBody>
+      </p:sp>
       <p:pic>
         <p:nvPicPr>
-          <p:cNvPr id="10" name="Picture 9" descr="check_steel.png"/>
+          <p:cNvPr id="12" name="Picture 11" descr="check_white.png"/>
           <p:cNvPicPr>
             <a:picLocks noChangeAspect="1"/>
           </p:cNvPicPr>
@@ -4550,8 +5516,8 @@
         </p:blipFill>
         <p:spPr>
           <a:xfrm>
-            <a:off x="987552" y="3145536"/>
-            <a:ext cx="237744" cy="237744"/>
+            <a:off x="6523695" y="2655783"/>
+            <a:ext cx="266273" cy="266273"/>
           </a:xfrm>
           <a:prstGeom prst="rect">
             <a:avLst/>
@@ -4560,14 +5526,14 @@
       </p:pic>
       <p:sp>
         <p:nvSpPr>
-          <p:cNvPr id="11" name="TextBox 10"/>
+          <p:cNvPr id="13" name="TextBox 12"/>
           <p:cNvSpPr txBox="1"/>
           <p:nvPr/>
         </p:nvSpPr>
         <p:spPr>
           <a:xfrm>
-            <a:off x="1353312" y="2999232"/>
-            <a:ext cx="5029200" cy="530352"/>
+            <a:off x="7040880" y="2395728"/>
+            <a:ext cx="4206240" cy="786384"/>
           </a:xfrm>
           <a:prstGeom prst="rect">
             <a:avLst/>
@@ -4592,7 +5558,7 @@
               </a:spcAft>
             </a:pPr>
             <a:r>
-              <a:rPr sz="1200" b="0">
+              <a:rPr sz="1150" b="0">
                 <a:solidFill>
                   <a:srgbClr val="1A1A1A"/>
                 </a:solidFill>
@@ -4605,18 +5571,18 @@
       </p:sp>
       <p:sp>
         <p:nvSpPr>
-          <p:cNvPr id="12" name="Rounded Rectangle 11"/>
+          <p:cNvPr id="14" name="Rounded Rectangle 13"/>
           <p:cNvSpPr/>
           <p:nvPr/>
         </p:nvSpPr>
         <p:spPr>
           <a:xfrm>
-            <a:off x="841248" y="3602736"/>
-            <a:ext cx="5715000" cy="530352"/>
+            <a:off x="841248" y="3328416"/>
+            <a:ext cx="5138928" cy="786384"/>
           </a:xfrm>
           <a:prstGeom prst="roundRect">
             <a:avLst>
-              <a:gd name="adj" fmla="val 6000"/>
+              <a:gd name="adj" fmla="val 7000"/>
             </a:avLst>
           </a:prstGeom>
           <a:solidFill>
@@ -4651,9 +5617,55 @@
           </a:p>
         </p:txBody>
       </p:sp>
+      <p:sp>
+        <p:nvSpPr>
+          <p:cNvPr id="15" name="Rounded Rectangle 14"/>
+          <p:cNvSpPr/>
+          <p:nvPr/>
+        </p:nvSpPr>
+        <p:spPr>
+          <a:xfrm>
+            <a:off x="987552" y="3465576"/>
+            <a:ext cx="512064" cy="512064"/>
+          </a:xfrm>
+          <a:prstGeom prst="roundRect">
+            <a:avLst>
+              <a:gd name="adj" fmla="val 26000"/>
+            </a:avLst>
+          </a:prstGeom>
+          <a:solidFill>
+            <a:srgbClr val="EE0000"/>
+          </a:solidFill>
+          <a:ln>
+            <a:noFill/>
+          </a:ln>
+          <a:effectLst/>
+        </p:spPr>
+        <p:style>
+          <a:lnRef idx="1">
+            <a:schemeClr val="accent1"/>
+          </a:lnRef>
+          <a:fillRef idx="3">
+            <a:schemeClr val="accent1"/>
+          </a:fillRef>
+          <a:effectRef idx="2">
+            <a:schemeClr val="accent1"/>
+          </a:effectRef>
+          <a:fontRef idx="minor">
+            <a:schemeClr val="lt1"/>
+          </a:fontRef>
+        </p:style>
+        <p:txBody>
+          <a:bodyPr rtlCol="0" anchor="ctr"/>
+          <a:lstStyle/>
+          <a:p>
+            <a:pPr algn="ctr"/>
+          </a:p>
+        </p:txBody>
+      </p:sp>
       <p:pic>
         <p:nvPicPr>
-          <p:cNvPr id="13" name="Picture 12" descr="check_steel.png"/>
+          <p:cNvPr id="16" name="Picture 15" descr="check_white.png"/>
           <p:cNvPicPr>
             <a:picLocks noChangeAspect="1"/>
           </p:cNvPicPr>
@@ -4667,8 +5679,8 @@
         </p:blipFill>
         <p:spPr>
           <a:xfrm>
-            <a:off x="987552" y="3749040"/>
-            <a:ext cx="237744" cy="237744"/>
+            <a:off x="1110447" y="3588471"/>
+            <a:ext cx="266273" cy="266273"/>
           </a:xfrm>
           <a:prstGeom prst="rect">
             <a:avLst/>
@@ -4677,14 +5689,14 @@
       </p:pic>
       <p:sp>
         <p:nvSpPr>
-          <p:cNvPr id="14" name="TextBox 13"/>
+          <p:cNvPr id="17" name="TextBox 16"/>
           <p:cNvSpPr txBox="1"/>
           <p:nvPr/>
         </p:nvSpPr>
         <p:spPr>
           <a:xfrm>
-            <a:off x="1353312" y="3602736"/>
-            <a:ext cx="5029200" cy="530352"/>
+            <a:off x="1627632" y="3328416"/>
+            <a:ext cx="4206240" cy="786384"/>
           </a:xfrm>
           <a:prstGeom prst="rect">
             <a:avLst/>
@@ -4709,7 +5721,7 @@
               </a:spcAft>
             </a:pPr>
             <a:r>
-              <a:rPr sz="1200" b="0">
+              <a:rPr sz="1150" b="0">
                 <a:solidFill>
                   <a:srgbClr val="1A1A1A"/>
                 </a:solidFill>
@@ -4722,18 +5734,18 @@
       </p:sp>
       <p:sp>
         <p:nvSpPr>
-          <p:cNvPr id="15" name="Rounded Rectangle 14"/>
+          <p:cNvPr id="18" name="Rounded Rectangle 17"/>
           <p:cNvSpPr/>
           <p:nvPr/>
         </p:nvSpPr>
         <p:spPr>
           <a:xfrm>
-            <a:off x="841248" y="4206240"/>
-            <a:ext cx="5715000" cy="530352"/>
+            <a:off x="6254496" y="3328416"/>
+            <a:ext cx="5138928" cy="786384"/>
           </a:xfrm>
           <a:prstGeom prst="roundRect">
             <a:avLst>
-              <a:gd name="adj" fmla="val 6000"/>
+              <a:gd name="adj" fmla="val 7000"/>
             </a:avLst>
           </a:prstGeom>
           <a:solidFill>
@@ -4768,9 +5780,55 @@
           </a:p>
         </p:txBody>
       </p:sp>
+      <p:sp>
+        <p:nvSpPr>
+          <p:cNvPr id="19" name="Rounded Rectangle 18"/>
+          <p:cNvSpPr/>
+          <p:nvPr/>
+        </p:nvSpPr>
+        <p:spPr>
+          <a:xfrm>
+            <a:off x="6400800" y="3465576"/>
+            <a:ext cx="512064" cy="512064"/>
+          </a:xfrm>
+          <a:prstGeom prst="roundRect">
+            <a:avLst>
+              <a:gd name="adj" fmla="val 26000"/>
+            </a:avLst>
+          </a:prstGeom>
+          <a:solidFill>
+            <a:srgbClr val="EE0000"/>
+          </a:solidFill>
+          <a:ln>
+            <a:noFill/>
+          </a:ln>
+          <a:effectLst/>
+        </p:spPr>
+        <p:style>
+          <a:lnRef idx="1">
+            <a:schemeClr val="accent1"/>
+          </a:lnRef>
+          <a:fillRef idx="3">
+            <a:schemeClr val="accent1"/>
+          </a:fillRef>
+          <a:effectRef idx="2">
+            <a:schemeClr val="accent1"/>
+          </a:effectRef>
+          <a:fontRef idx="minor">
+            <a:schemeClr val="lt1"/>
+          </a:fontRef>
+        </p:style>
+        <p:txBody>
+          <a:bodyPr rtlCol="0" anchor="ctr"/>
+          <a:lstStyle/>
+          <a:p>
+            <a:pPr algn="ctr"/>
+          </a:p>
+        </p:txBody>
+      </p:sp>
       <p:pic>
         <p:nvPicPr>
-          <p:cNvPr id="16" name="Picture 15" descr="check_steel.png"/>
+          <p:cNvPr id="20" name="Picture 19" descr="check_white.png"/>
           <p:cNvPicPr>
             <a:picLocks noChangeAspect="1"/>
           </p:cNvPicPr>
@@ -4784,8 +5842,8 @@
         </p:blipFill>
         <p:spPr>
           <a:xfrm>
-            <a:off x="987552" y="4352544"/>
-            <a:ext cx="237744" cy="237744"/>
+            <a:off x="6523695" y="3588471"/>
+            <a:ext cx="266273" cy="266273"/>
           </a:xfrm>
           <a:prstGeom prst="rect">
             <a:avLst/>
@@ -4794,14 +5852,14 @@
       </p:pic>
       <p:sp>
         <p:nvSpPr>
-          <p:cNvPr id="17" name="TextBox 16"/>
+          <p:cNvPr id="21" name="TextBox 20"/>
           <p:cNvSpPr txBox="1"/>
           <p:nvPr/>
         </p:nvSpPr>
         <p:spPr>
           <a:xfrm>
-            <a:off x="1353312" y="4206240"/>
-            <a:ext cx="5029200" cy="530352"/>
+            <a:off x="7040880" y="3328416"/>
+            <a:ext cx="4206240" cy="786384"/>
           </a:xfrm>
           <a:prstGeom prst="rect">
             <a:avLst/>
@@ -4826,7 +5884,7 @@
               </a:spcAft>
             </a:pPr>
             <a:r>
-              <a:rPr sz="1200" b="0">
+              <a:rPr sz="1150" b="0">
                 <a:solidFill>
                   <a:srgbClr val="1A1A1A"/>
                 </a:solidFill>
@@ -4839,18 +5897,18 @@
       </p:sp>
       <p:sp>
         <p:nvSpPr>
-          <p:cNvPr id="18" name="Rounded Rectangle 17"/>
+          <p:cNvPr id="22" name="Rounded Rectangle 21"/>
           <p:cNvSpPr/>
           <p:nvPr/>
         </p:nvSpPr>
         <p:spPr>
           <a:xfrm>
-            <a:off x="841248" y="4809744"/>
-            <a:ext cx="5715000" cy="530352"/>
+            <a:off x="841248" y="4261104"/>
+            <a:ext cx="5138928" cy="786384"/>
           </a:xfrm>
           <a:prstGeom prst="roundRect">
             <a:avLst>
-              <a:gd name="adj" fmla="val 6000"/>
+              <a:gd name="adj" fmla="val 7000"/>
             </a:avLst>
           </a:prstGeom>
           <a:solidFill>
@@ -4885,9 +5943,55 @@
           </a:p>
         </p:txBody>
       </p:sp>
+      <p:sp>
+        <p:nvSpPr>
+          <p:cNvPr id="23" name="Rounded Rectangle 22"/>
+          <p:cNvSpPr/>
+          <p:nvPr/>
+        </p:nvSpPr>
+        <p:spPr>
+          <a:xfrm>
+            <a:off x="987552" y="4398264"/>
+            <a:ext cx="512064" cy="512064"/>
+          </a:xfrm>
+          <a:prstGeom prst="roundRect">
+            <a:avLst>
+              <a:gd name="adj" fmla="val 26000"/>
+            </a:avLst>
+          </a:prstGeom>
+          <a:solidFill>
+            <a:srgbClr val="EE0000"/>
+          </a:solidFill>
+          <a:ln>
+            <a:noFill/>
+          </a:ln>
+          <a:effectLst/>
+        </p:spPr>
+        <p:style>
+          <a:lnRef idx="1">
+            <a:schemeClr val="accent1"/>
+          </a:lnRef>
+          <a:fillRef idx="3">
+            <a:schemeClr val="accent1"/>
+          </a:fillRef>
+          <a:effectRef idx="2">
+            <a:schemeClr val="accent1"/>
+          </a:effectRef>
+          <a:fontRef idx="minor">
+            <a:schemeClr val="lt1"/>
+          </a:fontRef>
+        </p:style>
+        <p:txBody>
+          <a:bodyPr rtlCol="0" anchor="ctr"/>
+          <a:lstStyle/>
+          <a:p>
+            <a:pPr algn="ctr"/>
+          </a:p>
+        </p:txBody>
+      </p:sp>
       <p:pic>
         <p:nvPicPr>
-          <p:cNvPr id="19" name="Picture 18" descr="check_steel.png"/>
+          <p:cNvPr id="24" name="Picture 23" descr="check_white.png"/>
           <p:cNvPicPr>
             <a:picLocks noChangeAspect="1"/>
           </p:cNvPicPr>
@@ -4901,8 +6005,8 @@
         </p:blipFill>
         <p:spPr>
           <a:xfrm>
-            <a:off x="987552" y="4956048"/>
-            <a:ext cx="237744" cy="237744"/>
+            <a:off x="1110447" y="4521159"/>
+            <a:ext cx="266273" cy="266273"/>
           </a:xfrm>
           <a:prstGeom prst="rect">
             <a:avLst/>
@@ -4911,14 +6015,14 @@
       </p:pic>
       <p:sp>
         <p:nvSpPr>
-          <p:cNvPr id="20" name="TextBox 19"/>
+          <p:cNvPr id="25" name="TextBox 24"/>
           <p:cNvSpPr txBox="1"/>
           <p:nvPr/>
         </p:nvSpPr>
         <p:spPr>
           <a:xfrm>
-            <a:off x="1353312" y="4809744"/>
-            <a:ext cx="5029200" cy="530352"/>
+            <a:off x="1627632" y="4261104"/>
+            <a:ext cx="4206240" cy="786384"/>
           </a:xfrm>
           <a:prstGeom prst="rect">
             <a:avLst/>
@@ -4943,221 +6047,13 @@
               </a:spcAft>
             </a:pPr>
             <a:r>
-              <a:rPr sz="1200" b="0">
+              <a:rPr sz="1150" b="0">
                 <a:solidFill>
                   <a:srgbClr val="1A1A1A"/>
                 </a:solidFill>
                 <a:latin typeface="Red Hat Text"/>
               </a:rPr>
               <a:t>The network is a control plane you configure</a:t>
-            </a:r>
-          </a:p>
-        </p:txBody>
-      </p:sp>
-      <p:sp>
-        <p:nvSpPr>
-          <p:cNvPr id="21" name="Rounded Rectangle 20"/>
-          <p:cNvSpPr/>
-          <p:nvPr/>
-        </p:nvSpPr>
-        <p:spPr>
-          <a:xfrm>
-            <a:off x="6812280" y="2395728"/>
-            <a:ext cx="4538167" cy="2944368"/>
-          </a:xfrm>
-          <a:prstGeom prst="roundRect">
-            <a:avLst>
-              <a:gd name="adj" fmla="val 4000"/>
-            </a:avLst>
-          </a:prstGeom>
-          <a:solidFill>
-            <a:srgbClr val="FFFFFF"/>
-          </a:solidFill>
-          <a:ln w="15240">
-            <a:solidFill>
-              <a:srgbClr val="DDE1E6"/>
-            </a:solidFill>
-          </a:ln>
-          <a:effectLst/>
-        </p:spPr>
-        <p:style>
-          <a:lnRef idx="1">
-            <a:schemeClr val="accent1"/>
-          </a:lnRef>
-          <a:fillRef idx="3">
-            <a:schemeClr val="accent1"/>
-          </a:fillRef>
-          <a:effectRef idx="2">
-            <a:schemeClr val="accent1"/>
-          </a:effectRef>
-          <a:fontRef idx="minor">
-            <a:schemeClr val="lt1"/>
-          </a:fontRef>
-        </p:style>
-        <p:txBody>
-          <a:bodyPr rtlCol="0" anchor="ctr"/>
-          <a:lstStyle/>
-          <a:p>
-            <a:pPr algn="ctr"/>
-          </a:p>
-        </p:txBody>
-      </p:sp>
-      <p:sp>
-        <p:nvSpPr>
-          <p:cNvPr id="22" name="Rounded Rectangle 21"/>
-          <p:cNvSpPr/>
-          <p:nvPr/>
-        </p:nvSpPr>
-        <p:spPr>
-          <a:xfrm>
-            <a:off x="7013448" y="2596896"/>
-            <a:ext cx="1298448" cy="310896"/>
-          </a:xfrm>
-          <a:prstGeom prst="roundRect">
-            <a:avLst>
-              <a:gd name="adj" fmla="val 50000"/>
-            </a:avLst>
-          </a:prstGeom>
-          <a:solidFill>
-            <a:srgbClr val="FCECEC"/>
-          </a:solidFill>
-          <a:ln>
-            <a:noFill/>
-          </a:ln>
-          <a:effectLst/>
-        </p:spPr>
-        <p:style>
-          <a:lnRef idx="1">
-            <a:schemeClr val="accent1"/>
-          </a:lnRef>
-          <a:fillRef idx="3">
-            <a:schemeClr val="accent1"/>
-          </a:fillRef>
-          <a:effectRef idx="2">
-            <a:schemeClr val="accent1"/>
-          </a:effectRef>
-          <a:fontRef idx="minor">
-            <a:schemeClr val="lt1"/>
-          </a:fontRef>
-        </p:style>
-        <p:txBody>
-          <a:bodyPr rtlCol="0" anchor="ctr"/>
-          <a:lstStyle/>
-          <a:p>
-            <a:pPr algn="ctr"/>
-          </a:p>
-        </p:txBody>
-      </p:sp>
-      <p:sp>
-        <p:nvSpPr>
-          <p:cNvPr id="23" name="TextBox 22"/>
-          <p:cNvSpPr txBox="1"/>
-          <p:nvPr/>
-        </p:nvSpPr>
-        <p:spPr>
-          <a:xfrm>
-            <a:off x="7013448" y="2596896"/>
-            <a:ext cx="1298448" cy="310896"/>
-          </a:xfrm>
-          <a:prstGeom prst="rect">
-            <a:avLst/>
-          </a:prstGeom>
-          <a:noFill/>
-        </p:spPr>
-        <p:txBody>
-          <a:bodyPr wrap="none" anchor="ctr" lIns="0" rIns="0" tIns="0" bIns="0">
-            <a:spAutoFit/>
-          </a:bodyPr>
-          <a:lstStyle/>
-          <a:p>
-            <a:pPr algn="ctr">
-              <a:lnSpc>
-                <a:spcPct val="106000"/>
-              </a:lnSpc>
-              <a:spcBef>
-                <a:spcPts val="0"/>
-              </a:spcBef>
-              <a:spcAft>
-                <a:spcPts val="0"/>
-              </a:spcAft>
-            </a:pPr>
-            <a:r>
-              <a:rPr sz="850" b="1">
-                <a:solidFill>
-                  <a:srgbClr val="B80000"/>
-                </a:solidFill>
-                <a:latin typeface="Red Hat Display"/>
-              </a:rPr>
-              <a:t>MEDIA PASS</a:t>
-            </a:r>
-          </a:p>
-        </p:txBody>
-      </p:sp>
-      <p:pic>
-        <p:nvPicPr>
-          <p:cNvPr id="24" name="Picture 23" descr="eye_slate.png"/>
-          <p:cNvPicPr>
-            <a:picLocks noChangeAspect="1"/>
-          </p:cNvPicPr>
-          <p:nvPr/>
-        </p:nvPicPr>
-        <p:blipFill>
-          <a:blip r:embed="rId4"/>
-          <a:stretch>
-            <a:fillRect/>
-          </a:stretch>
-        </p:blipFill>
-        <p:spPr>
-          <a:xfrm>
-            <a:off x="8843619" y="3108960"/>
-            <a:ext cx="475488" cy="475488"/>
-          </a:xfrm>
-          <a:prstGeom prst="rect">
-            <a:avLst/>
-          </a:prstGeom>
-        </p:spPr>
-      </p:pic>
-      <p:sp>
-        <p:nvSpPr>
-          <p:cNvPr id="25" name="TextBox 24"/>
-          <p:cNvSpPr txBox="1"/>
-          <p:nvPr/>
-        </p:nvSpPr>
-        <p:spPr>
-          <a:xfrm>
-            <a:off x="7050024" y="3721608"/>
-            <a:ext cx="4062679" cy="1481328"/>
-          </a:xfrm>
-          <a:prstGeom prst="rect">
-            <a:avLst/>
-          </a:prstGeom>
-          <a:noFill/>
-        </p:spPr>
-        <p:txBody>
-          <a:bodyPr wrap="square" anchor="t" lIns="0" rIns="0" tIns="0" bIns="0">
-            <a:spAutoFit/>
-          </a:bodyPr>
-          <a:lstStyle/>
-          <a:p>
-            <a:pPr algn="l">
-              <a:lnSpc>
-                <a:spcPct val="120000"/>
-              </a:lnSpc>
-              <a:spcBef>
-                <a:spcPts val="0"/>
-              </a:spcBef>
-              <a:spcAft>
-                <a:spcPts val="0"/>
-              </a:spcAft>
-            </a:pPr>
-            <a:r>
-              <a:rPr sz="950" b="0">
-                <a:solidFill>
-                  <a:srgbClr val="8A9099"/>
-                </a:solidFill>
-                <a:latin typeface="Red Hat Text"/>
-              </a:rPr>
-              <a:t>A three-tier app box (web/API/db) with "everything talks to everything" arrows in grey, inside a cluster frame with no external door — the "before" picture.</a:t>
             </a:r>
           </a:p>
         </p:txBody>
@@ -5465,7 +6361,7 @@
         <p:spPr>
           <a:xfrm>
             <a:off x="841248" y="2395728"/>
-            <a:ext cx="5715000" cy="530352"/>
+            <a:ext cx="4160520" cy="475488"/>
           </a:xfrm>
           <a:prstGeom prst="roundRect">
             <a:avLst>
@@ -5520,8 +6416,8 @@
         </p:blipFill>
         <p:spPr>
           <a:xfrm>
-            <a:off x="987552" y="2542032"/>
-            <a:ext cx="237744" cy="237744"/>
+            <a:off x="969264" y="2532888"/>
+            <a:ext cx="201168" cy="201168"/>
           </a:xfrm>
           <a:prstGeom prst="rect">
             <a:avLst/>
@@ -5536,8 +6432,8 @@
         </p:nvSpPr>
         <p:spPr>
           <a:xfrm>
-            <a:off x="1353312" y="2395728"/>
-            <a:ext cx="5029200" cy="530352"/>
+            <a:off x="1280160" y="2395728"/>
+            <a:ext cx="3593591" cy="475488"/>
           </a:xfrm>
           <a:prstGeom prst="rect">
             <a:avLst/>
@@ -5562,7 +6458,7 @@
               </a:spcAft>
             </a:pPr>
             <a:r>
-              <a:rPr sz="1200" b="0">
+              <a:rPr sz="1050" b="0">
                 <a:solidFill>
                   <a:srgbClr val="1A1A1A"/>
                 </a:solidFill>
@@ -5581,8 +6477,8 @@
         </p:nvSpPr>
         <p:spPr>
           <a:xfrm>
-            <a:off x="841248" y="2999232"/>
-            <a:ext cx="5715000" cy="530352"/>
+            <a:off x="841248" y="2944368"/>
+            <a:ext cx="4160520" cy="475488"/>
           </a:xfrm>
           <a:prstGeom prst="roundRect">
             <a:avLst>
@@ -5637,8 +6533,8 @@
         </p:blipFill>
         <p:spPr>
           <a:xfrm>
-            <a:off x="987552" y="3145536"/>
-            <a:ext cx="237744" cy="237744"/>
+            <a:off x="969264" y="3081528"/>
+            <a:ext cx="201168" cy="201168"/>
           </a:xfrm>
           <a:prstGeom prst="rect">
             <a:avLst/>
@@ -5653,8 +6549,8 @@
         </p:nvSpPr>
         <p:spPr>
           <a:xfrm>
-            <a:off x="1353312" y="2999232"/>
-            <a:ext cx="5029200" cy="530352"/>
+            <a:off x="1280160" y="2944368"/>
+            <a:ext cx="3593591" cy="475488"/>
           </a:xfrm>
           <a:prstGeom prst="rect">
             <a:avLst/>
@@ -5679,7 +6575,7 @@
               </a:spcAft>
             </a:pPr>
             <a:r>
-              <a:rPr sz="1200" b="0">
+              <a:rPr sz="1050" b="0">
                 <a:solidFill>
                   <a:srgbClr val="1A1A1A"/>
                 </a:solidFill>
@@ -5698,8 +6594,8 @@
         </p:nvSpPr>
         <p:spPr>
           <a:xfrm>
-            <a:off x="841248" y="3602736"/>
-            <a:ext cx="5715000" cy="530352"/>
+            <a:off x="841248" y="3493008"/>
+            <a:ext cx="4160520" cy="475488"/>
           </a:xfrm>
           <a:prstGeom prst="roundRect">
             <a:avLst>
@@ -5754,8 +6650,8 @@
         </p:blipFill>
         <p:spPr>
           <a:xfrm>
-            <a:off x="987552" y="3749040"/>
-            <a:ext cx="237744" cy="237744"/>
+            <a:off x="969264" y="3630168"/>
+            <a:ext cx="201168" cy="201168"/>
           </a:xfrm>
           <a:prstGeom prst="rect">
             <a:avLst/>
@@ -5770,8 +6666,8 @@
         </p:nvSpPr>
         <p:spPr>
           <a:xfrm>
-            <a:off x="1353312" y="3602736"/>
-            <a:ext cx="5029200" cy="530352"/>
+            <a:off x="1280160" y="3493008"/>
+            <a:ext cx="3593591" cy="475488"/>
           </a:xfrm>
           <a:prstGeom prst="rect">
             <a:avLst/>
@@ -5796,7 +6692,7 @@
               </a:spcAft>
             </a:pPr>
             <a:r>
-              <a:rPr sz="1200" b="0">
+              <a:rPr sz="1050" b="0">
                 <a:solidFill>
                   <a:srgbClr val="1A1A1A"/>
                 </a:solidFill>
@@ -5815,8 +6711,8 @@
         </p:nvSpPr>
         <p:spPr>
           <a:xfrm>
-            <a:off x="841248" y="4206240"/>
-            <a:ext cx="5715000" cy="530352"/>
+            <a:off x="841248" y="4041648"/>
+            <a:ext cx="4160520" cy="475488"/>
           </a:xfrm>
           <a:prstGeom prst="roundRect">
             <a:avLst>
@@ -5871,8 +6767,8 @@
         </p:blipFill>
         <p:spPr>
           <a:xfrm>
-            <a:off x="987552" y="4352544"/>
-            <a:ext cx="237744" cy="237744"/>
+            <a:off x="969264" y="4178807"/>
+            <a:ext cx="201168" cy="201168"/>
           </a:xfrm>
           <a:prstGeom prst="rect">
             <a:avLst/>
@@ -5887,8 +6783,8 @@
         </p:nvSpPr>
         <p:spPr>
           <a:xfrm>
-            <a:off x="1353312" y="4206240"/>
-            <a:ext cx="5029200" cy="530352"/>
+            <a:off x="1280160" y="4041648"/>
+            <a:ext cx="3593591" cy="475488"/>
           </a:xfrm>
           <a:prstGeom prst="rect">
             <a:avLst/>
@@ -5913,7 +6809,7 @@
               </a:spcAft>
             </a:pPr>
             <a:r>
-              <a:rPr sz="1200" b="0">
+              <a:rPr sz="1050" b="0">
                 <a:solidFill>
                   <a:srgbClr val="1A1A1A"/>
                 </a:solidFill>
@@ -5932,8 +6828,8 @@
         </p:nvSpPr>
         <p:spPr>
           <a:xfrm>
-            <a:off x="841248" y="4809744"/>
-            <a:ext cx="5715000" cy="530352"/>
+            <a:off x="841248" y="4590288"/>
+            <a:ext cx="4160520" cy="475488"/>
           </a:xfrm>
           <a:prstGeom prst="roundRect">
             <a:avLst>
@@ -5988,8 +6884,8 @@
         </p:blipFill>
         <p:spPr>
           <a:xfrm>
-            <a:off x="987552" y="4956048"/>
-            <a:ext cx="237744" cy="237744"/>
+            <a:off x="969264" y="4727447"/>
+            <a:ext cx="201168" cy="201168"/>
           </a:xfrm>
           <a:prstGeom prst="rect">
             <a:avLst/>
@@ -6004,8 +6900,8 @@
         </p:nvSpPr>
         <p:spPr>
           <a:xfrm>
-            <a:off x="1353312" y="4809744"/>
-            <a:ext cx="5029200" cy="530352"/>
+            <a:off x="1280160" y="4590288"/>
+            <a:ext cx="3593591" cy="475488"/>
           </a:xfrm>
           <a:prstGeom prst="rect">
             <a:avLst/>
@@ -6030,7 +6926,7 @@
               </a:spcAft>
             </a:pPr>
             <a:r>
-              <a:rPr sz="1200" b="0">
+              <a:rPr sz="1050" b="0">
                 <a:solidFill>
                   <a:srgbClr val="1A1A1A"/>
                 </a:solidFill>
@@ -6049,8 +6945,8 @@
         </p:nvSpPr>
         <p:spPr>
           <a:xfrm>
-            <a:off x="6812280" y="2395728"/>
-            <a:ext cx="4538167" cy="2944368"/>
+            <a:off x="5385816" y="2395728"/>
+            <a:ext cx="3236286" cy="3657599"/>
           </a:xfrm>
           <a:prstGeom prst="roundRect">
             <a:avLst>
@@ -6089,100 +6985,9 @@
           </a:p>
         </p:txBody>
       </p:sp>
-      <p:sp>
-        <p:nvSpPr>
-          <p:cNvPr id="22" name="Rounded Rectangle 21"/>
-          <p:cNvSpPr/>
-          <p:nvPr/>
-        </p:nvSpPr>
-        <p:spPr>
-          <a:xfrm>
-            <a:off x="7013448" y="2596896"/>
-            <a:ext cx="1298448" cy="310896"/>
-          </a:xfrm>
-          <a:prstGeom prst="roundRect">
-            <a:avLst>
-              <a:gd name="adj" fmla="val 50000"/>
-            </a:avLst>
-          </a:prstGeom>
-          <a:solidFill>
-            <a:srgbClr val="FCECEC"/>
-          </a:solidFill>
-          <a:ln>
-            <a:noFill/>
-          </a:ln>
-          <a:effectLst/>
-        </p:spPr>
-        <p:style>
-          <a:lnRef idx="1">
-            <a:schemeClr val="accent1"/>
-          </a:lnRef>
-          <a:fillRef idx="3">
-            <a:schemeClr val="accent1"/>
-          </a:fillRef>
-          <a:effectRef idx="2">
-            <a:schemeClr val="accent1"/>
-          </a:effectRef>
-          <a:fontRef idx="minor">
-            <a:schemeClr val="lt1"/>
-          </a:fontRef>
-        </p:style>
-        <p:txBody>
-          <a:bodyPr rtlCol="0" anchor="ctr"/>
-          <a:lstStyle/>
-          <a:p>
-            <a:pPr algn="ctr"/>
-          </a:p>
-        </p:txBody>
-      </p:sp>
-      <p:sp>
-        <p:nvSpPr>
-          <p:cNvPr id="23" name="TextBox 22"/>
-          <p:cNvSpPr txBox="1"/>
-          <p:nvPr/>
-        </p:nvSpPr>
-        <p:spPr>
-          <a:xfrm>
-            <a:off x="7013448" y="2596896"/>
-            <a:ext cx="1298448" cy="310896"/>
-          </a:xfrm>
-          <a:prstGeom prst="rect">
-            <a:avLst/>
-          </a:prstGeom>
-          <a:noFill/>
-        </p:spPr>
-        <p:txBody>
-          <a:bodyPr wrap="none" anchor="ctr" lIns="0" rIns="0" tIns="0" bIns="0">
-            <a:spAutoFit/>
-          </a:bodyPr>
-          <a:lstStyle/>
-          <a:p>
-            <a:pPr algn="ctr">
-              <a:lnSpc>
-                <a:spcPct val="106000"/>
-              </a:lnSpc>
-              <a:spcBef>
-                <a:spcPts val="0"/>
-              </a:spcBef>
-              <a:spcAft>
-                <a:spcPts val="0"/>
-              </a:spcAft>
-            </a:pPr>
-            <a:r>
-              <a:rPr sz="850" b="1">
-                <a:solidFill>
-                  <a:srgbClr val="B80000"/>
-                </a:solidFill>
-                <a:latin typeface="Red Hat Display"/>
-              </a:rPr>
-              <a:t>MEDIA PASS</a:t>
-            </a:r>
-          </a:p>
-        </p:txBody>
-      </p:sp>
       <p:pic>
         <p:nvPicPr>
-          <p:cNvPr id="24" name="Picture 23" descr="eye_slate.png"/>
+          <p:cNvPr id="22" name="Picture 21" descr="01-traffic-directions.png"/>
           <p:cNvPicPr>
             <a:picLocks noChangeAspect="1"/>
           </p:cNvPicPr>
@@ -6196,62 +7001,17 @@
         </p:blipFill>
         <p:spPr>
           <a:xfrm>
-            <a:off x="8843619" y="3108960"/>
-            <a:ext cx="475488" cy="475488"/>
+            <a:off x="5532120" y="2542032"/>
+            <a:ext cx="2943678" cy="3364991"/>
           </a:xfrm>
           <a:prstGeom prst="rect">
             <a:avLst/>
           </a:prstGeom>
         </p:spPr>
       </p:pic>
-      <p:sp>
-        <p:nvSpPr>
-          <p:cNvPr id="25" name="TextBox 24"/>
-          <p:cNvSpPr txBox="1"/>
-          <p:nvPr/>
-        </p:nvSpPr>
-        <p:spPr>
-          <a:xfrm>
-            <a:off x="7050024" y="3721608"/>
-            <a:ext cx="4062679" cy="1481328"/>
-          </a:xfrm>
-          <a:prstGeom prst="rect">
-            <a:avLst/>
-          </a:prstGeom>
-          <a:noFill/>
-        </p:spPr>
-        <p:txBody>
-          <a:bodyPr wrap="square" anchor="t" lIns="0" rIns="0" tIns="0" bIns="0">
-            <a:spAutoFit/>
-          </a:bodyPr>
-          <a:lstStyle/>
-          <a:p>
-            <a:pPr algn="l">
-              <a:lnSpc>
-                <a:spcPct val="120000"/>
-              </a:lnSpc>
-              <a:spcBef>
-                <a:spcPts val="0"/>
-              </a:spcBef>
-              <a:spcAft>
-                <a:spcPts val="0"/>
-              </a:spcAft>
-            </a:pPr>
-            <a:r>
-              <a:rPr sz="950" b="0">
-                <a:solidFill>
-                  <a:srgbClr val="8A9099"/>
-                </a:solidFill>
-                <a:latin typeface="Red Hat Text"/>
-              </a:rPr>
-              <a:t>Reuse concept diagram networking-dev-devops-...-01-traffic-directions.svg — outside→web (north-south, exposure) and web→api→db (east-west, policy).</a:t>
-            </a:r>
-          </a:p>
-        </p:txBody>
-      </p:sp>
       <p:cxnSp>
         <p:nvCxnSpPr>
-          <p:cNvPr id="26" name="Connector 25"/>
+          <p:cNvPr id="23" name="Connector 22"/>
           <p:cNvCxnSpPr/>
           <p:nvPr/>
         </p:nvCxnSpPr>
@@ -6287,7 +7047,7 @@
       </p:cxnSp>
       <p:sp>
         <p:nvSpPr>
-          <p:cNvPr id="27" name="TextBox 26"/>
+          <p:cNvPr id="24" name="TextBox 23"/>
           <p:cNvSpPr txBox="1"/>
           <p:nvPr/>
         </p:nvSpPr>
@@ -6332,7 +7092,7 @@
       </p:sp>
       <p:sp>
         <p:nvSpPr>
-          <p:cNvPr id="28" name="TextBox 27"/>
+          <p:cNvPr id="25" name="TextBox 24"/>
           <p:cNvSpPr txBox="1"/>
           <p:nvPr/>
         </p:nvSpPr>
@@ -6552,11 +7312,11 @@
         <p:spPr>
           <a:xfrm>
             <a:off x="841248" y="2395728"/>
-            <a:ext cx="5715000" cy="530352"/>
+            <a:ext cx="5138928" cy="786384"/>
           </a:xfrm>
           <a:prstGeom prst="roundRect">
             <a:avLst>
-              <a:gd name="adj" fmla="val 6000"/>
+              <a:gd name="adj" fmla="val 7000"/>
             </a:avLst>
           </a:prstGeom>
           <a:solidFill>
@@ -6591,9 +7351,55 @@
           </a:p>
         </p:txBody>
       </p:sp>
+      <p:sp>
+        <p:nvSpPr>
+          <p:cNvPr id="7" name="Rounded Rectangle 6"/>
+          <p:cNvSpPr/>
+          <p:nvPr/>
+        </p:nvSpPr>
+        <p:spPr>
+          <a:xfrm>
+            <a:off x="987552" y="2532888"/>
+            <a:ext cx="512064" cy="512064"/>
+          </a:xfrm>
+          <a:prstGeom prst="roundRect">
+            <a:avLst>
+              <a:gd name="adj" fmla="val 26000"/>
+            </a:avLst>
+          </a:prstGeom>
+          <a:solidFill>
+            <a:srgbClr val="EE0000"/>
+          </a:solidFill>
+          <a:ln>
+            <a:noFill/>
+          </a:ln>
+          <a:effectLst/>
+        </p:spPr>
+        <p:style>
+          <a:lnRef idx="1">
+            <a:schemeClr val="accent1"/>
+          </a:lnRef>
+          <a:fillRef idx="3">
+            <a:schemeClr val="accent1"/>
+          </a:fillRef>
+          <a:effectRef idx="2">
+            <a:schemeClr val="accent1"/>
+          </a:effectRef>
+          <a:fontRef idx="minor">
+            <a:schemeClr val="lt1"/>
+          </a:fontRef>
+        </p:style>
+        <p:txBody>
+          <a:bodyPr rtlCol="0" anchor="ctr"/>
+          <a:lstStyle/>
+          <a:p>
+            <a:pPr algn="ctr"/>
+          </a:p>
+        </p:txBody>
+      </p:sp>
       <p:pic>
         <p:nvPicPr>
-          <p:cNvPr id="7" name="Picture 6" descr="check_steel.png"/>
+          <p:cNvPr id="8" name="Picture 7" descr="check_white.png"/>
           <p:cNvPicPr>
             <a:picLocks noChangeAspect="1"/>
           </p:cNvPicPr>
@@ -6607,8 +7413,8 @@
         </p:blipFill>
         <p:spPr>
           <a:xfrm>
-            <a:off x="987552" y="2542032"/>
-            <a:ext cx="237744" cy="237744"/>
+            <a:off x="1110447" y="2655783"/>
+            <a:ext cx="266273" cy="266273"/>
           </a:xfrm>
           <a:prstGeom prst="rect">
             <a:avLst/>
@@ -6617,14 +7423,14 @@
       </p:pic>
       <p:sp>
         <p:nvSpPr>
-          <p:cNvPr id="8" name="TextBox 7"/>
+          <p:cNvPr id="9" name="TextBox 8"/>
           <p:cNvSpPr txBox="1"/>
           <p:nvPr/>
         </p:nvSpPr>
         <p:spPr>
           <a:xfrm>
-            <a:off x="1353312" y="2395728"/>
-            <a:ext cx="5029200" cy="530352"/>
+            <a:off x="1627632" y="2395728"/>
+            <a:ext cx="4206240" cy="786384"/>
           </a:xfrm>
           <a:prstGeom prst="rect">
             <a:avLst/>
@@ -6649,7 +7455,7 @@
               </a:spcAft>
             </a:pPr>
             <a:r>
-              <a:rPr sz="1200" b="0">
+              <a:rPr sz="1150" b="0">
                 <a:solidFill>
                   <a:srgbClr val="1A1A1A"/>
                 </a:solidFill>
@@ -6662,18 +7468,18 @@
       </p:sp>
       <p:sp>
         <p:nvSpPr>
-          <p:cNvPr id="9" name="Rounded Rectangle 8"/>
+          <p:cNvPr id="10" name="Rounded Rectangle 9"/>
           <p:cNvSpPr/>
           <p:nvPr/>
         </p:nvSpPr>
         <p:spPr>
           <a:xfrm>
-            <a:off x="841248" y="2999232"/>
-            <a:ext cx="5715000" cy="530352"/>
+            <a:off x="6254496" y="2395728"/>
+            <a:ext cx="5138928" cy="786384"/>
           </a:xfrm>
           <a:prstGeom prst="roundRect">
             <a:avLst>
-              <a:gd name="adj" fmla="val 6000"/>
+              <a:gd name="adj" fmla="val 7000"/>
             </a:avLst>
           </a:prstGeom>
           <a:solidFill>
@@ -6708,9 +7514,55 @@
           </a:p>
         </p:txBody>
       </p:sp>
+      <p:sp>
+        <p:nvSpPr>
+          <p:cNvPr id="11" name="Rounded Rectangle 10"/>
+          <p:cNvSpPr/>
+          <p:nvPr/>
+        </p:nvSpPr>
+        <p:spPr>
+          <a:xfrm>
+            <a:off x="6400800" y="2532888"/>
+            <a:ext cx="512064" cy="512064"/>
+          </a:xfrm>
+          <a:prstGeom prst="roundRect">
+            <a:avLst>
+              <a:gd name="adj" fmla="val 26000"/>
+            </a:avLst>
+          </a:prstGeom>
+          <a:solidFill>
+            <a:srgbClr val="EE0000"/>
+          </a:solidFill>
+          <a:ln>
+            <a:noFill/>
+          </a:ln>
+          <a:effectLst/>
+        </p:spPr>
+        <p:style>
+          <a:lnRef idx="1">
+            <a:schemeClr val="accent1"/>
+          </a:lnRef>
+          <a:fillRef idx="3">
+            <a:schemeClr val="accent1"/>
+          </a:fillRef>
+          <a:effectRef idx="2">
+            <a:schemeClr val="accent1"/>
+          </a:effectRef>
+          <a:fontRef idx="minor">
+            <a:schemeClr val="lt1"/>
+          </a:fontRef>
+        </p:style>
+        <p:txBody>
+          <a:bodyPr rtlCol="0" anchor="ctr"/>
+          <a:lstStyle/>
+          <a:p>
+            <a:pPr algn="ctr"/>
+          </a:p>
+        </p:txBody>
+      </p:sp>
       <p:pic>
         <p:nvPicPr>
-          <p:cNvPr id="10" name="Picture 9" descr="check_steel.png"/>
+          <p:cNvPr id="12" name="Picture 11" descr="check_white.png"/>
           <p:cNvPicPr>
             <a:picLocks noChangeAspect="1"/>
           </p:cNvPicPr>
@@ -6724,8 +7576,8 @@
         </p:blipFill>
         <p:spPr>
           <a:xfrm>
-            <a:off x="987552" y="3145536"/>
-            <a:ext cx="237744" cy="237744"/>
+            <a:off x="6523695" y="2655783"/>
+            <a:ext cx="266273" cy="266273"/>
           </a:xfrm>
           <a:prstGeom prst="rect">
             <a:avLst/>
@@ -6734,14 +7586,14 @@
       </p:pic>
       <p:sp>
         <p:nvSpPr>
-          <p:cNvPr id="11" name="TextBox 10"/>
+          <p:cNvPr id="13" name="TextBox 12"/>
           <p:cNvSpPr txBox="1"/>
           <p:nvPr/>
         </p:nvSpPr>
         <p:spPr>
           <a:xfrm>
-            <a:off x="1353312" y="2999232"/>
-            <a:ext cx="5029200" cy="530352"/>
+            <a:off x="7040880" y="2395728"/>
+            <a:ext cx="4206240" cy="786384"/>
           </a:xfrm>
           <a:prstGeom prst="rect">
             <a:avLst/>
@@ -6766,7 +7618,7 @@
               </a:spcAft>
             </a:pPr>
             <a:r>
-              <a:rPr sz="1200" b="0">
+              <a:rPr sz="1150" b="0">
                 <a:solidFill>
                   <a:srgbClr val="1A1A1A"/>
                 </a:solidFill>
@@ -6779,18 +7631,18 @@
       </p:sp>
       <p:sp>
         <p:nvSpPr>
-          <p:cNvPr id="12" name="Rounded Rectangle 11"/>
+          <p:cNvPr id="14" name="Rounded Rectangle 13"/>
           <p:cNvSpPr/>
           <p:nvPr/>
         </p:nvSpPr>
         <p:spPr>
           <a:xfrm>
-            <a:off x="841248" y="3602736"/>
-            <a:ext cx="5715000" cy="530352"/>
+            <a:off x="841248" y="3328416"/>
+            <a:ext cx="5138928" cy="786384"/>
           </a:xfrm>
           <a:prstGeom prst="roundRect">
             <a:avLst>
-              <a:gd name="adj" fmla="val 6000"/>
+              <a:gd name="adj" fmla="val 7000"/>
             </a:avLst>
           </a:prstGeom>
           <a:solidFill>
@@ -6825,9 +7677,55 @@
           </a:p>
         </p:txBody>
       </p:sp>
+      <p:sp>
+        <p:nvSpPr>
+          <p:cNvPr id="15" name="Rounded Rectangle 14"/>
+          <p:cNvSpPr/>
+          <p:nvPr/>
+        </p:nvSpPr>
+        <p:spPr>
+          <a:xfrm>
+            <a:off x="987552" y="3465576"/>
+            <a:ext cx="512064" cy="512064"/>
+          </a:xfrm>
+          <a:prstGeom prst="roundRect">
+            <a:avLst>
+              <a:gd name="adj" fmla="val 26000"/>
+            </a:avLst>
+          </a:prstGeom>
+          <a:solidFill>
+            <a:srgbClr val="EE0000"/>
+          </a:solidFill>
+          <a:ln>
+            <a:noFill/>
+          </a:ln>
+          <a:effectLst/>
+        </p:spPr>
+        <p:style>
+          <a:lnRef idx="1">
+            <a:schemeClr val="accent1"/>
+          </a:lnRef>
+          <a:fillRef idx="3">
+            <a:schemeClr val="accent1"/>
+          </a:fillRef>
+          <a:effectRef idx="2">
+            <a:schemeClr val="accent1"/>
+          </a:effectRef>
+          <a:fontRef idx="minor">
+            <a:schemeClr val="lt1"/>
+          </a:fontRef>
+        </p:style>
+        <p:txBody>
+          <a:bodyPr rtlCol="0" anchor="ctr"/>
+          <a:lstStyle/>
+          <a:p>
+            <a:pPr algn="ctr"/>
+          </a:p>
+        </p:txBody>
+      </p:sp>
       <p:pic>
         <p:nvPicPr>
-          <p:cNvPr id="13" name="Picture 12" descr="check_steel.png"/>
+          <p:cNvPr id="16" name="Picture 15" descr="check_white.png"/>
           <p:cNvPicPr>
             <a:picLocks noChangeAspect="1"/>
           </p:cNvPicPr>
@@ -6841,8 +7739,8 @@
         </p:blipFill>
         <p:spPr>
           <a:xfrm>
-            <a:off x="987552" y="3749040"/>
-            <a:ext cx="237744" cy="237744"/>
+            <a:off x="1110447" y="3588471"/>
+            <a:ext cx="266273" cy="266273"/>
           </a:xfrm>
           <a:prstGeom prst="rect">
             <a:avLst/>
@@ -6851,14 +7749,14 @@
       </p:pic>
       <p:sp>
         <p:nvSpPr>
-          <p:cNvPr id="14" name="TextBox 13"/>
+          <p:cNvPr id="17" name="TextBox 16"/>
           <p:cNvSpPr txBox="1"/>
           <p:nvPr/>
         </p:nvSpPr>
         <p:spPr>
           <a:xfrm>
-            <a:off x="1353312" y="3602736"/>
-            <a:ext cx="5029200" cy="530352"/>
+            <a:off x="1627632" y="3328416"/>
+            <a:ext cx="4206240" cy="786384"/>
           </a:xfrm>
           <a:prstGeom prst="rect">
             <a:avLst/>
@@ -6883,7 +7781,7 @@
               </a:spcAft>
             </a:pPr>
             <a:r>
-              <a:rPr sz="1200" b="0">
+              <a:rPr sz="1150" b="0">
                 <a:solidFill>
                   <a:srgbClr val="1A1A1A"/>
                 </a:solidFill>
@@ -6896,18 +7794,18 @@
       </p:sp>
       <p:sp>
         <p:nvSpPr>
-          <p:cNvPr id="15" name="Rounded Rectangle 14"/>
+          <p:cNvPr id="18" name="Rounded Rectangle 17"/>
           <p:cNvSpPr/>
           <p:nvPr/>
         </p:nvSpPr>
         <p:spPr>
           <a:xfrm>
-            <a:off x="841248" y="4206240"/>
-            <a:ext cx="5715000" cy="530352"/>
+            <a:off x="6254496" y="3328416"/>
+            <a:ext cx="5138928" cy="786384"/>
           </a:xfrm>
           <a:prstGeom prst="roundRect">
             <a:avLst>
-              <a:gd name="adj" fmla="val 6000"/>
+              <a:gd name="adj" fmla="val 7000"/>
             </a:avLst>
           </a:prstGeom>
           <a:solidFill>
@@ -6942,9 +7840,55 @@
           </a:p>
         </p:txBody>
       </p:sp>
+      <p:sp>
+        <p:nvSpPr>
+          <p:cNvPr id="19" name="Rounded Rectangle 18"/>
+          <p:cNvSpPr/>
+          <p:nvPr/>
+        </p:nvSpPr>
+        <p:spPr>
+          <a:xfrm>
+            <a:off x="6400800" y="3465576"/>
+            <a:ext cx="512064" cy="512064"/>
+          </a:xfrm>
+          <a:prstGeom prst="roundRect">
+            <a:avLst>
+              <a:gd name="adj" fmla="val 26000"/>
+            </a:avLst>
+          </a:prstGeom>
+          <a:solidFill>
+            <a:srgbClr val="EE0000"/>
+          </a:solidFill>
+          <a:ln>
+            <a:noFill/>
+          </a:ln>
+          <a:effectLst/>
+        </p:spPr>
+        <p:style>
+          <a:lnRef idx="1">
+            <a:schemeClr val="accent1"/>
+          </a:lnRef>
+          <a:fillRef idx="3">
+            <a:schemeClr val="accent1"/>
+          </a:fillRef>
+          <a:effectRef idx="2">
+            <a:schemeClr val="accent1"/>
+          </a:effectRef>
+          <a:fontRef idx="minor">
+            <a:schemeClr val="lt1"/>
+          </a:fontRef>
+        </p:style>
+        <p:txBody>
+          <a:bodyPr rtlCol="0" anchor="ctr"/>
+          <a:lstStyle/>
+          <a:p>
+            <a:pPr algn="ctr"/>
+          </a:p>
+        </p:txBody>
+      </p:sp>
       <p:pic>
         <p:nvPicPr>
-          <p:cNvPr id="16" name="Picture 15" descr="check_steel.png"/>
+          <p:cNvPr id="20" name="Picture 19" descr="check_white.png"/>
           <p:cNvPicPr>
             <a:picLocks noChangeAspect="1"/>
           </p:cNvPicPr>
@@ -6958,8 +7902,8 @@
         </p:blipFill>
         <p:spPr>
           <a:xfrm>
-            <a:off x="987552" y="4352544"/>
-            <a:ext cx="237744" cy="237744"/>
+            <a:off x="6523695" y="3588471"/>
+            <a:ext cx="266273" cy="266273"/>
           </a:xfrm>
           <a:prstGeom prst="rect">
             <a:avLst/>
@@ -6968,14 +7912,14 @@
       </p:pic>
       <p:sp>
         <p:nvSpPr>
-          <p:cNvPr id="17" name="TextBox 16"/>
+          <p:cNvPr id="21" name="TextBox 20"/>
           <p:cNvSpPr txBox="1"/>
           <p:nvPr/>
         </p:nvSpPr>
         <p:spPr>
           <a:xfrm>
-            <a:off x="1353312" y="4206240"/>
-            <a:ext cx="5029200" cy="530352"/>
+            <a:off x="7040880" y="3328416"/>
+            <a:ext cx="4206240" cy="786384"/>
           </a:xfrm>
           <a:prstGeom prst="rect">
             <a:avLst/>
@@ -7000,7 +7944,7 @@
               </a:spcAft>
             </a:pPr>
             <a:r>
-              <a:rPr sz="1200" b="0">
+              <a:rPr sz="1150" b="0">
                 <a:solidFill>
                   <a:srgbClr val="1A1A1A"/>
                 </a:solidFill>
@@ -7013,18 +7957,18 @@
       </p:sp>
       <p:sp>
         <p:nvSpPr>
-          <p:cNvPr id="18" name="Rounded Rectangle 17"/>
+          <p:cNvPr id="22" name="Rounded Rectangle 21"/>
           <p:cNvSpPr/>
           <p:nvPr/>
         </p:nvSpPr>
         <p:spPr>
           <a:xfrm>
-            <a:off x="841248" y="4809744"/>
-            <a:ext cx="5715000" cy="530352"/>
+            <a:off x="841248" y="4261104"/>
+            <a:ext cx="5138928" cy="786384"/>
           </a:xfrm>
           <a:prstGeom prst="roundRect">
             <a:avLst>
-              <a:gd name="adj" fmla="val 6000"/>
+              <a:gd name="adj" fmla="val 7000"/>
             </a:avLst>
           </a:prstGeom>
           <a:solidFill>
@@ -7059,9 +8003,55 @@
           </a:p>
         </p:txBody>
       </p:sp>
+      <p:sp>
+        <p:nvSpPr>
+          <p:cNvPr id="23" name="Rounded Rectangle 22"/>
+          <p:cNvSpPr/>
+          <p:nvPr/>
+        </p:nvSpPr>
+        <p:spPr>
+          <a:xfrm>
+            <a:off x="987552" y="4398264"/>
+            <a:ext cx="512064" cy="512064"/>
+          </a:xfrm>
+          <a:prstGeom prst="roundRect">
+            <a:avLst>
+              <a:gd name="adj" fmla="val 26000"/>
+            </a:avLst>
+          </a:prstGeom>
+          <a:solidFill>
+            <a:srgbClr val="EE0000"/>
+          </a:solidFill>
+          <a:ln>
+            <a:noFill/>
+          </a:ln>
+          <a:effectLst/>
+        </p:spPr>
+        <p:style>
+          <a:lnRef idx="1">
+            <a:schemeClr val="accent1"/>
+          </a:lnRef>
+          <a:fillRef idx="3">
+            <a:schemeClr val="accent1"/>
+          </a:fillRef>
+          <a:effectRef idx="2">
+            <a:schemeClr val="accent1"/>
+          </a:effectRef>
+          <a:fontRef idx="minor">
+            <a:schemeClr val="lt1"/>
+          </a:fontRef>
+        </p:style>
+        <p:txBody>
+          <a:bodyPr rtlCol="0" anchor="ctr"/>
+          <a:lstStyle/>
+          <a:p>
+            <a:pPr algn="ctr"/>
+          </a:p>
+        </p:txBody>
+      </p:sp>
       <p:pic>
         <p:nvPicPr>
-          <p:cNvPr id="19" name="Picture 18" descr="check_steel.png"/>
+          <p:cNvPr id="24" name="Picture 23" descr="check_white.png"/>
           <p:cNvPicPr>
             <a:picLocks noChangeAspect="1"/>
           </p:cNvPicPr>
@@ -7075,8 +8065,8 @@
         </p:blipFill>
         <p:spPr>
           <a:xfrm>
-            <a:off x="987552" y="4956048"/>
-            <a:ext cx="237744" cy="237744"/>
+            <a:off x="1110447" y="4521159"/>
+            <a:ext cx="266273" cy="266273"/>
           </a:xfrm>
           <a:prstGeom prst="rect">
             <a:avLst/>
@@ -7085,14 +8075,14 @@
       </p:pic>
       <p:sp>
         <p:nvSpPr>
-          <p:cNvPr id="20" name="TextBox 19"/>
+          <p:cNvPr id="25" name="TextBox 24"/>
           <p:cNvSpPr txBox="1"/>
           <p:nvPr/>
         </p:nvSpPr>
         <p:spPr>
           <a:xfrm>
-            <a:off x="1353312" y="4809744"/>
-            <a:ext cx="5029200" cy="530352"/>
+            <a:off x="1627632" y="4261104"/>
+            <a:ext cx="4206240" cy="786384"/>
           </a:xfrm>
           <a:prstGeom prst="rect">
             <a:avLst/>
@@ -7117,221 +8107,13 @@
               </a:spcAft>
             </a:pPr>
             <a:r>
-              <a:rPr sz="1200" b="0">
+              <a:rPr sz="1150" b="0">
                 <a:solidFill>
                   <a:srgbClr val="1A1A1A"/>
                 </a:solidFill>
                 <a:latin typeface="Red Hat Text"/>
               </a:rPr>
               <a:t>The #1 bug: a selector that matches no pods</a:t>
-            </a:r>
-          </a:p>
-        </p:txBody>
-      </p:sp>
-      <p:sp>
-        <p:nvSpPr>
-          <p:cNvPr id="21" name="Rounded Rectangle 20"/>
-          <p:cNvSpPr/>
-          <p:nvPr/>
-        </p:nvSpPr>
-        <p:spPr>
-          <a:xfrm>
-            <a:off x="6812280" y="2395728"/>
-            <a:ext cx="4538167" cy="2944368"/>
-          </a:xfrm>
-          <a:prstGeom prst="roundRect">
-            <a:avLst>
-              <a:gd name="adj" fmla="val 4000"/>
-            </a:avLst>
-          </a:prstGeom>
-          <a:solidFill>
-            <a:srgbClr val="FFFFFF"/>
-          </a:solidFill>
-          <a:ln w="15240">
-            <a:solidFill>
-              <a:srgbClr val="DDE1E6"/>
-            </a:solidFill>
-          </a:ln>
-          <a:effectLst/>
-        </p:spPr>
-        <p:style>
-          <a:lnRef idx="1">
-            <a:schemeClr val="accent1"/>
-          </a:lnRef>
-          <a:fillRef idx="3">
-            <a:schemeClr val="accent1"/>
-          </a:fillRef>
-          <a:effectRef idx="2">
-            <a:schemeClr val="accent1"/>
-          </a:effectRef>
-          <a:fontRef idx="minor">
-            <a:schemeClr val="lt1"/>
-          </a:fontRef>
-        </p:style>
-        <p:txBody>
-          <a:bodyPr rtlCol="0" anchor="ctr"/>
-          <a:lstStyle/>
-          <a:p>
-            <a:pPr algn="ctr"/>
-          </a:p>
-        </p:txBody>
-      </p:sp>
-      <p:sp>
-        <p:nvSpPr>
-          <p:cNvPr id="22" name="Rounded Rectangle 21"/>
-          <p:cNvSpPr/>
-          <p:nvPr/>
-        </p:nvSpPr>
-        <p:spPr>
-          <a:xfrm>
-            <a:off x="7013448" y="2596896"/>
-            <a:ext cx="1298448" cy="310896"/>
-          </a:xfrm>
-          <a:prstGeom prst="roundRect">
-            <a:avLst>
-              <a:gd name="adj" fmla="val 50000"/>
-            </a:avLst>
-          </a:prstGeom>
-          <a:solidFill>
-            <a:srgbClr val="FCECEC"/>
-          </a:solidFill>
-          <a:ln>
-            <a:noFill/>
-          </a:ln>
-          <a:effectLst/>
-        </p:spPr>
-        <p:style>
-          <a:lnRef idx="1">
-            <a:schemeClr val="accent1"/>
-          </a:lnRef>
-          <a:fillRef idx="3">
-            <a:schemeClr val="accent1"/>
-          </a:fillRef>
-          <a:effectRef idx="2">
-            <a:schemeClr val="accent1"/>
-          </a:effectRef>
-          <a:fontRef idx="minor">
-            <a:schemeClr val="lt1"/>
-          </a:fontRef>
-        </p:style>
-        <p:txBody>
-          <a:bodyPr rtlCol="0" anchor="ctr"/>
-          <a:lstStyle/>
-          <a:p>
-            <a:pPr algn="ctr"/>
-          </a:p>
-        </p:txBody>
-      </p:sp>
-      <p:sp>
-        <p:nvSpPr>
-          <p:cNvPr id="23" name="TextBox 22"/>
-          <p:cNvSpPr txBox="1"/>
-          <p:nvPr/>
-        </p:nvSpPr>
-        <p:spPr>
-          <a:xfrm>
-            <a:off x="7013448" y="2596896"/>
-            <a:ext cx="1298448" cy="310896"/>
-          </a:xfrm>
-          <a:prstGeom prst="rect">
-            <a:avLst/>
-          </a:prstGeom>
-          <a:noFill/>
-        </p:spPr>
-        <p:txBody>
-          <a:bodyPr wrap="none" anchor="ctr" lIns="0" rIns="0" tIns="0" bIns="0">
-            <a:spAutoFit/>
-          </a:bodyPr>
-          <a:lstStyle/>
-          <a:p>
-            <a:pPr algn="ctr">
-              <a:lnSpc>
-                <a:spcPct val="106000"/>
-              </a:lnSpc>
-              <a:spcBef>
-                <a:spcPts val="0"/>
-              </a:spcBef>
-              <a:spcAft>
-                <a:spcPts val="0"/>
-              </a:spcAft>
-            </a:pPr>
-            <a:r>
-              <a:rPr sz="850" b="1">
-                <a:solidFill>
-                  <a:srgbClr val="B80000"/>
-                </a:solidFill>
-                <a:latin typeface="Red Hat Display"/>
-              </a:rPr>
-              <a:t>MEDIA PASS</a:t>
-            </a:r>
-          </a:p>
-        </p:txBody>
-      </p:sp>
-      <p:pic>
-        <p:nvPicPr>
-          <p:cNvPr id="24" name="Picture 23" descr="eye_slate.png"/>
-          <p:cNvPicPr>
-            <a:picLocks noChangeAspect="1"/>
-          </p:cNvPicPr>
-          <p:nvPr/>
-        </p:nvPicPr>
-        <p:blipFill>
-          <a:blip r:embed="rId4"/>
-          <a:stretch>
-            <a:fillRect/>
-          </a:stretch>
-        </p:blipFill>
-        <p:spPr>
-          <a:xfrm>
-            <a:off x="8843619" y="3108960"/>
-            <a:ext cx="475488" cy="475488"/>
-          </a:xfrm>
-          <a:prstGeom prst="rect">
-            <a:avLst/>
-          </a:prstGeom>
-        </p:spPr>
-      </p:pic>
-      <p:sp>
-        <p:nvSpPr>
-          <p:cNvPr id="25" name="TextBox 24"/>
-          <p:cNvSpPr txBox="1"/>
-          <p:nvPr/>
-        </p:nvSpPr>
-        <p:spPr>
-          <a:xfrm>
-            <a:off x="7050024" y="3721608"/>
-            <a:ext cx="4062679" cy="1481328"/>
-          </a:xfrm>
-          <a:prstGeom prst="rect">
-            <a:avLst/>
-          </a:prstGeom>
-          <a:noFill/>
-        </p:spPr>
-        <p:txBody>
-          <a:bodyPr wrap="square" anchor="t" lIns="0" rIns="0" tIns="0" bIns="0">
-            <a:spAutoFit/>
-          </a:bodyPr>
-          <a:lstStyle/>
-          <a:p>
-            <a:pPr algn="l">
-              <a:lnSpc>
-                <a:spcPct val="120000"/>
-              </a:lnSpc>
-              <a:spcBef>
-                <a:spcPts val="0"/>
-              </a:spcBef>
-              <a:spcAft>
-                <a:spcPts val="0"/>
-              </a:spcAft>
-            </a:pPr>
-            <a:r>
-              <a:rPr sz="950" b="0">
-                <a:solidFill>
-                  <a:srgbClr val="8A9099"/>
-                </a:solidFill>
-                <a:latin typeface="Red Hat Text"/>
-              </a:rPr>
-              <a:t>A left-to-right chain: Service (name/VIP) → Endpoints (pod IPs, selector) → data plane (node flow rules) → Route (router), with a red callout "selector typo → endpoints &lt;none&gt; → all connections fail."</a:t>
             </a:r>
           </a:p>
         </p:txBody>
@@ -7639,7 +8421,7 @@
         <p:spPr>
           <a:xfrm>
             <a:off x="841248" y="2395728"/>
-            <a:ext cx="5715000" cy="530352"/>
+            <a:ext cx="4160520" cy="475488"/>
           </a:xfrm>
           <a:prstGeom prst="roundRect">
             <a:avLst>
@@ -7694,8 +8476,8 @@
         </p:blipFill>
         <p:spPr>
           <a:xfrm>
-            <a:off x="987552" y="2542032"/>
-            <a:ext cx="237744" cy="237744"/>
+            <a:off x="969264" y="2532888"/>
+            <a:ext cx="201168" cy="201168"/>
           </a:xfrm>
           <a:prstGeom prst="rect">
             <a:avLst/>
@@ -7710,8 +8492,8 @@
         </p:nvSpPr>
         <p:spPr>
           <a:xfrm>
-            <a:off x="1353312" y="2395728"/>
-            <a:ext cx="5029200" cy="530352"/>
+            <a:off x="1280160" y="2395728"/>
+            <a:ext cx="3593591" cy="475488"/>
           </a:xfrm>
           <a:prstGeom prst="rect">
             <a:avLst/>
@@ -7736,7 +8518,7 @@
               </a:spcAft>
             </a:pPr>
             <a:r>
-              <a:rPr sz="1200" b="0">
+              <a:rPr sz="1050" b="0">
                 <a:solidFill>
                   <a:srgbClr val="1A1A1A"/>
                 </a:solidFill>
@@ -7755,8 +8537,8 @@
         </p:nvSpPr>
         <p:spPr>
           <a:xfrm>
-            <a:off x="841248" y="2999232"/>
-            <a:ext cx="5715000" cy="530352"/>
+            <a:off x="841248" y="2944368"/>
+            <a:ext cx="4160520" cy="475488"/>
           </a:xfrm>
           <a:prstGeom prst="roundRect">
             <a:avLst>
@@ -7811,8 +8593,8 @@
         </p:blipFill>
         <p:spPr>
           <a:xfrm>
-            <a:off x="987552" y="3145536"/>
-            <a:ext cx="237744" cy="237744"/>
+            <a:off x="969264" y="3081528"/>
+            <a:ext cx="201168" cy="201168"/>
           </a:xfrm>
           <a:prstGeom prst="rect">
             <a:avLst/>
@@ -7827,8 +8609,8 @@
         </p:nvSpPr>
         <p:spPr>
           <a:xfrm>
-            <a:off x="1353312" y="2999232"/>
-            <a:ext cx="5029200" cy="530352"/>
+            <a:off x="1280160" y="2944368"/>
+            <a:ext cx="3593591" cy="475488"/>
           </a:xfrm>
           <a:prstGeom prst="rect">
             <a:avLst/>
@@ -7853,7 +8635,7 @@
               </a:spcAft>
             </a:pPr>
             <a:r>
-              <a:rPr sz="1200" b="0">
+              <a:rPr sz="1050" b="0">
                 <a:solidFill>
                   <a:srgbClr val="1A1A1A"/>
                 </a:solidFill>
@@ -7872,8 +8654,8 @@
         </p:nvSpPr>
         <p:spPr>
           <a:xfrm>
-            <a:off x="841248" y="3602736"/>
-            <a:ext cx="5715000" cy="530352"/>
+            <a:off x="841248" y="3493008"/>
+            <a:ext cx="4160520" cy="475488"/>
           </a:xfrm>
           <a:prstGeom prst="roundRect">
             <a:avLst>
@@ -7928,8 +8710,8 @@
         </p:blipFill>
         <p:spPr>
           <a:xfrm>
-            <a:off x="987552" y="3749040"/>
-            <a:ext cx="237744" cy="237744"/>
+            <a:off x="969264" y="3630168"/>
+            <a:ext cx="201168" cy="201168"/>
           </a:xfrm>
           <a:prstGeom prst="rect">
             <a:avLst/>
@@ -7944,8 +8726,8 @@
         </p:nvSpPr>
         <p:spPr>
           <a:xfrm>
-            <a:off x="1353312" y="3602736"/>
-            <a:ext cx="5029200" cy="530352"/>
+            <a:off x="1280160" y="3493008"/>
+            <a:ext cx="3593591" cy="475488"/>
           </a:xfrm>
           <a:prstGeom prst="rect">
             <a:avLst/>
@@ -7970,7 +8752,7 @@
               </a:spcAft>
             </a:pPr>
             <a:r>
-              <a:rPr sz="1200" b="0">
+              <a:rPr sz="1050" b="0">
                 <a:solidFill>
                   <a:srgbClr val="1A1A1A"/>
                 </a:solidFill>
@@ -7989,8 +8771,8 @@
         </p:nvSpPr>
         <p:spPr>
           <a:xfrm>
-            <a:off x="841248" y="4206240"/>
-            <a:ext cx="5715000" cy="530352"/>
+            <a:off x="841248" y="4041648"/>
+            <a:ext cx="4160520" cy="475488"/>
           </a:xfrm>
           <a:prstGeom prst="roundRect">
             <a:avLst>
@@ -8045,8 +8827,8 @@
         </p:blipFill>
         <p:spPr>
           <a:xfrm>
-            <a:off x="987552" y="4352544"/>
-            <a:ext cx="237744" cy="237744"/>
+            <a:off x="969264" y="4178807"/>
+            <a:ext cx="201168" cy="201168"/>
           </a:xfrm>
           <a:prstGeom prst="rect">
             <a:avLst/>
@@ -8061,8 +8843,8 @@
         </p:nvSpPr>
         <p:spPr>
           <a:xfrm>
-            <a:off x="1353312" y="4206240"/>
-            <a:ext cx="5029200" cy="530352"/>
+            <a:off x="1280160" y="4041648"/>
+            <a:ext cx="3593591" cy="475488"/>
           </a:xfrm>
           <a:prstGeom prst="rect">
             <a:avLst/>
@@ -8087,7 +8869,7 @@
               </a:spcAft>
             </a:pPr>
             <a:r>
-              <a:rPr sz="1200" b="0">
+              <a:rPr sz="1050" b="0">
                 <a:solidFill>
                   <a:srgbClr val="1A1A1A"/>
                 </a:solidFill>
@@ -8106,8 +8888,8 @@
         </p:nvSpPr>
         <p:spPr>
           <a:xfrm>
-            <a:off x="841248" y="4809744"/>
-            <a:ext cx="5715000" cy="530352"/>
+            <a:off x="841248" y="4590288"/>
+            <a:ext cx="4160520" cy="475488"/>
           </a:xfrm>
           <a:prstGeom prst="roundRect">
             <a:avLst>
@@ -8162,8 +8944,8 @@
         </p:blipFill>
         <p:spPr>
           <a:xfrm>
-            <a:off x="987552" y="4956048"/>
-            <a:ext cx="237744" cy="237744"/>
+            <a:off x="969264" y="4727447"/>
+            <a:ext cx="201168" cy="201168"/>
           </a:xfrm>
           <a:prstGeom prst="rect">
             <a:avLst/>
@@ -8178,8 +8960,8 @@
         </p:nvSpPr>
         <p:spPr>
           <a:xfrm>
-            <a:off x="1353312" y="4809744"/>
-            <a:ext cx="5029200" cy="530352"/>
+            <a:off x="1280160" y="4590288"/>
+            <a:ext cx="3593591" cy="475488"/>
           </a:xfrm>
           <a:prstGeom prst="rect">
             <a:avLst/>
@@ -8204,7 +8986,7 @@
               </a:spcAft>
             </a:pPr>
             <a:r>
-              <a:rPr sz="1200" b="0">
+              <a:rPr sz="1050" b="0">
                 <a:solidFill>
                   <a:srgbClr val="1A1A1A"/>
                 </a:solidFill>
@@ -8223,8 +9005,8 @@
         </p:nvSpPr>
         <p:spPr>
           <a:xfrm>
-            <a:off x="6812280" y="2395728"/>
-            <a:ext cx="4538167" cy="2944368"/>
+            <a:off x="5385816" y="2395728"/>
+            <a:ext cx="5775283" cy="3657600"/>
           </a:xfrm>
           <a:prstGeom prst="roundRect">
             <a:avLst>
@@ -8263,100 +9045,9 @@
           </a:p>
         </p:txBody>
       </p:sp>
-      <p:sp>
-        <p:nvSpPr>
-          <p:cNvPr id="22" name="Rounded Rectangle 21"/>
-          <p:cNvSpPr/>
-          <p:nvPr/>
-        </p:nvSpPr>
-        <p:spPr>
-          <a:xfrm>
-            <a:off x="7013448" y="2596896"/>
-            <a:ext cx="1298448" cy="310896"/>
-          </a:xfrm>
-          <a:prstGeom prst="roundRect">
-            <a:avLst>
-              <a:gd name="adj" fmla="val 50000"/>
-            </a:avLst>
-          </a:prstGeom>
-          <a:solidFill>
-            <a:srgbClr val="FCECEC"/>
-          </a:solidFill>
-          <a:ln>
-            <a:noFill/>
-          </a:ln>
-          <a:effectLst/>
-        </p:spPr>
-        <p:style>
-          <a:lnRef idx="1">
-            <a:schemeClr val="accent1"/>
-          </a:lnRef>
-          <a:fillRef idx="3">
-            <a:schemeClr val="accent1"/>
-          </a:fillRef>
-          <a:effectRef idx="2">
-            <a:schemeClr val="accent1"/>
-          </a:effectRef>
-          <a:fontRef idx="minor">
-            <a:schemeClr val="lt1"/>
-          </a:fontRef>
-        </p:style>
-        <p:txBody>
-          <a:bodyPr rtlCol="0" anchor="ctr"/>
-          <a:lstStyle/>
-          <a:p>
-            <a:pPr algn="ctr"/>
-          </a:p>
-        </p:txBody>
-      </p:sp>
-      <p:sp>
-        <p:nvSpPr>
-          <p:cNvPr id="23" name="TextBox 22"/>
-          <p:cNvSpPr txBox="1"/>
-          <p:nvPr/>
-        </p:nvSpPr>
-        <p:spPr>
-          <a:xfrm>
-            <a:off x="7013448" y="2596896"/>
-            <a:ext cx="1298448" cy="310896"/>
-          </a:xfrm>
-          <a:prstGeom prst="rect">
-            <a:avLst/>
-          </a:prstGeom>
-          <a:noFill/>
-        </p:spPr>
-        <p:txBody>
-          <a:bodyPr wrap="none" anchor="ctr" lIns="0" rIns="0" tIns="0" bIns="0">
-            <a:spAutoFit/>
-          </a:bodyPr>
-          <a:lstStyle/>
-          <a:p>
-            <a:pPr algn="ctr">
-              <a:lnSpc>
-                <a:spcPct val="106000"/>
-              </a:lnSpc>
-              <a:spcBef>
-                <a:spcPts val="0"/>
-              </a:spcBef>
-              <a:spcAft>
-                <a:spcPts val="0"/>
-              </a:spcAft>
-            </a:pPr>
-            <a:r>
-              <a:rPr sz="850" b="1">
-                <a:solidFill>
-                  <a:srgbClr val="B80000"/>
-                </a:solidFill>
-                <a:latin typeface="Red Hat Display"/>
-              </a:rPr>
-              <a:t>MEDIA PASS</a:t>
-            </a:r>
-          </a:p>
-        </p:txBody>
-      </p:sp>
       <p:pic>
         <p:nvPicPr>
-          <p:cNvPr id="24" name="Picture 23" descr="eye_slate.png"/>
+          <p:cNvPr id="22" name="Picture 21" descr="02-exposure-tree.png"/>
           <p:cNvPicPr>
             <a:picLocks noChangeAspect="1"/>
           </p:cNvPicPr>
@@ -8370,62 +9061,17 @@
         </p:blipFill>
         <p:spPr>
           <a:xfrm>
-            <a:off x="8843619" y="3108960"/>
-            <a:ext cx="475488" cy="475488"/>
+            <a:off x="5532120" y="2542032"/>
+            <a:ext cx="5482675" cy="3364992"/>
           </a:xfrm>
           <a:prstGeom prst="rect">
             <a:avLst/>
           </a:prstGeom>
         </p:spPr>
       </p:pic>
-      <p:sp>
-        <p:nvSpPr>
-          <p:cNvPr id="25" name="TextBox 24"/>
-          <p:cNvSpPr txBox="1"/>
-          <p:nvPr/>
-        </p:nvSpPr>
-        <p:spPr>
-          <a:xfrm>
-            <a:off x="7050024" y="3721608"/>
-            <a:ext cx="4062679" cy="1481328"/>
-          </a:xfrm>
-          <a:prstGeom prst="rect">
-            <a:avLst/>
-          </a:prstGeom>
-          <a:noFill/>
-        </p:spPr>
-        <p:txBody>
-          <a:bodyPr wrap="square" anchor="t" lIns="0" rIns="0" tIns="0" bIns="0">
-            <a:spAutoFit/>
-          </a:bodyPr>
-          <a:lstStyle/>
-          <a:p>
-            <a:pPr algn="l">
-              <a:lnSpc>
-                <a:spcPct val="120000"/>
-              </a:lnSpc>
-              <a:spcBef>
-                <a:spcPts val="0"/>
-              </a:spcBef>
-              <a:spcAft>
-                <a:spcPts val="0"/>
-              </a:spcAft>
-            </a:pPr>
-            <a:r>
-              <a:rPr sz="950" b="0">
-                <a:solidFill>
-                  <a:srgbClr val="8A9099"/>
-                </a:solidFill>
-                <a:latin typeface="Red Hat Text"/>
-              </a:rPr>
-              <a:t>Reuse concept diagram networking-dev-devops-...-02-exposure-tree.svg — the branching tree from ClusterIP through Route/Gateway, with LoadBalancer flagged "&lt;pending&gt; on bare metal."</a:t>
-            </a:r>
-          </a:p>
-        </p:txBody>
-      </p:sp>
       <p:cxnSp>
         <p:nvCxnSpPr>
-          <p:cNvPr id="26" name="Connector 25"/>
+          <p:cNvPr id="23" name="Connector 22"/>
           <p:cNvCxnSpPr/>
           <p:nvPr/>
         </p:nvCxnSpPr>
@@ -8461,7 +9107,7 @@
       </p:cxnSp>
       <p:sp>
         <p:nvSpPr>
-          <p:cNvPr id="27" name="TextBox 26"/>
+          <p:cNvPr id="24" name="TextBox 23"/>
           <p:cNvSpPr txBox="1"/>
           <p:nvPr/>
         </p:nvSpPr>
@@ -8506,7 +9152,7 @@
       </p:sp>
       <p:sp>
         <p:nvSpPr>
-          <p:cNvPr id="28" name="TextBox 27"/>
+          <p:cNvPr id="25" name="TextBox 24"/>
           <p:cNvSpPr txBox="1"/>
           <p:nvPr/>
         </p:nvSpPr>
@@ -8726,11 +9372,11 @@
         <p:spPr>
           <a:xfrm>
             <a:off x="841248" y="2395728"/>
-            <a:ext cx="5715000" cy="530352"/>
+            <a:ext cx="5138928" cy="786384"/>
           </a:xfrm>
           <a:prstGeom prst="roundRect">
             <a:avLst>
-              <a:gd name="adj" fmla="val 6000"/>
+              <a:gd name="adj" fmla="val 7000"/>
             </a:avLst>
           </a:prstGeom>
           <a:solidFill>
@@ -8765,9 +9411,55 @@
           </a:p>
         </p:txBody>
       </p:sp>
+      <p:sp>
+        <p:nvSpPr>
+          <p:cNvPr id="7" name="Rounded Rectangle 6"/>
+          <p:cNvSpPr/>
+          <p:nvPr/>
+        </p:nvSpPr>
+        <p:spPr>
+          <a:xfrm>
+            <a:off x="987552" y="2532888"/>
+            <a:ext cx="512064" cy="512064"/>
+          </a:xfrm>
+          <a:prstGeom prst="roundRect">
+            <a:avLst>
+              <a:gd name="adj" fmla="val 26000"/>
+            </a:avLst>
+          </a:prstGeom>
+          <a:solidFill>
+            <a:srgbClr val="EE0000"/>
+          </a:solidFill>
+          <a:ln>
+            <a:noFill/>
+          </a:ln>
+          <a:effectLst/>
+        </p:spPr>
+        <p:style>
+          <a:lnRef idx="1">
+            <a:schemeClr val="accent1"/>
+          </a:lnRef>
+          <a:fillRef idx="3">
+            <a:schemeClr val="accent1"/>
+          </a:fillRef>
+          <a:effectRef idx="2">
+            <a:schemeClr val="accent1"/>
+          </a:effectRef>
+          <a:fontRef idx="minor">
+            <a:schemeClr val="lt1"/>
+          </a:fontRef>
+        </p:style>
+        <p:txBody>
+          <a:bodyPr rtlCol="0" anchor="ctr"/>
+          <a:lstStyle/>
+          <a:p>
+            <a:pPr algn="ctr"/>
+          </a:p>
+        </p:txBody>
+      </p:sp>
       <p:pic>
         <p:nvPicPr>
-          <p:cNvPr id="7" name="Picture 6" descr="check_steel.png"/>
+          <p:cNvPr id="8" name="Picture 7" descr="check_white.png"/>
           <p:cNvPicPr>
             <a:picLocks noChangeAspect="1"/>
           </p:cNvPicPr>
@@ -8781,8 +9473,8 @@
         </p:blipFill>
         <p:spPr>
           <a:xfrm>
-            <a:off x="987552" y="2542032"/>
-            <a:ext cx="237744" cy="237744"/>
+            <a:off x="1110447" y="2655783"/>
+            <a:ext cx="266273" cy="266273"/>
           </a:xfrm>
           <a:prstGeom prst="rect">
             <a:avLst/>
@@ -8791,14 +9483,14 @@
       </p:pic>
       <p:sp>
         <p:nvSpPr>
-          <p:cNvPr id="8" name="TextBox 7"/>
+          <p:cNvPr id="9" name="TextBox 8"/>
           <p:cNvSpPr txBox="1"/>
           <p:nvPr/>
         </p:nvSpPr>
         <p:spPr>
           <a:xfrm>
-            <a:off x="1353312" y="2395728"/>
-            <a:ext cx="5029200" cy="530352"/>
+            <a:off x="1627632" y="2395728"/>
+            <a:ext cx="4206240" cy="786384"/>
           </a:xfrm>
           <a:prstGeom prst="rect">
             <a:avLst/>
@@ -8823,7 +9515,7 @@
               </a:spcAft>
             </a:pPr>
             <a:r>
-              <a:rPr sz="1200" b="0">
+              <a:rPr sz="1150" b="0">
                 <a:solidFill>
                   <a:srgbClr val="1A1A1A"/>
                 </a:solidFill>
@@ -8836,18 +9528,18 @@
       </p:sp>
       <p:sp>
         <p:nvSpPr>
-          <p:cNvPr id="9" name="Rounded Rectangle 8"/>
+          <p:cNvPr id="10" name="Rounded Rectangle 9"/>
           <p:cNvSpPr/>
           <p:nvPr/>
         </p:nvSpPr>
         <p:spPr>
           <a:xfrm>
-            <a:off x="841248" y="2999232"/>
-            <a:ext cx="5715000" cy="530352"/>
+            <a:off x="6254496" y="2395728"/>
+            <a:ext cx="5138928" cy="786384"/>
           </a:xfrm>
           <a:prstGeom prst="roundRect">
             <a:avLst>
-              <a:gd name="adj" fmla="val 6000"/>
+              <a:gd name="adj" fmla="val 7000"/>
             </a:avLst>
           </a:prstGeom>
           <a:solidFill>
@@ -8882,9 +9574,55 @@
           </a:p>
         </p:txBody>
       </p:sp>
+      <p:sp>
+        <p:nvSpPr>
+          <p:cNvPr id="11" name="Rounded Rectangle 10"/>
+          <p:cNvSpPr/>
+          <p:nvPr/>
+        </p:nvSpPr>
+        <p:spPr>
+          <a:xfrm>
+            <a:off x="6400800" y="2532888"/>
+            <a:ext cx="512064" cy="512064"/>
+          </a:xfrm>
+          <a:prstGeom prst="roundRect">
+            <a:avLst>
+              <a:gd name="adj" fmla="val 26000"/>
+            </a:avLst>
+          </a:prstGeom>
+          <a:solidFill>
+            <a:srgbClr val="EE0000"/>
+          </a:solidFill>
+          <a:ln>
+            <a:noFill/>
+          </a:ln>
+          <a:effectLst/>
+        </p:spPr>
+        <p:style>
+          <a:lnRef idx="1">
+            <a:schemeClr val="accent1"/>
+          </a:lnRef>
+          <a:fillRef idx="3">
+            <a:schemeClr val="accent1"/>
+          </a:fillRef>
+          <a:effectRef idx="2">
+            <a:schemeClr val="accent1"/>
+          </a:effectRef>
+          <a:fontRef idx="minor">
+            <a:schemeClr val="lt1"/>
+          </a:fontRef>
+        </p:style>
+        <p:txBody>
+          <a:bodyPr rtlCol="0" anchor="ctr"/>
+          <a:lstStyle/>
+          <a:p>
+            <a:pPr algn="ctr"/>
+          </a:p>
+        </p:txBody>
+      </p:sp>
       <p:pic>
         <p:nvPicPr>
-          <p:cNvPr id="10" name="Picture 9" descr="check_steel.png"/>
+          <p:cNvPr id="12" name="Picture 11" descr="check_white.png"/>
           <p:cNvPicPr>
             <a:picLocks noChangeAspect="1"/>
           </p:cNvPicPr>
@@ -8898,8 +9636,8 @@
         </p:blipFill>
         <p:spPr>
           <a:xfrm>
-            <a:off x="987552" y="3145536"/>
-            <a:ext cx="237744" cy="237744"/>
+            <a:off x="6523695" y="2655783"/>
+            <a:ext cx="266273" cy="266273"/>
           </a:xfrm>
           <a:prstGeom prst="rect">
             <a:avLst/>
@@ -8908,14 +9646,14 @@
       </p:pic>
       <p:sp>
         <p:nvSpPr>
-          <p:cNvPr id="11" name="TextBox 10"/>
+          <p:cNvPr id="13" name="TextBox 12"/>
           <p:cNvSpPr txBox="1"/>
           <p:nvPr/>
         </p:nvSpPr>
         <p:spPr>
           <a:xfrm>
-            <a:off x="1353312" y="2999232"/>
-            <a:ext cx="5029200" cy="530352"/>
+            <a:off x="7040880" y="2395728"/>
+            <a:ext cx="4206240" cy="786384"/>
           </a:xfrm>
           <a:prstGeom prst="rect">
             <a:avLst/>
@@ -8940,7 +9678,7 @@
               </a:spcAft>
             </a:pPr>
             <a:r>
-              <a:rPr sz="1200" b="0">
+              <a:rPr sz="1150" b="0">
                 <a:solidFill>
                   <a:srgbClr val="1A1A1A"/>
                 </a:solidFill>
@@ -8953,18 +9691,18 @@
       </p:sp>
       <p:sp>
         <p:nvSpPr>
-          <p:cNvPr id="12" name="Rounded Rectangle 11"/>
+          <p:cNvPr id="14" name="Rounded Rectangle 13"/>
           <p:cNvSpPr/>
           <p:nvPr/>
         </p:nvSpPr>
         <p:spPr>
           <a:xfrm>
-            <a:off x="841248" y="3602736"/>
-            <a:ext cx="5715000" cy="530352"/>
+            <a:off x="841248" y="3328416"/>
+            <a:ext cx="5138928" cy="786384"/>
           </a:xfrm>
           <a:prstGeom prst="roundRect">
             <a:avLst>
-              <a:gd name="adj" fmla="val 6000"/>
+              <a:gd name="adj" fmla="val 7000"/>
             </a:avLst>
           </a:prstGeom>
           <a:solidFill>
@@ -8999,9 +9737,55 @@
           </a:p>
         </p:txBody>
       </p:sp>
+      <p:sp>
+        <p:nvSpPr>
+          <p:cNvPr id="15" name="Rounded Rectangle 14"/>
+          <p:cNvSpPr/>
+          <p:nvPr/>
+        </p:nvSpPr>
+        <p:spPr>
+          <a:xfrm>
+            <a:off x="987552" y="3465576"/>
+            <a:ext cx="512064" cy="512064"/>
+          </a:xfrm>
+          <a:prstGeom prst="roundRect">
+            <a:avLst>
+              <a:gd name="adj" fmla="val 26000"/>
+            </a:avLst>
+          </a:prstGeom>
+          <a:solidFill>
+            <a:srgbClr val="EE0000"/>
+          </a:solidFill>
+          <a:ln>
+            <a:noFill/>
+          </a:ln>
+          <a:effectLst/>
+        </p:spPr>
+        <p:style>
+          <a:lnRef idx="1">
+            <a:schemeClr val="accent1"/>
+          </a:lnRef>
+          <a:fillRef idx="3">
+            <a:schemeClr val="accent1"/>
+          </a:fillRef>
+          <a:effectRef idx="2">
+            <a:schemeClr val="accent1"/>
+          </a:effectRef>
+          <a:fontRef idx="minor">
+            <a:schemeClr val="lt1"/>
+          </a:fontRef>
+        </p:style>
+        <p:txBody>
+          <a:bodyPr rtlCol="0" anchor="ctr"/>
+          <a:lstStyle/>
+          <a:p>
+            <a:pPr algn="ctr"/>
+          </a:p>
+        </p:txBody>
+      </p:sp>
       <p:pic>
         <p:nvPicPr>
-          <p:cNvPr id="13" name="Picture 12" descr="check_steel.png"/>
+          <p:cNvPr id="16" name="Picture 15" descr="check_white.png"/>
           <p:cNvPicPr>
             <a:picLocks noChangeAspect="1"/>
           </p:cNvPicPr>
@@ -9015,8 +9799,8 @@
         </p:blipFill>
         <p:spPr>
           <a:xfrm>
-            <a:off x="987552" y="3749040"/>
-            <a:ext cx="237744" cy="237744"/>
+            <a:off x="1110447" y="3588471"/>
+            <a:ext cx="266273" cy="266273"/>
           </a:xfrm>
           <a:prstGeom prst="rect">
             <a:avLst/>
@@ -9025,14 +9809,14 @@
       </p:pic>
       <p:sp>
         <p:nvSpPr>
-          <p:cNvPr id="14" name="TextBox 13"/>
+          <p:cNvPr id="17" name="TextBox 16"/>
           <p:cNvSpPr txBox="1"/>
           <p:nvPr/>
         </p:nvSpPr>
         <p:spPr>
           <a:xfrm>
-            <a:off x="1353312" y="3602736"/>
-            <a:ext cx="5029200" cy="530352"/>
+            <a:off x="1627632" y="3328416"/>
+            <a:ext cx="4206240" cy="786384"/>
           </a:xfrm>
           <a:prstGeom prst="rect">
             <a:avLst/>
@@ -9057,7 +9841,7 @@
               </a:spcAft>
             </a:pPr>
             <a:r>
-              <a:rPr sz="1200" b="0">
+              <a:rPr sz="1150" b="0">
                 <a:solidFill>
                   <a:srgbClr val="1A1A1A"/>
                 </a:solidFill>
@@ -9070,18 +9854,18 @@
       </p:sp>
       <p:sp>
         <p:nvSpPr>
-          <p:cNvPr id="15" name="Rounded Rectangle 14"/>
+          <p:cNvPr id="18" name="Rounded Rectangle 17"/>
           <p:cNvSpPr/>
           <p:nvPr/>
         </p:nvSpPr>
         <p:spPr>
           <a:xfrm>
-            <a:off x="841248" y="4206240"/>
-            <a:ext cx="5715000" cy="530352"/>
+            <a:off x="6254496" y="3328416"/>
+            <a:ext cx="5138928" cy="786384"/>
           </a:xfrm>
           <a:prstGeom prst="roundRect">
             <a:avLst>
-              <a:gd name="adj" fmla="val 6000"/>
+              <a:gd name="adj" fmla="val 7000"/>
             </a:avLst>
           </a:prstGeom>
           <a:solidFill>
@@ -9116,9 +9900,55 @@
           </a:p>
         </p:txBody>
       </p:sp>
+      <p:sp>
+        <p:nvSpPr>
+          <p:cNvPr id="19" name="Rounded Rectangle 18"/>
+          <p:cNvSpPr/>
+          <p:nvPr/>
+        </p:nvSpPr>
+        <p:spPr>
+          <a:xfrm>
+            <a:off x="6400800" y="3465576"/>
+            <a:ext cx="512064" cy="512064"/>
+          </a:xfrm>
+          <a:prstGeom prst="roundRect">
+            <a:avLst>
+              <a:gd name="adj" fmla="val 26000"/>
+            </a:avLst>
+          </a:prstGeom>
+          <a:solidFill>
+            <a:srgbClr val="EE0000"/>
+          </a:solidFill>
+          <a:ln>
+            <a:noFill/>
+          </a:ln>
+          <a:effectLst/>
+        </p:spPr>
+        <p:style>
+          <a:lnRef idx="1">
+            <a:schemeClr val="accent1"/>
+          </a:lnRef>
+          <a:fillRef idx="3">
+            <a:schemeClr val="accent1"/>
+          </a:fillRef>
+          <a:effectRef idx="2">
+            <a:schemeClr val="accent1"/>
+          </a:effectRef>
+          <a:fontRef idx="minor">
+            <a:schemeClr val="lt1"/>
+          </a:fontRef>
+        </p:style>
+        <p:txBody>
+          <a:bodyPr rtlCol="0" anchor="ctr"/>
+          <a:lstStyle/>
+          <a:p>
+            <a:pPr algn="ctr"/>
+          </a:p>
+        </p:txBody>
+      </p:sp>
       <p:pic>
         <p:nvPicPr>
-          <p:cNvPr id="16" name="Picture 15" descr="check_steel.png"/>
+          <p:cNvPr id="20" name="Picture 19" descr="check_white.png"/>
           <p:cNvPicPr>
             <a:picLocks noChangeAspect="1"/>
           </p:cNvPicPr>
@@ -9132,8 +9962,8 @@
         </p:blipFill>
         <p:spPr>
           <a:xfrm>
-            <a:off x="987552" y="4352544"/>
-            <a:ext cx="237744" cy="237744"/>
+            <a:off x="6523695" y="3588471"/>
+            <a:ext cx="266273" cy="266273"/>
           </a:xfrm>
           <a:prstGeom prst="rect">
             <a:avLst/>
@@ -9142,14 +9972,14 @@
       </p:pic>
       <p:sp>
         <p:nvSpPr>
-          <p:cNvPr id="17" name="TextBox 16"/>
+          <p:cNvPr id="21" name="TextBox 20"/>
           <p:cNvSpPr txBox="1"/>
           <p:nvPr/>
         </p:nvSpPr>
         <p:spPr>
           <a:xfrm>
-            <a:off x="1353312" y="4206240"/>
-            <a:ext cx="5029200" cy="530352"/>
+            <a:off x="7040880" y="3328416"/>
+            <a:ext cx="4206240" cy="786384"/>
           </a:xfrm>
           <a:prstGeom prst="rect">
             <a:avLst/>
@@ -9174,7 +10004,7 @@
               </a:spcAft>
             </a:pPr>
             <a:r>
-              <a:rPr sz="1200" b="0">
+              <a:rPr sz="1150" b="0">
                 <a:solidFill>
                   <a:srgbClr val="1A1A1A"/>
                 </a:solidFill>
@@ -9187,18 +10017,18 @@
       </p:sp>
       <p:sp>
         <p:nvSpPr>
-          <p:cNvPr id="18" name="Rounded Rectangle 17"/>
+          <p:cNvPr id="22" name="Rounded Rectangle 21"/>
           <p:cNvSpPr/>
           <p:nvPr/>
         </p:nvSpPr>
         <p:spPr>
           <a:xfrm>
-            <a:off x="841248" y="4809744"/>
-            <a:ext cx="5715000" cy="530352"/>
+            <a:off x="841248" y="4261104"/>
+            <a:ext cx="5138928" cy="786384"/>
           </a:xfrm>
           <a:prstGeom prst="roundRect">
             <a:avLst>
-              <a:gd name="adj" fmla="val 6000"/>
+              <a:gd name="adj" fmla="val 7000"/>
             </a:avLst>
           </a:prstGeom>
           <a:solidFill>
@@ -9233,9 +10063,55 @@
           </a:p>
         </p:txBody>
       </p:sp>
+      <p:sp>
+        <p:nvSpPr>
+          <p:cNvPr id="23" name="Rounded Rectangle 22"/>
+          <p:cNvSpPr/>
+          <p:nvPr/>
+        </p:nvSpPr>
+        <p:spPr>
+          <a:xfrm>
+            <a:off x="987552" y="4398264"/>
+            <a:ext cx="512064" cy="512064"/>
+          </a:xfrm>
+          <a:prstGeom prst="roundRect">
+            <a:avLst>
+              <a:gd name="adj" fmla="val 26000"/>
+            </a:avLst>
+          </a:prstGeom>
+          <a:solidFill>
+            <a:srgbClr val="EE0000"/>
+          </a:solidFill>
+          <a:ln>
+            <a:noFill/>
+          </a:ln>
+          <a:effectLst/>
+        </p:spPr>
+        <p:style>
+          <a:lnRef idx="1">
+            <a:schemeClr val="accent1"/>
+          </a:lnRef>
+          <a:fillRef idx="3">
+            <a:schemeClr val="accent1"/>
+          </a:fillRef>
+          <a:effectRef idx="2">
+            <a:schemeClr val="accent1"/>
+          </a:effectRef>
+          <a:fontRef idx="minor">
+            <a:schemeClr val="lt1"/>
+          </a:fontRef>
+        </p:style>
+        <p:txBody>
+          <a:bodyPr rtlCol="0" anchor="ctr"/>
+          <a:lstStyle/>
+          <a:p>
+            <a:pPr algn="ctr"/>
+          </a:p>
+        </p:txBody>
+      </p:sp>
       <p:pic>
         <p:nvPicPr>
-          <p:cNvPr id="19" name="Picture 18" descr="check_steel.png"/>
+          <p:cNvPr id="24" name="Picture 23" descr="check_white.png"/>
           <p:cNvPicPr>
             <a:picLocks noChangeAspect="1"/>
           </p:cNvPicPr>
@@ -9249,8 +10125,8 @@
         </p:blipFill>
         <p:spPr>
           <a:xfrm>
-            <a:off x="987552" y="4956048"/>
-            <a:ext cx="237744" cy="237744"/>
+            <a:off x="1110447" y="4521159"/>
+            <a:ext cx="266273" cy="266273"/>
           </a:xfrm>
           <a:prstGeom prst="rect">
             <a:avLst/>
@@ -9259,14 +10135,14 @@
       </p:pic>
       <p:sp>
         <p:nvSpPr>
-          <p:cNvPr id="20" name="TextBox 19"/>
+          <p:cNvPr id="25" name="TextBox 24"/>
           <p:cNvSpPr txBox="1"/>
           <p:nvPr/>
         </p:nvSpPr>
         <p:spPr>
           <a:xfrm>
-            <a:off x="1353312" y="4809744"/>
-            <a:ext cx="5029200" cy="530352"/>
+            <a:off x="1627632" y="4261104"/>
+            <a:ext cx="4206240" cy="786384"/>
           </a:xfrm>
           <a:prstGeom prst="rect">
             <a:avLst/>
@@ -9291,221 +10167,13 @@
               </a:spcAft>
             </a:pPr>
             <a:r>
-              <a:rPr sz="1200" b="0">
+              <a:rPr sz="1150" b="0">
                 <a:solidFill>
                   <a:srgbClr val="1A1A1A"/>
                 </a:solidFill>
                 <a:latin typeface="Red Hat Text"/>
               </a:rPr>
               <a:t>Know the boundary — don't fight the Route</a:t>
-            </a:r>
-          </a:p>
-        </p:txBody>
-      </p:sp>
-      <p:sp>
-        <p:nvSpPr>
-          <p:cNvPr id="21" name="Rounded Rectangle 20"/>
-          <p:cNvSpPr/>
-          <p:nvPr/>
-        </p:nvSpPr>
-        <p:spPr>
-          <a:xfrm>
-            <a:off x="6812280" y="2395728"/>
-            <a:ext cx="4538167" cy="2944368"/>
-          </a:xfrm>
-          <a:prstGeom prst="roundRect">
-            <a:avLst>
-              <a:gd name="adj" fmla="val 4000"/>
-            </a:avLst>
-          </a:prstGeom>
-          <a:solidFill>
-            <a:srgbClr val="FFFFFF"/>
-          </a:solidFill>
-          <a:ln w="15240">
-            <a:solidFill>
-              <a:srgbClr val="DDE1E6"/>
-            </a:solidFill>
-          </a:ln>
-          <a:effectLst/>
-        </p:spPr>
-        <p:style>
-          <a:lnRef idx="1">
-            <a:schemeClr val="accent1"/>
-          </a:lnRef>
-          <a:fillRef idx="3">
-            <a:schemeClr val="accent1"/>
-          </a:fillRef>
-          <a:effectRef idx="2">
-            <a:schemeClr val="accent1"/>
-          </a:effectRef>
-          <a:fontRef idx="minor">
-            <a:schemeClr val="lt1"/>
-          </a:fontRef>
-        </p:style>
-        <p:txBody>
-          <a:bodyPr rtlCol="0" anchor="ctr"/>
-          <a:lstStyle/>
-          <a:p>
-            <a:pPr algn="ctr"/>
-          </a:p>
-        </p:txBody>
-      </p:sp>
-      <p:sp>
-        <p:nvSpPr>
-          <p:cNvPr id="22" name="Rounded Rectangle 21"/>
-          <p:cNvSpPr/>
-          <p:nvPr/>
-        </p:nvSpPr>
-        <p:spPr>
-          <a:xfrm>
-            <a:off x="7013448" y="2596896"/>
-            <a:ext cx="1298448" cy="310896"/>
-          </a:xfrm>
-          <a:prstGeom prst="roundRect">
-            <a:avLst>
-              <a:gd name="adj" fmla="val 50000"/>
-            </a:avLst>
-          </a:prstGeom>
-          <a:solidFill>
-            <a:srgbClr val="FCECEC"/>
-          </a:solidFill>
-          <a:ln>
-            <a:noFill/>
-          </a:ln>
-          <a:effectLst/>
-        </p:spPr>
-        <p:style>
-          <a:lnRef idx="1">
-            <a:schemeClr val="accent1"/>
-          </a:lnRef>
-          <a:fillRef idx="3">
-            <a:schemeClr val="accent1"/>
-          </a:fillRef>
-          <a:effectRef idx="2">
-            <a:schemeClr val="accent1"/>
-          </a:effectRef>
-          <a:fontRef idx="minor">
-            <a:schemeClr val="lt1"/>
-          </a:fontRef>
-        </p:style>
-        <p:txBody>
-          <a:bodyPr rtlCol="0" anchor="ctr"/>
-          <a:lstStyle/>
-          <a:p>
-            <a:pPr algn="ctr"/>
-          </a:p>
-        </p:txBody>
-      </p:sp>
-      <p:sp>
-        <p:nvSpPr>
-          <p:cNvPr id="23" name="TextBox 22"/>
-          <p:cNvSpPr txBox="1"/>
-          <p:nvPr/>
-        </p:nvSpPr>
-        <p:spPr>
-          <a:xfrm>
-            <a:off x="7013448" y="2596896"/>
-            <a:ext cx="1298448" cy="310896"/>
-          </a:xfrm>
-          <a:prstGeom prst="rect">
-            <a:avLst/>
-          </a:prstGeom>
-          <a:noFill/>
-        </p:spPr>
-        <p:txBody>
-          <a:bodyPr wrap="none" anchor="ctr" lIns="0" rIns="0" tIns="0" bIns="0">
-            <a:spAutoFit/>
-          </a:bodyPr>
-          <a:lstStyle/>
-          <a:p>
-            <a:pPr algn="ctr">
-              <a:lnSpc>
-                <a:spcPct val="106000"/>
-              </a:lnSpc>
-              <a:spcBef>
-                <a:spcPts val="0"/>
-              </a:spcBef>
-              <a:spcAft>
-                <a:spcPts val="0"/>
-              </a:spcAft>
-            </a:pPr>
-            <a:r>
-              <a:rPr sz="850" b="1">
-                <a:solidFill>
-                  <a:srgbClr val="B80000"/>
-                </a:solidFill>
-                <a:latin typeface="Red Hat Display"/>
-              </a:rPr>
-              <a:t>MEDIA PASS</a:t>
-            </a:r>
-          </a:p>
-        </p:txBody>
-      </p:sp>
-      <p:pic>
-        <p:nvPicPr>
-          <p:cNvPr id="24" name="Picture 23" descr="eye_slate.png"/>
-          <p:cNvPicPr>
-            <a:picLocks noChangeAspect="1"/>
-          </p:cNvPicPr>
-          <p:nvPr/>
-        </p:nvPicPr>
-        <p:blipFill>
-          <a:blip r:embed="rId4"/>
-          <a:stretch>
-            <a:fillRect/>
-          </a:stretch>
-        </p:blipFill>
-        <p:spPr>
-          <a:xfrm>
-            <a:off x="8843619" y="3108960"/>
-            <a:ext cx="475488" cy="475488"/>
-          </a:xfrm>
-          <a:prstGeom prst="rect">
-            <a:avLst/>
-          </a:prstGeom>
-        </p:spPr>
-      </p:pic>
-      <p:sp>
-        <p:nvSpPr>
-          <p:cNvPr id="25" name="TextBox 24"/>
-          <p:cNvSpPr txBox="1"/>
-          <p:nvPr/>
-        </p:nvSpPr>
-        <p:spPr>
-          <a:xfrm>
-            <a:off x="7050024" y="3721608"/>
-            <a:ext cx="4062679" cy="1481328"/>
-          </a:xfrm>
-          <a:prstGeom prst="rect">
-            <a:avLst/>
-          </a:prstGeom>
-          <a:noFill/>
-        </p:spPr>
-        <p:txBody>
-          <a:bodyPr wrap="square" anchor="t" lIns="0" rIns="0" tIns="0" bIns="0">
-            <a:spAutoFit/>
-          </a:bodyPr>
-          <a:lstStyle/>
-          <a:p>
-            <a:pPr algn="l">
-              <a:lnSpc>
-                <a:spcPct val="120000"/>
-              </a:lnSpc>
-              <a:spcBef>
-                <a:spcPts val="0"/>
-              </a:spcBef>
-              <a:spcAft>
-                <a:spcPts val="0"/>
-              </a:spcAft>
-            </a:pPr>
-            <a:r>
-              <a:rPr sz="950" b="0">
-                <a:solidFill>
-                  <a:srgbClr val="8A9099"/>
-                </a:solidFill>
-                <a:latin typeface="Red Hat Text"/>
-              </a:rPr>
-              <a:t>A split card: left "Route / Gateway API → HTTP(S), SNI, hostname/path" (green); right "raw TCP / UDP / passthrough → service mesh" (amber), arrow pointing to the later module.</a:t>
             </a:r>
           </a:p>
         </p:txBody>
@@ -9858,11 +10526,11 @@
         <p:spPr>
           <a:xfrm>
             <a:off x="841248" y="2670048"/>
-            <a:ext cx="5715000" cy="530352"/>
+            <a:ext cx="5138928" cy="786384"/>
           </a:xfrm>
           <a:prstGeom prst="roundRect">
             <a:avLst>
-              <a:gd name="adj" fmla="val 6000"/>
+              <a:gd name="adj" fmla="val 7000"/>
             </a:avLst>
           </a:prstGeom>
           <a:solidFill>
@@ -9897,9 +10565,55 @@
           </a:p>
         </p:txBody>
       </p:sp>
+      <p:sp>
+        <p:nvSpPr>
+          <p:cNvPr id="8" name="Rounded Rectangle 7"/>
+          <p:cNvSpPr/>
+          <p:nvPr/>
+        </p:nvSpPr>
+        <p:spPr>
+          <a:xfrm>
+            <a:off x="987552" y="2807208"/>
+            <a:ext cx="512064" cy="512064"/>
+          </a:xfrm>
+          <a:prstGeom prst="roundRect">
+            <a:avLst>
+              <a:gd name="adj" fmla="val 26000"/>
+            </a:avLst>
+          </a:prstGeom>
+          <a:solidFill>
+            <a:srgbClr val="EE0000"/>
+          </a:solidFill>
+          <a:ln>
+            <a:noFill/>
+          </a:ln>
+          <a:effectLst/>
+        </p:spPr>
+        <p:style>
+          <a:lnRef idx="1">
+            <a:schemeClr val="accent1"/>
+          </a:lnRef>
+          <a:fillRef idx="3">
+            <a:schemeClr val="accent1"/>
+          </a:fillRef>
+          <a:effectRef idx="2">
+            <a:schemeClr val="accent1"/>
+          </a:effectRef>
+          <a:fontRef idx="minor">
+            <a:schemeClr val="lt1"/>
+          </a:fontRef>
+        </p:style>
+        <p:txBody>
+          <a:bodyPr rtlCol="0" anchor="ctr"/>
+          <a:lstStyle/>
+          <a:p>
+            <a:pPr algn="ctr"/>
+          </a:p>
+        </p:txBody>
+      </p:sp>
       <p:pic>
         <p:nvPicPr>
-          <p:cNvPr id="8" name="Picture 7" descr="check_steel.png"/>
+          <p:cNvPr id="9" name="Picture 8" descr="check_white.png"/>
           <p:cNvPicPr>
             <a:picLocks noChangeAspect="1"/>
           </p:cNvPicPr>
@@ -9913,8 +10627,8 @@
         </p:blipFill>
         <p:spPr>
           <a:xfrm>
-            <a:off x="987552" y="2816352"/>
-            <a:ext cx="237744" cy="237744"/>
+            <a:off x="1110447" y="2930103"/>
+            <a:ext cx="266273" cy="266273"/>
           </a:xfrm>
           <a:prstGeom prst="rect">
             <a:avLst/>
@@ -9923,14 +10637,14 @@
       </p:pic>
       <p:sp>
         <p:nvSpPr>
-          <p:cNvPr id="9" name="TextBox 8"/>
+          <p:cNvPr id="10" name="TextBox 9"/>
           <p:cNvSpPr txBox="1"/>
           <p:nvPr/>
         </p:nvSpPr>
         <p:spPr>
           <a:xfrm>
-            <a:off x="1353312" y="2670048"/>
-            <a:ext cx="5029200" cy="530352"/>
+            <a:off x="1627632" y="2670048"/>
+            <a:ext cx="4206240" cy="786384"/>
           </a:xfrm>
           <a:prstGeom prst="rect">
             <a:avLst/>
@@ -9955,7 +10669,7 @@
               </a:spcAft>
             </a:pPr>
             <a:r>
-              <a:rPr sz="1200" b="0">
+              <a:rPr sz="1150" b="0">
                 <a:solidFill>
                   <a:srgbClr val="1A1A1A"/>
                 </a:solidFill>
@@ -9968,18 +10682,18 @@
       </p:sp>
       <p:sp>
         <p:nvSpPr>
-          <p:cNvPr id="10" name="Rounded Rectangle 9"/>
+          <p:cNvPr id="11" name="Rounded Rectangle 10"/>
           <p:cNvSpPr/>
           <p:nvPr/>
         </p:nvSpPr>
         <p:spPr>
           <a:xfrm>
-            <a:off x="841248" y="3273552"/>
-            <a:ext cx="5715000" cy="530352"/>
+            <a:off x="6254496" y="2670048"/>
+            <a:ext cx="5138928" cy="786384"/>
           </a:xfrm>
           <a:prstGeom prst="roundRect">
             <a:avLst>
-              <a:gd name="adj" fmla="val 6000"/>
+              <a:gd name="adj" fmla="val 7000"/>
             </a:avLst>
           </a:prstGeom>
           <a:solidFill>
@@ -10014,9 +10728,55 @@
           </a:p>
         </p:txBody>
       </p:sp>
+      <p:sp>
+        <p:nvSpPr>
+          <p:cNvPr id="12" name="Rounded Rectangle 11"/>
+          <p:cNvSpPr/>
+          <p:nvPr/>
+        </p:nvSpPr>
+        <p:spPr>
+          <a:xfrm>
+            <a:off x="6400800" y="2807208"/>
+            <a:ext cx="512064" cy="512064"/>
+          </a:xfrm>
+          <a:prstGeom prst="roundRect">
+            <a:avLst>
+              <a:gd name="adj" fmla="val 26000"/>
+            </a:avLst>
+          </a:prstGeom>
+          <a:solidFill>
+            <a:srgbClr val="EE0000"/>
+          </a:solidFill>
+          <a:ln>
+            <a:noFill/>
+          </a:ln>
+          <a:effectLst/>
+        </p:spPr>
+        <p:style>
+          <a:lnRef idx="1">
+            <a:schemeClr val="accent1"/>
+          </a:lnRef>
+          <a:fillRef idx="3">
+            <a:schemeClr val="accent1"/>
+          </a:fillRef>
+          <a:effectRef idx="2">
+            <a:schemeClr val="accent1"/>
+          </a:effectRef>
+          <a:fontRef idx="minor">
+            <a:schemeClr val="lt1"/>
+          </a:fontRef>
+        </p:style>
+        <p:txBody>
+          <a:bodyPr rtlCol="0" anchor="ctr"/>
+          <a:lstStyle/>
+          <a:p>
+            <a:pPr algn="ctr"/>
+          </a:p>
+        </p:txBody>
+      </p:sp>
       <p:pic>
         <p:nvPicPr>
-          <p:cNvPr id="11" name="Picture 10" descr="check_steel.png"/>
+          <p:cNvPr id="13" name="Picture 12" descr="check_white.png"/>
           <p:cNvPicPr>
             <a:picLocks noChangeAspect="1"/>
           </p:cNvPicPr>
@@ -10030,8 +10790,8 @@
         </p:blipFill>
         <p:spPr>
           <a:xfrm>
-            <a:off x="987552" y="3419856"/>
-            <a:ext cx="237744" cy="237744"/>
+            <a:off x="6523695" y="2930103"/>
+            <a:ext cx="266273" cy="266273"/>
           </a:xfrm>
           <a:prstGeom prst="rect">
             <a:avLst/>
@@ -10040,14 +10800,14 @@
       </p:pic>
       <p:sp>
         <p:nvSpPr>
-          <p:cNvPr id="12" name="TextBox 11"/>
+          <p:cNvPr id="14" name="TextBox 13"/>
           <p:cNvSpPr txBox="1"/>
           <p:nvPr/>
         </p:nvSpPr>
         <p:spPr>
           <a:xfrm>
-            <a:off x="1353312" y="3273552"/>
-            <a:ext cx="5029200" cy="530352"/>
+            <a:off x="7040880" y="2670048"/>
+            <a:ext cx="4206240" cy="786384"/>
           </a:xfrm>
           <a:prstGeom prst="rect">
             <a:avLst/>
@@ -10072,7 +10832,7 @@
               </a:spcAft>
             </a:pPr>
             <a:r>
-              <a:rPr sz="1200" b="0">
+              <a:rPr sz="1150" b="0">
                 <a:solidFill>
                   <a:srgbClr val="1A1A1A"/>
                 </a:solidFill>
@@ -10085,18 +10845,18 @@
       </p:sp>
       <p:sp>
         <p:nvSpPr>
-          <p:cNvPr id="13" name="Rounded Rectangle 12"/>
+          <p:cNvPr id="15" name="Rounded Rectangle 14"/>
           <p:cNvSpPr/>
           <p:nvPr/>
         </p:nvSpPr>
         <p:spPr>
           <a:xfrm>
-            <a:off x="841248" y="3877056"/>
-            <a:ext cx="5715000" cy="530352"/>
+            <a:off x="841248" y="3602736"/>
+            <a:ext cx="5138928" cy="786384"/>
           </a:xfrm>
           <a:prstGeom prst="roundRect">
             <a:avLst>
-              <a:gd name="adj" fmla="val 6000"/>
+              <a:gd name="adj" fmla="val 7000"/>
             </a:avLst>
           </a:prstGeom>
           <a:solidFill>
@@ -10131,9 +10891,55 @@
           </a:p>
         </p:txBody>
       </p:sp>
+      <p:sp>
+        <p:nvSpPr>
+          <p:cNvPr id="16" name="Rounded Rectangle 15"/>
+          <p:cNvSpPr/>
+          <p:nvPr/>
+        </p:nvSpPr>
+        <p:spPr>
+          <a:xfrm>
+            <a:off x="987552" y="3739896"/>
+            <a:ext cx="512064" cy="512064"/>
+          </a:xfrm>
+          <a:prstGeom prst="roundRect">
+            <a:avLst>
+              <a:gd name="adj" fmla="val 26000"/>
+            </a:avLst>
+          </a:prstGeom>
+          <a:solidFill>
+            <a:srgbClr val="EE0000"/>
+          </a:solidFill>
+          <a:ln>
+            <a:noFill/>
+          </a:ln>
+          <a:effectLst/>
+        </p:spPr>
+        <p:style>
+          <a:lnRef idx="1">
+            <a:schemeClr val="accent1"/>
+          </a:lnRef>
+          <a:fillRef idx="3">
+            <a:schemeClr val="accent1"/>
+          </a:fillRef>
+          <a:effectRef idx="2">
+            <a:schemeClr val="accent1"/>
+          </a:effectRef>
+          <a:fontRef idx="minor">
+            <a:schemeClr val="lt1"/>
+          </a:fontRef>
+        </p:style>
+        <p:txBody>
+          <a:bodyPr rtlCol="0" anchor="ctr"/>
+          <a:lstStyle/>
+          <a:p>
+            <a:pPr algn="ctr"/>
+          </a:p>
+        </p:txBody>
+      </p:sp>
       <p:pic>
         <p:nvPicPr>
-          <p:cNvPr id="14" name="Picture 13" descr="check_steel.png"/>
+          <p:cNvPr id="17" name="Picture 16" descr="check_white.png"/>
           <p:cNvPicPr>
             <a:picLocks noChangeAspect="1"/>
           </p:cNvPicPr>
@@ -10147,8 +10953,8 @@
         </p:blipFill>
         <p:spPr>
           <a:xfrm>
-            <a:off x="987552" y="4023360"/>
-            <a:ext cx="237744" cy="237744"/>
+            <a:off x="1110447" y="3862791"/>
+            <a:ext cx="266273" cy="266273"/>
           </a:xfrm>
           <a:prstGeom prst="rect">
             <a:avLst/>
@@ -10157,14 +10963,14 @@
       </p:pic>
       <p:sp>
         <p:nvSpPr>
-          <p:cNvPr id="15" name="TextBox 14"/>
+          <p:cNvPr id="18" name="TextBox 17"/>
           <p:cNvSpPr txBox="1"/>
           <p:nvPr/>
         </p:nvSpPr>
         <p:spPr>
           <a:xfrm>
-            <a:off x="1353312" y="3877056"/>
-            <a:ext cx="5029200" cy="530352"/>
+            <a:off x="1627632" y="3602736"/>
+            <a:ext cx="4206240" cy="786384"/>
           </a:xfrm>
           <a:prstGeom prst="rect">
             <a:avLst/>
@@ -10189,7 +10995,7 @@
               </a:spcAft>
             </a:pPr>
             <a:r>
-              <a:rPr sz="1200" b="0">
+              <a:rPr sz="1150" b="0">
                 <a:solidFill>
                   <a:srgbClr val="1A1A1A"/>
                 </a:solidFill>
@@ -10202,18 +11008,18 @@
       </p:sp>
       <p:sp>
         <p:nvSpPr>
-          <p:cNvPr id="16" name="Rounded Rectangle 15"/>
+          <p:cNvPr id="19" name="Rounded Rectangle 18"/>
           <p:cNvSpPr/>
           <p:nvPr/>
         </p:nvSpPr>
         <p:spPr>
           <a:xfrm>
-            <a:off x="841248" y="4480560"/>
-            <a:ext cx="5715000" cy="530352"/>
+            <a:off x="6254496" y="3602736"/>
+            <a:ext cx="5138928" cy="786384"/>
           </a:xfrm>
           <a:prstGeom prst="roundRect">
             <a:avLst>
-              <a:gd name="adj" fmla="val 6000"/>
+              <a:gd name="adj" fmla="val 7000"/>
             </a:avLst>
           </a:prstGeom>
           <a:solidFill>
@@ -10248,9 +11054,55 @@
           </a:p>
         </p:txBody>
       </p:sp>
+      <p:sp>
+        <p:nvSpPr>
+          <p:cNvPr id="20" name="Rounded Rectangle 19"/>
+          <p:cNvSpPr/>
+          <p:nvPr/>
+        </p:nvSpPr>
+        <p:spPr>
+          <a:xfrm>
+            <a:off x="6400800" y="3739896"/>
+            <a:ext cx="512064" cy="512064"/>
+          </a:xfrm>
+          <a:prstGeom prst="roundRect">
+            <a:avLst>
+              <a:gd name="adj" fmla="val 26000"/>
+            </a:avLst>
+          </a:prstGeom>
+          <a:solidFill>
+            <a:srgbClr val="EE0000"/>
+          </a:solidFill>
+          <a:ln>
+            <a:noFill/>
+          </a:ln>
+          <a:effectLst/>
+        </p:spPr>
+        <p:style>
+          <a:lnRef idx="1">
+            <a:schemeClr val="accent1"/>
+          </a:lnRef>
+          <a:fillRef idx="3">
+            <a:schemeClr val="accent1"/>
+          </a:fillRef>
+          <a:effectRef idx="2">
+            <a:schemeClr val="accent1"/>
+          </a:effectRef>
+          <a:fontRef idx="minor">
+            <a:schemeClr val="lt1"/>
+          </a:fontRef>
+        </p:style>
+        <p:txBody>
+          <a:bodyPr rtlCol="0" anchor="ctr"/>
+          <a:lstStyle/>
+          <a:p>
+            <a:pPr algn="ctr"/>
+          </a:p>
+        </p:txBody>
+      </p:sp>
       <p:pic>
         <p:nvPicPr>
-          <p:cNvPr id="17" name="Picture 16" descr="check_steel.png"/>
+          <p:cNvPr id="21" name="Picture 20" descr="check_white.png"/>
           <p:cNvPicPr>
             <a:picLocks noChangeAspect="1"/>
           </p:cNvPicPr>
@@ -10264,8 +11116,8 @@
         </p:blipFill>
         <p:spPr>
           <a:xfrm>
-            <a:off x="987552" y="4626864"/>
-            <a:ext cx="237744" cy="237744"/>
+            <a:off x="6523695" y="3862791"/>
+            <a:ext cx="266273" cy="266273"/>
           </a:xfrm>
           <a:prstGeom prst="rect">
             <a:avLst/>
@@ -10274,14 +11126,14 @@
       </p:pic>
       <p:sp>
         <p:nvSpPr>
-          <p:cNvPr id="18" name="TextBox 17"/>
+          <p:cNvPr id="22" name="TextBox 21"/>
           <p:cNvSpPr txBox="1"/>
           <p:nvPr/>
         </p:nvSpPr>
         <p:spPr>
           <a:xfrm>
-            <a:off x="1353312" y="4480560"/>
-            <a:ext cx="5029200" cy="530352"/>
+            <a:off x="7040880" y="3602736"/>
+            <a:ext cx="4206240" cy="786384"/>
           </a:xfrm>
           <a:prstGeom prst="rect">
             <a:avLst/>
@@ -10306,7 +11158,7 @@
               </a:spcAft>
             </a:pPr>
             <a:r>
-              <a:rPr sz="1200" b="0">
+              <a:rPr sz="1150" b="0">
                 <a:solidFill>
                   <a:srgbClr val="1A1A1A"/>
                 </a:solidFill>
@@ -10319,18 +11171,18 @@
       </p:sp>
       <p:sp>
         <p:nvSpPr>
-          <p:cNvPr id="19" name="Rounded Rectangle 18"/>
+          <p:cNvPr id="23" name="Rounded Rectangle 22"/>
           <p:cNvSpPr/>
           <p:nvPr/>
         </p:nvSpPr>
         <p:spPr>
           <a:xfrm>
-            <a:off x="841248" y="5084064"/>
-            <a:ext cx="5715000" cy="530352"/>
+            <a:off x="841248" y="4535424"/>
+            <a:ext cx="5138928" cy="786384"/>
           </a:xfrm>
           <a:prstGeom prst="roundRect">
             <a:avLst>
-              <a:gd name="adj" fmla="val 6000"/>
+              <a:gd name="adj" fmla="val 7000"/>
             </a:avLst>
           </a:prstGeom>
           <a:solidFill>
@@ -10365,9 +11217,55 @@
           </a:p>
         </p:txBody>
       </p:sp>
+      <p:sp>
+        <p:nvSpPr>
+          <p:cNvPr id="24" name="Rounded Rectangle 23"/>
+          <p:cNvSpPr/>
+          <p:nvPr/>
+        </p:nvSpPr>
+        <p:spPr>
+          <a:xfrm>
+            <a:off x="987552" y="4672584"/>
+            <a:ext cx="512064" cy="512064"/>
+          </a:xfrm>
+          <a:prstGeom prst="roundRect">
+            <a:avLst>
+              <a:gd name="adj" fmla="val 26000"/>
+            </a:avLst>
+          </a:prstGeom>
+          <a:solidFill>
+            <a:srgbClr val="EE0000"/>
+          </a:solidFill>
+          <a:ln>
+            <a:noFill/>
+          </a:ln>
+          <a:effectLst/>
+        </p:spPr>
+        <p:style>
+          <a:lnRef idx="1">
+            <a:schemeClr val="accent1"/>
+          </a:lnRef>
+          <a:fillRef idx="3">
+            <a:schemeClr val="accent1"/>
+          </a:fillRef>
+          <a:effectRef idx="2">
+            <a:schemeClr val="accent1"/>
+          </a:effectRef>
+          <a:fontRef idx="minor">
+            <a:schemeClr val="lt1"/>
+          </a:fontRef>
+        </p:style>
+        <p:txBody>
+          <a:bodyPr rtlCol="0" anchor="ctr"/>
+          <a:lstStyle/>
+          <a:p>
+            <a:pPr algn="ctr"/>
+          </a:p>
+        </p:txBody>
+      </p:sp>
       <p:pic>
         <p:nvPicPr>
-          <p:cNvPr id="20" name="Picture 19" descr="check_steel.png"/>
+          <p:cNvPr id="25" name="Picture 24" descr="check_white.png"/>
           <p:cNvPicPr>
             <a:picLocks noChangeAspect="1"/>
           </p:cNvPicPr>
@@ -10381,8 +11279,8 @@
         </p:blipFill>
         <p:spPr>
           <a:xfrm>
-            <a:off x="987552" y="5230368"/>
-            <a:ext cx="237744" cy="237744"/>
+            <a:off x="1110447" y="4795479"/>
+            <a:ext cx="266273" cy="266273"/>
           </a:xfrm>
           <a:prstGeom prst="rect">
             <a:avLst/>
@@ -10391,14 +11289,14 @@
       </p:pic>
       <p:sp>
         <p:nvSpPr>
-          <p:cNvPr id="21" name="TextBox 20"/>
+          <p:cNvPr id="26" name="TextBox 25"/>
           <p:cNvSpPr txBox="1"/>
           <p:nvPr/>
         </p:nvSpPr>
         <p:spPr>
           <a:xfrm>
-            <a:off x="1353312" y="5084064"/>
-            <a:ext cx="5029200" cy="530352"/>
+            <a:off x="1627632" y="4535424"/>
+            <a:ext cx="4206240" cy="786384"/>
           </a:xfrm>
           <a:prstGeom prst="rect">
             <a:avLst/>
@@ -10423,221 +11321,13 @@
               </a:spcAft>
             </a:pPr>
             <a:r>
-              <a:rPr sz="1200" b="0">
+              <a:rPr sz="1150" b="0">
                 <a:solidFill>
                   <a:srgbClr val="1A1A1A"/>
                 </a:solidFill>
                 <a:latin typeface="Red Hat Text"/>
               </a:rPr>
               <a:t>The gotcha: default-deny eats DNS too</a:t>
-            </a:r>
-          </a:p>
-        </p:txBody>
-      </p:sp>
-      <p:sp>
-        <p:nvSpPr>
-          <p:cNvPr id="22" name="Rounded Rectangle 21"/>
-          <p:cNvSpPr/>
-          <p:nvPr/>
-        </p:nvSpPr>
-        <p:spPr>
-          <a:xfrm>
-            <a:off x="6812280" y="2670048"/>
-            <a:ext cx="4538167" cy="2944368"/>
-          </a:xfrm>
-          <a:prstGeom prst="roundRect">
-            <a:avLst>
-              <a:gd name="adj" fmla="val 4000"/>
-            </a:avLst>
-          </a:prstGeom>
-          <a:solidFill>
-            <a:srgbClr val="FFFFFF"/>
-          </a:solidFill>
-          <a:ln w="15240">
-            <a:solidFill>
-              <a:srgbClr val="DDE1E6"/>
-            </a:solidFill>
-          </a:ln>
-          <a:effectLst/>
-        </p:spPr>
-        <p:style>
-          <a:lnRef idx="1">
-            <a:schemeClr val="accent1"/>
-          </a:lnRef>
-          <a:fillRef idx="3">
-            <a:schemeClr val="accent1"/>
-          </a:fillRef>
-          <a:effectRef idx="2">
-            <a:schemeClr val="accent1"/>
-          </a:effectRef>
-          <a:fontRef idx="minor">
-            <a:schemeClr val="lt1"/>
-          </a:fontRef>
-        </p:style>
-        <p:txBody>
-          <a:bodyPr rtlCol="0" anchor="ctr"/>
-          <a:lstStyle/>
-          <a:p>
-            <a:pPr algn="ctr"/>
-          </a:p>
-        </p:txBody>
-      </p:sp>
-      <p:sp>
-        <p:nvSpPr>
-          <p:cNvPr id="23" name="Rounded Rectangle 22"/>
-          <p:cNvSpPr/>
-          <p:nvPr/>
-        </p:nvSpPr>
-        <p:spPr>
-          <a:xfrm>
-            <a:off x="7013448" y="2871216"/>
-            <a:ext cx="1298448" cy="310896"/>
-          </a:xfrm>
-          <a:prstGeom prst="roundRect">
-            <a:avLst>
-              <a:gd name="adj" fmla="val 50000"/>
-            </a:avLst>
-          </a:prstGeom>
-          <a:solidFill>
-            <a:srgbClr val="FCECEC"/>
-          </a:solidFill>
-          <a:ln>
-            <a:noFill/>
-          </a:ln>
-          <a:effectLst/>
-        </p:spPr>
-        <p:style>
-          <a:lnRef idx="1">
-            <a:schemeClr val="accent1"/>
-          </a:lnRef>
-          <a:fillRef idx="3">
-            <a:schemeClr val="accent1"/>
-          </a:fillRef>
-          <a:effectRef idx="2">
-            <a:schemeClr val="accent1"/>
-          </a:effectRef>
-          <a:fontRef idx="minor">
-            <a:schemeClr val="lt1"/>
-          </a:fontRef>
-        </p:style>
-        <p:txBody>
-          <a:bodyPr rtlCol="0" anchor="ctr"/>
-          <a:lstStyle/>
-          <a:p>
-            <a:pPr algn="ctr"/>
-          </a:p>
-        </p:txBody>
-      </p:sp>
-      <p:sp>
-        <p:nvSpPr>
-          <p:cNvPr id="24" name="TextBox 23"/>
-          <p:cNvSpPr txBox="1"/>
-          <p:nvPr/>
-        </p:nvSpPr>
-        <p:spPr>
-          <a:xfrm>
-            <a:off x="7013448" y="2871216"/>
-            <a:ext cx="1298448" cy="310896"/>
-          </a:xfrm>
-          <a:prstGeom prst="rect">
-            <a:avLst/>
-          </a:prstGeom>
-          <a:noFill/>
-        </p:spPr>
-        <p:txBody>
-          <a:bodyPr wrap="none" anchor="ctr" lIns="0" rIns="0" tIns="0" bIns="0">
-            <a:spAutoFit/>
-          </a:bodyPr>
-          <a:lstStyle/>
-          <a:p>
-            <a:pPr algn="ctr">
-              <a:lnSpc>
-                <a:spcPct val="106000"/>
-              </a:lnSpc>
-              <a:spcBef>
-                <a:spcPts val="0"/>
-              </a:spcBef>
-              <a:spcAft>
-                <a:spcPts val="0"/>
-              </a:spcAft>
-            </a:pPr>
-            <a:r>
-              <a:rPr sz="850" b="1">
-                <a:solidFill>
-                  <a:srgbClr val="B80000"/>
-                </a:solidFill>
-                <a:latin typeface="Red Hat Display"/>
-              </a:rPr>
-              <a:t>MEDIA PASS</a:t>
-            </a:r>
-          </a:p>
-        </p:txBody>
-      </p:sp>
-      <p:pic>
-        <p:nvPicPr>
-          <p:cNvPr id="25" name="Picture 24" descr="eye_slate.png"/>
-          <p:cNvPicPr>
-            <a:picLocks noChangeAspect="1"/>
-          </p:cNvPicPr>
-          <p:nvPr/>
-        </p:nvPicPr>
-        <p:blipFill>
-          <a:blip r:embed="rId4"/>
-          <a:stretch>
-            <a:fillRect/>
-          </a:stretch>
-        </p:blipFill>
-        <p:spPr>
-          <a:xfrm>
-            <a:off x="8843619" y="3383280"/>
-            <a:ext cx="475488" cy="475488"/>
-          </a:xfrm>
-          <a:prstGeom prst="rect">
-            <a:avLst/>
-          </a:prstGeom>
-        </p:spPr>
-      </p:pic>
-      <p:sp>
-        <p:nvSpPr>
-          <p:cNvPr id="26" name="TextBox 25"/>
-          <p:cNvSpPr txBox="1"/>
-          <p:nvPr/>
-        </p:nvSpPr>
-        <p:spPr>
-          <a:xfrm>
-            <a:off x="7050024" y="3995928"/>
-            <a:ext cx="4062679" cy="1481328"/>
-          </a:xfrm>
-          <a:prstGeom prst="rect">
-            <a:avLst/>
-          </a:prstGeom>
-          <a:noFill/>
-        </p:spPr>
-        <p:txBody>
-          <a:bodyPr wrap="square" anchor="t" lIns="0" rIns="0" tIns="0" bIns="0">
-            <a:spAutoFit/>
-          </a:bodyPr>
-          <a:lstStyle/>
-          <a:p>
-            <a:pPr algn="l">
-              <a:lnSpc>
-                <a:spcPct val="120000"/>
-              </a:lnSpc>
-              <a:spcBef>
-                <a:spcPts val="0"/>
-              </a:spcBef>
-              <a:spcAft>
-                <a:spcPts val="0"/>
-              </a:spcAft>
-            </a:pPr>
-            <a:r>
-              <a:rPr sz="950" b="0">
-                <a:solidFill>
-                  <a:srgbClr val="8A9099"/>
-                </a:solidFill>
-                <a:latin typeface="Red Hat Text"/>
-              </a:rPr>
-              <a:t>Two-panel before/after: left "default-deny (everything red)"; right "precise allows (web→api→db green, demo-client→db red)", footnote "+ allow DNS egress (CoreDNS port, not 53)".</a:t>
             </a:r>
           </a:p>
         </p:txBody>
@@ -10990,11 +11680,11 @@
         <p:spPr>
           <a:xfrm>
             <a:off x="841248" y="2670048"/>
-            <a:ext cx="5715000" cy="530352"/>
+            <a:ext cx="5138928" cy="786384"/>
           </a:xfrm>
           <a:prstGeom prst="roundRect">
             <a:avLst>
-              <a:gd name="adj" fmla="val 6000"/>
+              <a:gd name="adj" fmla="val 7000"/>
             </a:avLst>
           </a:prstGeom>
           <a:solidFill>
@@ -11029,9 +11719,55 @@
           </a:p>
         </p:txBody>
       </p:sp>
+      <p:sp>
+        <p:nvSpPr>
+          <p:cNvPr id="8" name="Rounded Rectangle 7"/>
+          <p:cNvSpPr/>
+          <p:nvPr/>
+        </p:nvSpPr>
+        <p:spPr>
+          <a:xfrm>
+            <a:off x="987552" y="2807208"/>
+            <a:ext cx="512064" cy="512064"/>
+          </a:xfrm>
+          <a:prstGeom prst="roundRect">
+            <a:avLst>
+              <a:gd name="adj" fmla="val 26000"/>
+            </a:avLst>
+          </a:prstGeom>
+          <a:solidFill>
+            <a:srgbClr val="EE0000"/>
+          </a:solidFill>
+          <a:ln>
+            <a:noFill/>
+          </a:ln>
+          <a:effectLst/>
+        </p:spPr>
+        <p:style>
+          <a:lnRef idx="1">
+            <a:schemeClr val="accent1"/>
+          </a:lnRef>
+          <a:fillRef idx="3">
+            <a:schemeClr val="accent1"/>
+          </a:fillRef>
+          <a:effectRef idx="2">
+            <a:schemeClr val="accent1"/>
+          </a:effectRef>
+          <a:fontRef idx="minor">
+            <a:schemeClr val="lt1"/>
+          </a:fontRef>
+        </p:style>
+        <p:txBody>
+          <a:bodyPr rtlCol="0" anchor="ctr"/>
+          <a:lstStyle/>
+          <a:p>
+            <a:pPr algn="ctr"/>
+          </a:p>
+        </p:txBody>
+      </p:sp>
       <p:pic>
         <p:nvPicPr>
-          <p:cNvPr id="8" name="Picture 7" descr="check_steel.png"/>
+          <p:cNvPr id="9" name="Picture 8" descr="check_white.png"/>
           <p:cNvPicPr>
             <a:picLocks noChangeAspect="1"/>
           </p:cNvPicPr>
@@ -11045,8 +11781,8 @@
         </p:blipFill>
         <p:spPr>
           <a:xfrm>
-            <a:off x="987552" y="2816352"/>
-            <a:ext cx="237744" cy="237744"/>
+            <a:off x="1110447" y="2930103"/>
+            <a:ext cx="266273" cy="266273"/>
           </a:xfrm>
           <a:prstGeom prst="rect">
             <a:avLst/>
@@ -11055,14 +11791,14 @@
       </p:pic>
       <p:sp>
         <p:nvSpPr>
-          <p:cNvPr id="9" name="TextBox 8"/>
+          <p:cNvPr id="10" name="TextBox 9"/>
           <p:cNvSpPr txBox="1"/>
           <p:nvPr/>
         </p:nvSpPr>
         <p:spPr>
           <a:xfrm>
-            <a:off x="1353312" y="2670048"/>
-            <a:ext cx="5029200" cy="530352"/>
+            <a:off x="1627632" y="2670048"/>
+            <a:ext cx="4206240" cy="786384"/>
           </a:xfrm>
           <a:prstGeom prst="rect">
             <a:avLst/>
@@ -11087,7 +11823,7 @@
               </a:spcAft>
             </a:pPr>
             <a:r>
-              <a:rPr sz="1200" b="0">
+              <a:rPr sz="1150" b="0">
                 <a:solidFill>
                   <a:srgbClr val="1A1A1A"/>
                 </a:solidFill>
@@ -11100,18 +11836,18 @@
       </p:sp>
       <p:sp>
         <p:nvSpPr>
-          <p:cNvPr id="10" name="Rounded Rectangle 9"/>
+          <p:cNvPr id="11" name="Rounded Rectangle 10"/>
           <p:cNvSpPr/>
           <p:nvPr/>
         </p:nvSpPr>
         <p:spPr>
           <a:xfrm>
-            <a:off x="841248" y="3273552"/>
-            <a:ext cx="5715000" cy="530352"/>
+            <a:off x="6254496" y="2670048"/>
+            <a:ext cx="5138928" cy="786384"/>
           </a:xfrm>
           <a:prstGeom prst="roundRect">
             <a:avLst>
-              <a:gd name="adj" fmla="val 6000"/>
+              <a:gd name="adj" fmla="val 7000"/>
             </a:avLst>
           </a:prstGeom>
           <a:solidFill>
@@ -11146,9 +11882,55 @@
           </a:p>
         </p:txBody>
       </p:sp>
+      <p:sp>
+        <p:nvSpPr>
+          <p:cNvPr id="12" name="Rounded Rectangle 11"/>
+          <p:cNvSpPr/>
+          <p:nvPr/>
+        </p:nvSpPr>
+        <p:spPr>
+          <a:xfrm>
+            <a:off x="6400800" y="2807208"/>
+            <a:ext cx="512064" cy="512064"/>
+          </a:xfrm>
+          <a:prstGeom prst="roundRect">
+            <a:avLst>
+              <a:gd name="adj" fmla="val 26000"/>
+            </a:avLst>
+          </a:prstGeom>
+          <a:solidFill>
+            <a:srgbClr val="EE0000"/>
+          </a:solidFill>
+          <a:ln>
+            <a:noFill/>
+          </a:ln>
+          <a:effectLst/>
+        </p:spPr>
+        <p:style>
+          <a:lnRef idx="1">
+            <a:schemeClr val="accent1"/>
+          </a:lnRef>
+          <a:fillRef idx="3">
+            <a:schemeClr val="accent1"/>
+          </a:fillRef>
+          <a:effectRef idx="2">
+            <a:schemeClr val="accent1"/>
+          </a:effectRef>
+          <a:fontRef idx="minor">
+            <a:schemeClr val="lt1"/>
+          </a:fontRef>
+        </p:style>
+        <p:txBody>
+          <a:bodyPr rtlCol="0" anchor="ctr"/>
+          <a:lstStyle/>
+          <a:p>
+            <a:pPr algn="ctr"/>
+          </a:p>
+        </p:txBody>
+      </p:sp>
       <p:pic>
         <p:nvPicPr>
-          <p:cNvPr id="11" name="Picture 10" descr="check_steel.png"/>
+          <p:cNvPr id="13" name="Picture 12" descr="check_white.png"/>
           <p:cNvPicPr>
             <a:picLocks noChangeAspect="1"/>
           </p:cNvPicPr>
@@ -11162,8 +11944,8 @@
         </p:blipFill>
         <p:spPr>
           <a:xfrm>
-            <a:off x="987552" y="3419856"/>
-            <a:ext cx="237744" cy="237744"/>
+            <a:off x="6523695" y="2930103"/>
+            <a:ext cx="266273" cy="266273"/>
           </a:xfrm>
           <a:prstGeom prst="rect">
             <a:avLst/>
@@ -11172,14 +11954,14 @@
       </p:pic>
       <p:sp>
         <p:nvSpPr>
-          <p:cNvPr id="12" name="TextBox 11"/>
+          <p:cNvPr id="14" name="TextBox 13"/>
           <p:cNvSpPr txBox="1"/>
           <p:nvPr/>
         </p:nvSpPr>
         <p:spPr>
           <a:xfrm>
-            <a:off x="1353312" y="3273552"/>
-            <a:ext cx="5029200" cy="530352"/>
+            <a:off x="7040880" y="2670048"/>
+            <a:ext cx="4206240" cy="786384"/>
           </a:xfrm>
           <a:prstGeom prst="rect">
             <a:avLst/>
@@ -11204,7 +11986,7 @@
               </a:spcAft>
             </a:pPr>
             <a:r>
-              <a:rPr sz="1200" b="0">
+              <a:rPr sz="1150" b="0">
                 <a:solidFill>
                   <a:srgbClr val="1A1A1A"/>
                 </a:solidFill>
@@ -11217,18 +11999,18 @@
       </p:sp>
       <p:sp>
         <p:nvSpPr>
-          <p:cNvPr id="13" name="Rounded Rectangle 12"/>
+          <p:cNvPr id="15" name="Rounded Rectangle 14"/>
           <p:cNvSpPr/>
           <p:nvPr/>
         </p:nvSpPr>
         <p:spPr>
           <a:xfrm>
-            <a:off x="841248" y="3877056"/>
-            <a:ext cx="5715000" cy="530352"/>
+            <a:off x="841248" y="3602736"/>
+            <a:ext cx="5138928" cy="786384"/>
           </a:xfrm>
           <a:prstGeom prst="roundRect">
             <a:avLst>
-              <a:gd name="adj" fmla="val 6000"/>
+              <a:gd name="adj" fmla="val 7000"/>
             </a:avLst>
           </a:prstGeom>
           <a:solidFill>
@@ -11263,9 +12045,55 @@
           </a:p>
         </p:txBody>
       </p:sp>
+      <p:sp>
+        <p:nvSpPr>
+          <p:cNvPr id="16" name="Rounded Rectangle 15"/>
+          <p:cNvSpPr/>
+          <p:nvPr/>
+        </p:nvSpPr>
+        <p:spPr>
+          <a:xfrm>
+            <a:off x="987552" y="3739896"/>
+            <a:ext cx="512064" cy="512064"/>
+          </a:xfrm>
+          <a:prstGeom prst="roundRect">
+            <a:avLst>
+              <a:gd name="adj" fmla="val 26000"/>
+            </a:avLst>
+          </a:prstGeom>
+          <a:solidFill>
+            <a:srgbClr val="EE0000"/>
+          </a:solidFill>
+          <a:ln>
+            <a:noFill/>
+          </a:ln>
+          <a:effectLst/>
+        </p:spPr>
+        <p:style>
+          <a:lnRef idx="1">
+            <a:schemeClr val="accent1"/>
+          </a:lnRef>
+          <a:fillRef idx="3">
+            <a:schemeClr val="accent1"/>
+          </a:fillRef>
+          <a:effectRef idx="2">
+            <a:schemeClr val="accent1"/>
+          </a:effectRef>
+          <a:fontRef idx="minor">
+            <a:schemeClr val="lt1"/>
+          </a:fontRef>
+        </p:style>
+        <p:txBody>
+          <a:bodyPr rtlCol="0" anchor="ctr"/>
+          <a:lstStyle/>
+          <a:p>
+            <a:pPr algn="ctr"/>
+          </a:p>
+        </p:txBody>
+      </p:sp>
       <p:pic>
         <p:nvPicPr>
-          <p:cNvPr id="14" name="Picture 13" descr="check_steel.png"/>
+          <p:cNvPr id="17" name="Picture 16" descr="check_white.png"/>
           <p:cNvPicPr>
             <a:picLocks noChangeAspect="1"/>
           </p:cNvPicPr>
@@ -11279,8 +12107,8 @@
         </p:blipFill>
         <p:spPr>
           <a:xfrm>
-            <a:off x="987552" y="4023360"/>
-            <a:ext cx="237744" cy="237744"/>
+            <a:off x="1110447" y="3862791"/>
+            <a:ext cx="266273" cy="266273"/>
           </a:xfrm>
           <a:prstGeom prst="rect">
             <a:avLst/>
@@ -11289,14 +12117,14 @@
       </p:pic>
       <p:sp>
         <p:nvSpPr>
-          <p:cNvPr id="15" name="TextBox 14"/>
+          <p:cNvPr id="18" name="TextBox 17"/>
           <p:cNvSpPr txBox="1"/>
           <p:nvPr/>
         </p:nvSpPr>
         <p:spPr>
           <a:xfrm>
-            <a:off x="1353312" y="3877056"/>
-            <a:ext cx="5029200" cy="530352"/>
+            <a:off x="1627632" y="3602736"/>
+            <a:ext cx="4206240" cy="786384"/>
           </a:xfrm>
           <a:prstGeom prst="rect">
             <a:avLst/>
@@ -11321,7 +12149,7 @@
               </a:spcAft>
             </a:pPr>
             <a:r>
-              <a:rPr sz="1200" b="0">
+              <a:rPr sz="1150" b="0">
                 <a:solidFill>
                   <a:srgbClr val="1A1A1A"/>
                 </a:solidFill>
@@ -11334,18 +12162,18 @@
       </p:sp>
       <p:sp>
         <p:nvSpPr>
-          <p:cNvPr id="16" name="Rounded Rectangle 15"/>
+          <p:cNvPr id="19" name="Rounded Rectangle 18"/>
           <p:cNvSpPr/>
           <p:nvPr/>
         </p:nvSpPr>
         <p:spPr>
           <a:xfrm>
-            <a:off x="841248" y="4480560"/>
-            <a:ext cx="5715000" cy="530352"/>
+            <a:off x="6254496" y="3602736"/>
+            <a:ext cx="5138928" cy="786384"/>
           </a:xfrm>
           <a:prstGeom prst="roundRect">
             <a:avLst>
-              <a:gd name="adj" fmla="val 6000"/>
+              <a:gd name="adj" fmla="val 7000"/>
             </a:avLst>
           </a:prstGeom>
           <a:solidFill>
@@ -11380,9 +12208,55 @@
           </a:p>
         </p:txBody>
       </p:sp>
+      <p:sp>
+        <p:nvSpPr>
+          <p:cNvPr id="20" name="Rounded Rectangle 19"/>
+          <p:cNvSpPr/>
+          <p:nvPr/>
+        </p:nvSpPr>
+        <p:spPr>
+          <a:xfrm>
+            <a:off x="6400800" y="3739896"/>
+            <a:ext cx="512064" cy="512064"/>
+          </a:xfrm>
+          <a:prstGeom prst="roundRect">
+            <a:avLst>
+              <a:gd name="adj" fmla="val 26000"/>
+            </a:avLst>
+          </a:prstGeom>
+          <a:solidFill>
+            <a:srgbClr val="EE0000"/>
+          </a:solidFill>
+          <a:ln>
+            <a:noFill/>
+          </a:ln>
+          <a:effectLst/>
+        </p:spPr>
+        <p:style>
+          <a:lnRef idx="1">
+            <a:schemeClr val="accent1"/>
+          </a:lnRef>
+          <a:fillRef idx="3">
+            <a:schemeClr val="accent1"/>
+          </a:fillRef>
+          <a:effectRef idx="2">
+            <a:schemeClr val="accent1"/>
+          </a:effectRef>
+          <a:fontRef idx="minor">
+            <a:schemeClr val="lt1"/>
+          </a:fontRef>
+        </p:style>
+        <p:txBody>
+          <a:bodyPr rtlCol="0" anchor="ctr"/>
+          <a:lstStyle/>
+          <a:p>
+            <a:pPr algn="ctr"/>
+          </a:p>
+        </p:txBody>
+      </p:sp>
       <p:pic>
         <p:nvPicPr>
-          <p:cNvPr id="17" name="Picture 16" descr="check_steel.png"/>
+          <p:cNvPr id="21" name="Picture 20" descr="check_white.png"/>
           <p:cNvPicPr>
             <a:picLocks noChangeAspect="1"/>
           </p:cNvPicPr>
@@ -11396,8 +12270,8 @@
         </p:blipFill>
         <p:spPr>
           <a:xfrm>
-            <a:off x="987552" y="4626864"/>
-            <a:ext cx="237744" cy="237744"/>
+            <a:off x="6523695" y="3862791"/>
+            <a:ext cx="266273" cy="266273"/>
           </a:xfrm>
           <a:prstGeom prst="rect">
             <a:avLst/>
@@ -11406,14 +12280,14 @@
       </p:pic>
       <p:sp>
         <p:nvSpPr>
-          <p:cNvPr id="18" name="TextBox 17"/>
+          <p:cNvPr id="22" name="TextBox 21"/>
           <p:cNvSpPr txBox="1"/>
           <p:nvPr/>
         </p:nvSpPr>
         <p:spPr>
           <a:xfrm>
-            <a:off x="1353312" y="4480560"/>
-            <a:ext cx="5029200" cy="530352"/>
+            <a:off x="7040880" y="3602736"/>
+            <a:ext cx="4206240" cy="786384"/>
           </a:xfrm>
           <a:prstGeom prst="rect">
             <a:avLst/>
@@ -11438,7 +12312,7 @@
               </a:spcAft>
             </a:pPr>
             <a:r>
-              <a:rPr sz="1200" b="0">
+              <a:rPr sz="1150" b="0">
                 <a:solidFill>
                   <a:srgbClr val="1A1A1A"/>
                 </a:solidFill>
@@ -11451,18 +12325,18 @@
       </p:sp>
       <p:sp>
         <p:nvSpPr>
-          <p:cNvPr id="19" name="Rounded Rectangle 18"/>
+          <p:cNvPr id="23" name="Rounded Rectangle 22"/>
           <p:cNvSpPr/>
           <p:nvPr/>
         </p:nvSpPr>
         <p:spPr>
           <a:xfrm>
-            <a:off x="841248" y="5084064"/>
-            <a:ext cx="5715000" cy="530352"/>
+            <a:off x="841248" y="4535424"/>
+            <a:ext cx="5138928" cy="786384"/>
           </a:xfrm>
           <a:prstGeom prst="roundRect">
             <a:avLst>
-              <a:gd name="adj" fmla="val 6000"/>
+              <a:gd name="adj" fmla="val 7000"/>
             </a:avLst>
           </a:prstGeom>
           <a:solidFill>
@@ -11497,9 +12371,55 @@
           </a:p>
         </p:txBody>
       </p:sp>
+      <p:sp>
+        <p:nvSpPr>
+          <p:cNvPr id="24" name="Rounded Rectangle 23"/>
+          <p:cNvSpPr/>
+          <p:nvPr/>
+        </p:nvSpPr>
+        <p:spPr>
+          <a:xfrm>
+            <a:off x="987552" y="4672584"/>
+            <a:ext cx="512064" cy="512064"/>
+          </a:xfrm>
+          <a:prstGeom prst="roundRect">
+            <a:avLst>
+              <a:gd name="adj" fmla="val 26000"/>
+            </a:avLst>
+          </a:prstGeom>
+          <a:solidFill>
+            <a:srgbClr val="EE0000"/>
+          </a:solidFill>
+          <a:ln>
+            <a:noFill/>
+          </a:ln>
+          <a:effectLst/>
+        </p:spPr>
+        <p:style>
+          <a:lnRef idx="1">
+            <a:schemeClr val="accent1"/>
+          </a:lnRef>
+          <a:fillRef idx="3">
+            <a:schemeClr val="accent1"/>
+          </a:fillRef>
+          <a:effectRef idx="2">
+            <a:schemeClr val="accent1"/>
+          </a:effectRef>
+          <a:fontRef idx="minor">
+            <a:schemeClr val="lt1"/>
+          </a:fontRef>
+        </p:style>
+        <p:txBody>
+          <a:bodyPr rtlCol="0" anchor="ctr"/>
+          <a:lstStyle/>
+          <a:p>
+            <a:pPr algn="ctr"/>
+          </a:p>
+        </p:txBody>
+      </p:sp>
       <p:pic>
         <p:nvPicPr>
-          <p:cNvPr id="20" name="Picture 19" descr="check_steel.png"/>
+          <p:cNvPr id="25" name="Picture 24" descr="check_white.png"/>
           <p:cNvPicPr>
             <a:picLocks noChangeAspect="1"/>
           </p:cNvPicPr>
@@ -11513,8 +12433,8 @@
         </p:blipFill>
         <p:spPr>
           <a:xfrm>
-            <a:off x="987552" y="5230368"/>
-            <a:ext cx="237744" cy="237744"/>
+            <a:off x="1110447" y="4795479"/>
+            <a:ext cx="266273" cy="266273"/>
           </a:xfrm>
           <a:prstGeom prst="rect">
             <a:avLst/>
@@ -11523,14 +12443,14 @@
       </p:pic>
       <p:sp>
         <p:nvSpPr>
-          <p:cNvPr id="21" name="TextBox 20"/>
+          <p:cNvPr id="26" name="TextBox 25"/>
           <p:cNvSpPr txBox="1"/>
           <p:nvPr/>
         </p:nvSpPr>
         <p:spPr>
           <a:xfrm>
-            <a:off x="1353312" y="5084064"/>
-            <a:ext cx="5029200" cy="530352"/>
+            <a:off x="1627632" y="4535424"/>
+            <a:ext cx="4206240" cy="786384"/>
           </a:xfrm>
           <a:prstGeom prst="rect">
             <a:avLst/>
@@ -11555,221 +12475,13 @@
               </a:spcAft>
             </a:pPr>
             <a:r>
-              <a:rPr sz="1200" b="0">
+              <a:rPr sz="1150" b="0">
                 <a:solidFill>
                   <a:srgbClr val="1A1A1A"/>
                 </a:solidFill>
                 <a:latin typeface="Red Hat Text"/>
               </a:rPr>
               <a:t>UDN for whole-namespace; netpol for selective flows</a:t>
-            </a:r>
-          </a:p>
-        </p:txBody>
-      </p:sp>
-      <p:sp>
-        <p:nvSpPr>
-          <p:cNvPr id="22" name="Rounded Rectangle 21"/>
-          <p:cNvSpPr/>
-          <p:nvPr/>
-        </p:nvSpPr>
-        <p:spPr>
-          <a:xfrm>
-            <a:off x="6812280" y="2670048"/>
-            <a:ext cx="4538167" cy="2944368"/>
-          </a:xfrm>
-          <a:prstGeom prst="roundRect">
-            <a:avLst>
-              <a:gd name="adj" fmla="val 4000"/>
-            </a:avLst>
-          </a:prstGeom>
-          <a:solidFill>
-            <a:srgbClr val="FFFFFF"/>
-          </a:solidFill>
-          <a:ln w="15240">
-            <a:solidFill>
-              <a:srgbClr val="DDE1E6"/>
-            </a:solidFill>
-          </a:ln>
-          <a:effectLst/>
-        </p:spPr>
-        <p:style>
-          <a:lnRef idx="1">
-            <a:schemeClr val="accent1"/>
-          </a:lnRef>
-          <a:fillRef idx="3">
-            <a:schemeClr val="accent1"/>
-          </a:fillRef>
-          <a:effectRef idx="2">
-            <a:schemeClr val="accent1"/>
-          </a:effectRef>
-          <a:fontRef idx="minor">
-            <a:schemeClr val="lt1"/>
-          </a:fontRef>
-        </p:style>
-        <p:txBody>
-          <a:bodyPr rtlCol="0" anchor="ctr"/>
-          <a:lstStyle/>
-          <a:p>
-            <a:pPr algn="ctr"/>
-          </a:p>
-        </p:txBody>
-      </p:sp>
-      <p:sp>
-        <p:nvSpPr>
-          <p:cNvPr id="23" name="Rounded Rectangle 22"/>
-          <p:cNvSpPr/>
-          <p:nvPr/>
-        </p:nvSpPr>
-        <p:spPr>
-          <a:xfrm>
-            <a:off x="7013448" y="2871216"/>
-            <a:ext cx="1298448" cy="310896"/>
-          </a:xfrm>
-          <a:prstGeom prst="roundRect">
-            <a:avLst>
-              <a:gd name="adj" fmla="val 50000"/>
-            </a:avLst>
-          </a:prstGeom>
-          <a:solidFill>
-            <a:srgbClr val="FCECEC"/>
-          </a:solidFill>
-          <a:ln>
-            <a:noFill/>
-          </a:ln>
-          <a:effectLst/>
-        </p:spPr>
-        <p:style>
-          <a:lnRef idx="1">
-            <a:schemeClr val="accent1"/>
-          </a:lnRef>
-          <a:fillRef idx="3">
-            <a:schemeClr val="accent1"/>
-          </a:fillRef>
-          <a:effectRef idx="2">
-            <a:schemeClr val="accent1"/>
-          </a:effectRef>
-          <a:fontRef idx="minor">
-            <a:schemeClr val="lt1"/>
-          </a:fontRef>
-        </p:style>
-        <p:txBody>
-          <a:bodyPr rtlCol="0" anchor="ctr"/>
-          <a:lstStyle/>
-          <a:p>
-            <a:pPr algn="ctr"/>
-          </a:p>
-        </p:txBody>
-      </p:sp>
-      <p:sp>
-        <p:nvSpPr>
-          <p:cNvPr id="24" name="TextBox 23"/>
-          <p:cNvSpPr txBox="1"/>
-          <p:nvPr/>
-        </p:nvSpPr>
-        <p:spPr>
-          <a:xfrm>
-            <a:off x="7013448" y="2871216"/>
-            <a:ext cx="1298448" cy="310896"/>
-          </a:xfrm>
-          <a:prstGeom prst="rect">
-            <a:avLst/>
-          </a:prstGeom>
-          <a:noFill/>
-        </p:spPr>
-        <p:txBody>
-          <a:bodyPr wrap="none" anchor="ctr" lIns="0" rIns="0" tIns="0" bIns="0">
-            <a:spAutoFit/>
-          </a:bodyPr>
-          <a:lstStyle/>
-          <a:p>
-            <a:pPr algn="ctr">
-              <a:lnSpc>
-                <a:spcPct val="106000"/>
-              </a:lnSpc>
-              <a:spcBef>
-                <a:spcPts val="0"/>
-              </a:spcBef>
-              <a:spcAft>
-                <a:spcPts val="0"/>
-              </a:spcAft>
-            </a:pPr>
-            <a:r>
-              <a:rPr sz="850" b="1">
-                <a:solidFill>
-                  <a:srgbClr val="B80000"/>
-                </a:solidFill>
-                <a:latin typeface="Red Hat Display"/>
-              </a:rPr>
-              <a:t>MEDIA PASS</a:t>
-            </a:r>
-          </a:p>
-        </p:txBody>
-      </p:sp>
-      <p:pic>
-        <p:nvPicPr>
-          <p:cNvPr id="25" name="Picture 24" descr="eye_slate.png"/>
-          <p:cNvPicPr>
-            <a:picLocks noChangeAspect="1"/>
-          </p:cNvPicPr>
-          <p:nvPr/>
-        </p:nvPicPr>
-        <p:blipFill>
-          <a:blip r:embed="rId4"/>
-          <a:stretch>
-            <a:fillRect/>
-          </a:stretch>
-        </p:blipFill>
-        <p:spPr>
-          <a:xfrm>
-            <a:off x="8843619" y="3383280"/>
-            <a:ext cx="475488" cy="475488"/>
-          </a:xfrm>
-          <a:prstGeom prst="rect">
-            <a:avLst/>
-          </a:prstGeom>
-        </p:spPr>
-      </p:pic>
-      <p:sp>
-        <p:nvSpPr>
-          <p:cNvPr id="26" name="TextBox 25"/>
-          <p:cNvSpPr txBox="1"/>
-          <p:nvPr/>
-        </p:nvSpPr>
-        <p:spPr>
-          <a:xfrm>
-            <a:off x="7050024" y="3995928"/>
-            <a:ext cx="4062679" cy="1481328"/>
-          </a:xfrm>
-          <a:prstGeom prst="rect">
-            <a:avLst/>
-          </a:prstGeom>
-          <a:noFill/>
-        </p:spPr>
-        <p:txBody>
-          <a:bodyPr wrap="square" anchor="t" lIns="0" rIns="0" tIns="0" bIns="0">
-            <a:spAutoFit/>
-          </a:bodyPr>
-          <a:lstStyle/>
-          <a:p>
-            <a:pPr algn="l">
-              <a:lnSpc>
-                <a:spcPct val="120000"/>
-              </a:lnSpc>
-              <a:spcBef>
-                <a:spcPts val="0"/>
-              </a:spcBef>
-              <a:spcAft>
-                <a:spcPts val="0"/>
-              </a:spcAft>
-            </a:pPr>
-            <a:r>
-              <a:rPr sz="950" b="0">
-                <a:solidFill>
-                  <a:srgbClr val="8A9099"/>
-                </a:solidFill>
-                <a:latin typeface="Red Hat Text"/>
-              </a:rPr>
-              <a:t>Two namespace boxes — "app (NetworkPolicy: 7 rules)" and "partner (UDN: 0 rules, ovn-udn1 / 10.20.0.0/16)" — with a solid wall between them labelled "native, no policy."</a:t>
             </a:r>
           </a:p>
         </p:txBody>
@@ -12077,11 +12789,11 @@
         <p:spPr>
           <a:xfrm>
             <a:off x="841248" y="2395728"/>
-            <a:ext cx="5715000" cy="530352"/>
+            <a:ext cx="5138928" cy="786384"/>
           </a:xfrm>
           <a:prstGeom prst="roundRect">
             <a:avLst>
-              <a:gd name="adj" fmla="val 6000"/>
+              <a:gd name="adj" fmla="val 7000"/>
             </a:avLst>
           </a:prstGeom>
           <a:solidFill>
@@ -12116,9 +12828,55 @@
           </a:p>
         </p:txBody>
       </p:sp>
+      <p:sp>
+        <p:nvSpPr>
+          <p:cNvPr id="7" name="Rounded Rectangle 6"/>
+          <p:cNvSpPr/>
+          <p:nvPr/>
+        </p:nvSpPr>
+        <p:spPr>
+          <a:xfrm>
+            <a:off x="987552" y="2532888"/>
+            <a:ext cx="512064" cy="512064"/>
+          </a:xfrm>
+          <a:prstGeom prst="roundRect">
+            <a:avLst>
+              <a:gd name="adj" fmla="val 26000"/>
+            </a:avLst>
+          </a:prstGeom>
+          <a:solidFill>
+            <a:srgbClr val="EE0000"/>
+          </a:solidFill>
+          <a:ln>
+            <a:noFill/>
+          </a:ln>
+          <a:effectLst/>
+        </p:spPr>
+        <p:style>
+          <a:lnRef idx="1">
+            <a:schemeClr val="accent1"/>
+          </a:lnRef>
+          <a:fillRef idx="3">
+            <a:schemeClr val="accent1"/>
+          </a:fillRef>
+          <a:effectRef idx="2">
+            <a:schemeClr val="accent1"/>
+          </a:effectRef>
+          <a:fontRef idx="minor">
+            <a:schemeClr val="lt1"/>
+          </a:fontRef>
+        </p:style>
+        <p:txBody>
+          <a:bodyPr rtlCol="0" anchor="ctr"/>
+          <a:lstStyle/>
+          <a:p>
+            <a:pPr algn="ctr"/>
+          </a:p>
+        </p:txBody>
+      </p:sp>
       <p:pic>
         <p:nvPicPr>
-          <p:cNvPr id="7" name="Picture 6" descr="check_steel.png"/>
+          <p:cNvPr id="8" name="Picture 7" descr="check_white.png"/>
           <p:cNvPicPr>
             <a:picLocks noChangeAspect="1"/>
           </p:cNvPicPr>
@@ -12132,8 +12890,8 @@
         </p:blipFill>
         <p:spPr>
           <a:xfrm>
-            <a:off x="987552" y="2542032"/>
-            <a:ext cx="237744" cy="237744"/>
+            <a:off x="1110447" y="2655783"/>
+            <a:ext cx="266273" cy="266273"/>
           </a:xfrm>
           <a:prstGeom prst="rect">
             <a:avLst/>
@@ -12142,14 +12900,14 @@
       </p:pic>
       <p:sp>
         <p:nvSpPr>
-          <p:cNvPr id="8" name="TextBox 7"/>
+          <p:cNvPr id="9" name="TextBox 8"/>
           <p:cNvSpPr txBox="1"/>
           <p:nvPr/>
         </p:nvSpPr>
         <p:spPr>
           <a:xfrm>
-            <a:off x="1353312" y="2395728"/>
-            <a:ext cx="5029200" cy="530352"/>
+            <a:off x="1627632" y="2395728"/>
+            <a:ext cx="4206240" cy="786384"/>
           </a:xfrm>
           <a:prstGeom prst="rect">
             <a:avLst/>
@@ -12174,7 +12932,7 @@
               </a:spcAft>
             </a:pPr>
             <a:r>
-              <a:rPr sz="1200" b="0">
+              <a:rPr sz="1150" b="0">
                 <a:solidFill>
                   <a:srgbClr val="1A1A1A"/>
                 </a:solidFill>
@@ -12187,18 +12945,18 @@
       </p:sp>
       <p:sp>
         <p:nvSpPr>
-          <p:cNvPr id="9" name="Rounded Rectangle 8"/>
+          <p:cNvPr id="10" name="Rounded Rectangle 9"/>
           <p:cNvSpPr/>
           <p:nvPr/>
         </p:nvSpPr>
         <p:spPr>
           <a:xfrm>
-            <a:off x="841248" y="2999232"/>
-            <a:ext cx="5715000" cy="530352"/>
+            <a:off x="6254496" y="2395728"/>
+            <a:ext cx="5138928" cy="786384"/>
           </a:xfrm>
           <a:prstGeom prst="roundRect">
             <a:avLst>
-              <a:gd name="adj" fmla="val 6000"/>
+              <a:gd name="adj" fmla="val 7000"/>
             </a:avLst>
           </a:prstGeom>
           <a:solidFill>
@@ -12233,9 +12991,55 @@
           </a:p>
         </p:txBody>
       </p:sp>
+      <p:sp>
+        <p:nvSpPr>
+          <p:cNvPr id="11" name="Rounded Rectangle 10"/>
+          <p:cNvSpPr/>
+          <p:nvPr/>
+        </p:nvSpPr>
+        <p:spPr>
+          <a:xfrm>
+            <a:off x="6400800" y="2532888"/>
+            <a:ext cx="512064" cy="512064"/>
+          </a:xfrm>
+          <a:prstGeom prst="roundRect">
+            <a:avLst>
+              <a:gd name="adj" fmla="val 26000"/>
+            </a:avLst>
+          </a:prstGeom>
+          <a:solidFill>
+            <a:srgbClr val="EE0000"/>
+          </a:solidFill>
+          <a:ln>
+            <a:noFill/>
+          </a:ln>
+          <a:effectLst/>
+        </p:spPr>
+        <p:style>
+          <a:lnRef idx="1">
+            <a:schemeClr val="accent1"/>
+          </a:lnRef>
+          <a:fillRef idx="3">
+            <a:schemeClr val="accent1"/>
+          </a:fillRef>
+          <a:effectRef idx="2">
+            <a:schemeClr val="accent1"/>
+          </a:effectRef>
+          <a:fontRef idx="minor">
+            <a:schemeClr val="lt1"/>
+          </a:fontRef>
+        </p:style>
+        <p:txBody>
+          <a:bodyPr rtlCol="0" anchor="ctr"/>
+          <a:lstStyle/>
+          <a:p>
+            <a:pPr algn="ctr"/>
+          </a:p>
+        </p:txBody>
+      </p:sp>
       <p:pic>
         <p:nvPicPr>
-          <p:cNvPr id="10" name="Picture 9" descr="check_steel.png"/>
+          <p:cNvPr id="12" name="Picture 11" descr="check_white.png"/>
           <p:cNvPicPr>
             <a:picLocks noChangeAspect="1"/>
           </p:cNvPicPr>
@@ -12249,8 +13053,8 @@
         </p:blipFill>
         <p:spPr>
           <a:xfrm>
-            <a:off x="987552" y="3145536"/>
-            <a:ext cx="237744" cy="237744"/>
+            <a:off x="6523695" y="2655783"/>
+            <a:ext cx="266273" cy="266273"/>
           </a:xfrm>
           <a:prstGeom prst="rect">
             <a:avLst/>
@@ -12259,14 +13063,14 @@
       </p:pic>
       <p:sp>
         <p:nvSpPr>
-          <p:cNvPr id="11" name="TextBox 10"/>
+          <p:cNvPr id="13" name="TextBox 12"/>
           <p:cNvSpPr txBox="1"/>
           <p:nvPr/>
         </p:nvSpPr>
         <p:spPr>
           <a:xfrm>
-            <a:off x="1353312" y="2999232"/>
-            <a:ext cx="5029200" cy="530352"/>
+            <a:off x="7040880" y="2395728"/>
+            <a:ext cx="4206240" cy="786384"/>
           </a:xfrm>
           <a:prstGeom prst="rect">
             <a:avLst/>
@@ -12291,7 +13095,7 @@
               </a:spcAft>
             </a:pPr>
             <a:r>
-              <a:rPr sz="1200" b="0">
+              <a:rPr sz="1150" b="0">
                 <a:solidFill>
                   <a:srgbClr val="1A1A1A"/>
                 </a:solidFill>
@@ -12304,18 +13108,18 @@
       </p:sp>
       <p:sp>
         <p:nvSpPr>
-          <p:cNvPr id="12" name="Rounded Rectangle 11"/>
+          <p:cNvPr id="14" name="Rounded Rectangle 13"/>
           <p:cNvSpPr/>
           <p:nvPr/>
         </p:nvSpPr>
         <p:spPr>
           <a:xfrm>
-            <a:off x="841248" y="3602736"/>
-            <a:ext cx="5715000" cy="530352"/>
+            <a:off x="841248" y="3328416"/>
+            <a:ext cx="5138928" cy="786384"/>
           </a:xfrm>
           <a:prstGeom prst="roundRect">
             <a:avLst>
-              <a:gd name="adj" fmla="val 6000"/>
+              <a:gd name="adj" fmla="val 7000"/>
             </a:avLst>
           </a:prstGeom>
           <a:solidFill>
@@ -12350,9 +13154,55 @@
           </a:p>
         </p:txBody>
       </p:sp>
+      <p:sp>
+        <p:nvSpPr>
+          <p:cNvPr id="15" name="Rounded Rectangle 14"/>
+          <p:cNvSpPr/>
+          <p:nvPr/>
+        </p:nvSpPr>
+        <p:spPr>
+          <a:xfrm>
+            <a:off x="987552" y="3465576"/>
+            <a:ext cx="512064" cy="512064"/>
+          </a:xfrm>
+          <a:prstGeom prst="roundRect">
+            <a:avLst>
+              <a:gd name="adj" fmla="val 26000"/>
+            </a:avLst>
+          </a:prstGeom>
+          <a:solidFill>
+            <a:srgbClr val="EE0000"/>
+          </a:solidFill>
+          <a:ln>
+            <a:noFill/>
+          </a:ln>
+          <a:effectLst/>
+        </p:spPr>
+        <p:style>
+          <a:lnRef idx="1">
+            <a:schemeClr val="accent1"/>
+          </a:lnRef>
+          <a:fillRef idx="3">
+            <a:schemeClr val="accent1"/>
+          </a:fillRef>
+          <a:effectRef idx="2">
+            <a:schemeClr val="accent1"/>
+          </a:effectRef>
+          <a:fontRef idx="minor">
+            <a:schemeClr val="lt1"/>
+          </a:fontRef>
+        </p:style>
+        <p:txBody>
+          <a:bodyPr rtlCol="0" anchor="ctr"/>
+          <a:lstStyle/>
+          <a:p>
+            <a:pPr algn="ctr"/>
+          </a:p>
+        </p:txBody>
+      </p:sp>
       <p:pic>
         <p:nvPicPr>
-          <p:cNvPr id="13" name="Picture 12" descr="check_steel.png"/>
+          <p:cNvPr id="16" name="Picture 15" descr="check_white.png"/>
           <p:cNvPicPr>
             <a:picLocks noChangeAspect="1"/>
           </p:cNvPicPr>
@@ -12366,8 +13216,8 @@
         </p:blipFill>
         <p:spPr>
           <a:xfrm>
-            <a:off x="987552" y="3749040"/>
-            <a:ext cx="237744" cy="237744"/>
+            <a:off x="1110447" y="3588471"/>
+            <a:ext cx="266273" cy="266273"/>
           </a:xfrm>
           <a:prstGeom prst="rect">
             <a:avLst/>
@@ -12376,14 +13226,14 @@
       </p:pic>
       <p:sp>
         <p:nvSpPr>
-          <p:cNvPr id="14" name="TextBox 13"/>
+          <p:cNvPr id="17" name="TextBox 16"/>
           <p:cNvSpPr txBox="1"/>
           <p:nvPr/>
         </p:nvSpPr>
         <p:spPr>
           <a:xfrm>
-            <a:off x="1353312" y="3602736"/>
-            <a:ext cx="5029200" cy="530352"/>
+            <a:off x="1627632" y="3328416"/>
+            <a:ext cx="4206240" cy="786384"/>
           </a:xfrm>
           <a:prstGeom prst="rect">
             <a:avLst/>
@@ -12408,7 +13258,7 @@
               </a:spcAft>
             </a:pPr>
             <a:r>
-              <a:rPr sz="1200" b="0">
+              <a:rPr sz="1150" b="0">
                 <a:solidFill>
                   <a:srgbClr val="1A1A1A"/>
                 </a:solidFill>
@@ -12421,18 +13271,18 @@
       </p:sp>
       <p:sp>
         <p:nvSpPr>
-          <p:cNvPr id="15" name="Rounded Rectangle 14"/>
+          <p:cNvPr id="18" name="Rounded Rectangle 17"/>
           <p:cNvSpPr/>
           <p:nvPr/>
         </p:nvSpPr>
         <p:spPr>
           <a:xfrm>
-            <a:off x="841248" y="4206240"/>
-            <a:ext cx="5715000" cy="530352"/>
+            <a:off x="6254496" y="3328416"/>
+            <a:ext cx="5138928" cy="786384"/>
           </a:xfrm>
           <a:prstGeom prst="roundRect">
             <a:avLst>
-              <a:gd name="adj" fmla="val 6000"/>
+              <a:gd name="adj" fmla="val 7000"/>
             </a:avLst>
           </a:prstGeom>
           <a:solidFill>
@@ -12467,9 +13317,55 @@
           </a:p>
         </p:txBody>
       </p:sp>
+      <p:sp>
+        <p:nvSpPr>
+          <p:cNvPr id="19" name="Rounded Rectangle 18"/>
+          <p:cNvSpPr/>
+          <p:nvPr/>
+        </p:nvSpPr>
+        <p:spPr>
+          <a:xfrm>
+            <a:off x="6400800" y="3465576"/>
+            <a:ext cx="512064" cy="512064"/>
+          </a:xfrm>
+          <a:prstGeom prst="roundRect">
+            <a:avLst>
+              <a:gd name="adj" fmla="val 26000"/>
+            </a:avLst>
+          </a:prstGeom>
+          <a:solidFill>
+            <a:srgbClr val="EE0000"/>
+          </a:solidFill>
+          <a:ln>
+            <a:noFill/>
+          </a:ln>
+          <a:effectLst/>
+        </p:spPr>
+        <p:style>
+          <a:lnRef idx="1">
+            <a:schemeClr val="accent1"/>
+          </a:lnRef>
+          <a:fillRef idx="3">
+            <a:schemeClr val="accent1"/>
+          </a:fillRef>
+          <a:effectRef idx="2">
+            <a:schemeClr val="accent1"/>
+          </a:effectRef>
+          <a:fontRef idx="minor">
+            <a:schemeClr val="lt1"/>
+          </a:fontRef>
+        </p:style>
+        <p:txBody>
+          <a:bodyPr rtlCol="0" anchor="ctr"/>
+          <a:lstStyle/>
+          <a:p>
+            <a:pPr algn="ctr"/>
+          </a:p>
+        </p:txBody>
+      </p:sp>
       <p:pic>
         <p:nvPicPr>
-          <p:cNvPr id="16" name="Picture 15" descr="check_steel.png"/>
+          <p:cNvPr id="20" name="Picture 19" descr="check_white.png"/>
           <p:cNvPicPr>
             <a:picLocks noChangeAspect="1"/>
           </p:cNvPicPr>
@@ -12483,8 +13379,8 @@
         </p:blipFill>
         <p:spPr>
           <a:xfrm>
-            <a:off x="987552" y="4352544"/>
-            <a:ext cx="237744" cy="237744"/>
+            <a:off x="6523695" y="3588471"/>
+            <a:ext cx="266273" cy="266273"/>
           </a:xfrm>
           <a:prstGeom prst="rect">
             <a:avLst/>
@@ -12493,14 +13389,14 @@
       </p:pic>
       <p:sp>
         <p:nvSpPr>
-          <p:cNvPr id="17" name="TextBox 16"/>
+          <p:cNvPr id="21" name="TextBox 20"/>
           <p:cNvSpPr txBox="1"/>
           <p:nvPr/>
         </p:nvSpPr>
         <p:spPr>
           <a:xfrm>
-            <a:off x="1353312" y="4206240"/>
-            <a:ext cx="5029200" cy="530352"/>
+            <a:off x="7040880" y="3328416"/>
+            <a:ext cx="4206240" cy="786384"/>
           </a:xfrm>
           <a:prstGeom prst="rect">
             <a:avLst/>
@@ -12525,7 +13421,7 @@
               </a:spcAft>
             </a:pPr>
             <a:r>
-              <a:rPr sz="1200" b="0">
+              <a:rPr sz="1150" b="0">
                 <a:solidFill>
                   <a:srgbClr val="1A1A1A"/>
                 </a:solidFill>
@@ -12538,18 +13434,18 @@
       </p:sp>
       <p:sp>
         <p:nvSpPr>
-          <p:cNvPr id="18" name="Rounded Rectangle 17"/>
+          <p:cNvPr id="22" name="Rounded Rectangle 21"/>
           <p:cNvSpPr/>
           <p:nvPr/>
         </p:nvSpPr>
         <p:spPr>
           <a:xfrm>
-            <a:off x="841248" y="4809744"/>
-            <a:ext cx="5715000" cy="530352"/>
+            <a:off x="841248" y="4261104"/>
+            <a:ext cx="5138928" cy="786384"/>
           </a:xfrm>
           <a:prstGeom prst="roundRect">
             <a:avLst>
-              <a:gd name="adj" fmla="val 6000"/>
+              <a:gd name="adj" fmla="val 7000"/>
             </a:avLst>
           </a:prstGeom>
           <a:solidFill>
@@ -12584,9 +13480,55 @@
           </a:p>
         </p:txBody>
       </p:sp>
+      <p:sp>
+        <p:nvSpPr>
+          <p:cNvPr id="23" name="Rounded Rectangle 22"/>
+          <p:cNvSpPr/>
+          <p:nvPr/>
+        </p:nvSpPr>
+        <p:spPr>
+          <a:xfrm>
+            <a:off x="987552" y="4398264"/>
+            <a:ext cx="512064" cy="512064"/>
+          </a:xfrm>
+          <a:prstGeom prst="roundRect">
+            <a:avLst>
+              <a:gd name="adj" fmla="val 26000"/>
+            </a:avLst>
+          </a:prstGeom>
+          <a:solidFill>
+            <a:srgbClr val="EE0000"/>
+          </a:solidFill>
+          <a:ln>
+            <a:noFill/>
+          </a:ln>
+          <a:effectLst/>
+        </p:spPr>
+        <p:style>
+          <a:lnRef idx="1">
+            <a:schemeClr val="accent1"/>
+          </a:lnRef>
+          <a:fillRef idx="3">
+            <a:schemeClr val="accent1"/>
+          </a:fillRef>
+          <a:effectRef idx="2">
+            <a:schemeClr val="accent1"/>
+          </a:effectRef>
+          <a:fontRef idx="minor">
+            <a:schemeClr val="lt1"/>
+          </a:fontRef>
+        </p:style>
+        <p:txBody>
+          <a:bodyPr rtlCol="0" anchor="ctr"/>
+          <a:lstStyle/>
+          <a:p>
+            <a:pPr algn="ctr"/>
+          </a:p>
+        </p:txBody>
+      </p:sp>
       <p:pic>
         <p:nvPicPr>
-          <p:cNvPr id="19" name="Picture 18" descr="check_steel.png"/>
+          <p:cNvPr id="24" name="Picture 23" descr="check_white.png"/>
           <p:cNvPicPr>
             <a:picLocks noChangeAspect="1"/>
           </p:cNvPicPr>
@@ -12600,8 +13542,8 @@
         </p:blipFill>
         <p:spPr>
           <a:xfrm>
-            <a:off x="987552" y="4956048"/>
-            <a:ext cx="237744" cy="237744"/>
+            <a:off x="1110447" y="4521159"/>
+            <a:ext cx="266273" cy="266273"/>
           </a:xfrm>
           <a:prstGeom prst="rect">
             <a:avLst/>
@@ -12610,14 +13552,14 @@
       </p:pic>
       <p:sp>
         <p:nvSpPr>
-          <p:cNvPr id="20" name="TextBox 19"/>
+          <p:cNvPr id="25" name="TextBox 24"/>
           <p:cNvSpPr txBox="1"/>
           <p:nvPr/>
         </p:nvSpPr>
         <p:spPr>
           <a:xfrm>
-            <a:off x="1353312" y="4809744"/>
-            <a:ext cx="5029200" cy="530352"/>
+            <a:off x="1627632" y="4261104"/>
+            <a:ext cx="4206240" cy="786384"/>
           </a:xfrm>
           <a:prstGeom prst="rect">
             <a:avLst/>
@@ -12642,221 +13584,13 @@
               </a:spcAft>
             </a:pPr>
             <a:r>
-              <a:rPr sz="1200" b="0">
+              <a:rPr sz="1150" b="0">
                 <a:solidFill>
                   <a:srgbClr val="1A1A1A"/>
                 </a:solidFill>
                 <a:latin typeface="Red Hat Text"/>
               </a:rPr>
               <a:t>If a debug pod landed in prod, what could it reach?</a:t>
-            </a:r>
-          </a:p>
-        </p:txBody>
-      </p:sp>
-      <p:sp>
-        <p:nvSpPr>
-          <p:cNvPr id="21" name="Rounded Rectangle 20"/>
-          <p:cNvSpPr/>
-          <p:nvPr/>
-        </p:nvSpPr>
-        <p:spPr>
-          <a:xfrm>
-            <a:off x="6812280" y="2395728"/>
-            <a:ext cx="4538167" cy="2944368"/>
-          </a:xfrm>
-          <a:prstGeom prst="roundRect">
-            <a:avLst>
-              <a:gd name="adj" fmla="val 4000"/>
-            </a:avLst>
-          </a:prstGeom>
-          <a:solidFill>
-            <a:srgbClr val="FFFFFF"/>
-          </a:solidFill>
-          <a:ln w="15240">
-            <a:solidFill>
-              <a:srgbClr val="DDE1E6"/>
-            </a:solidFill>
-          </a:ln>
-          <a:effectLst/>
-        </p:spPr>
-        <p:style>
-          <a:lnRef idx="1">
-            <a:schemeClr val="accent1"/>
-          </a:lnRef>
-          <a:fillRef idx="3">
-            <a:schemeClr val="accent1"/>
-          </a:fillRef>
-          <a:effectRef idx="2">
-            <a:schemeClr val="accent1"/>
-          </a:effectRef>
-          <a:fontRef idx="minor">
-            <a:schemeClr val="lt1"/>
-          </a:fontRef>
-        </p:style>
-        <p:txBody>
-          <a:bodyPr rtlCol="0" anchor="ctr"/>
-          <a:lstStyle/>
-          <a:p>
-            <a:pPr algn="ctr"/>
-          </a:p>
-        </p:txBody>
-      </p:sp>
-      <p:sp>
-        <p:nvSpPr>
-          <p:cNvPr id="22" name="Rounded Rectangle 21"/>
-          <p:cNvSpPr/>
-          <p:nvPr/>
-        </p:nvSpPr>
-        <p:spPr>
-          <a:xfrm>
-            <a:off x="7013448" y="2596896"/>
-            <a:ext cx="1298448" cy="310896"/>
-          </a:xfrm>
-          <a:prstGeom prst="roundRect">
-            <a:avLst>
-              <a:gd name="adj" fmla="val 50000"/>
-            </a:avLst>
-          </a:prstGeom>
-          <a:solidFill>
-            <a:srgbClr val="FCECEC"/>
-          </a:solidFill>
-          <a:ln>
-            <a:noFill/>
-          </a:ln>
-          <a:effectLst/>
-        </p:spPr>
-        <p:style>
-          <a:lnRef idx="1">
-            <a:schemeClr val="accent1"/>
-          </a:lnRef>
-          <a:fillRef idx="3">
-            <a:schemeClr val="accent1"/>
-          </a:fillRef>
-          <a:effectRef idx="2">
-            <a:schemeClr val="accent1"/>
-          </a:effectRef>
-          <a:fontRef idx="minor">
-            <a:schemeClr val="lt1"/>
-          </a:fontRef>
-        </p:style>
-        <p:txBody>
-          <a:bodyPr rtlCol="0" anchor="ctr"/>
-          <a:lstStyle/>
-          <a:p>
-            <a:pPr algn="ctr"/>
-          </a:p>
-        </p:txBody>
-      </p:sp>
-      <p:sp>
-        <p:nvSpPr>
-          <p:cNvPr id="23" name="TextBox 22"/>
-          <p:cNvSpPr txBox="1"/>
-          <p:nvPr/>
-        </p:nvSpPr>
-        <p:spPr>
-          <a:xfrm>
-            <a:off x="7013448" y="2596896"/>
-            <a:ext cx="1298448" cy="310896"/>
-          </a:xfrm>
-          <a:prstGeom prst="rect">
-            <a:avLst/>
-          </a:prstGeom>
-          <a:noFill/>
-        </p:spPr>
-        <p:txBody>
-          <a:bodyPr wrap="none" anchor="ctr" lIns="0" rIns="0" tIns="0" bIns="0">
-            <a:spAutoFit/>
-          </a:bodyPr>
-          <a:lstStyle/>
-          <a:p>
-            <a:pPr algn="ctr">
-              <a:lnSpc>
-                <a:spcPct val="106000"/>
-              </a:lnSpc>
-              <a:spcBef>
-                <a:spcPts val="0"/>
-              </a:spcBef>
-              <a:spcAft>
-                <a:spcPts val="0"/>
-              </a:spcAft>
-            </a:pPr>
-            <a:r>
-              <a:rPr sz="850" b="1">
-                <a:solidFill>
-                  <a:srgbClr val="B80000"/>
-                </a:solidFill>
-                <a:latin typeface="Red Hat Display"/>
-              </a:rPr>
-              <a:t>MEDIA PASS</a:t>
-            </a:r>
-          </a:p>
-        </p:txBody>
-      </p:sp>
-      <p:pic>
-        <p:nvPicPr>
-          <p:cNvPr id="24" name="Picture 23" descr="eye_slate.png"/>
-          <p:cNvPicPr>
-            <a:picLocks noChangeAspect="1"/>
-          </p:cNvPicPr>
-          <p:nvPr/>
-        </p:nvPicPr>
-        <p:blipFill>
-          <a:blip r:embed="rId4"/>
-          <a:stretch>
-            <a:fillRect/>
-          </a:stretch>
-        </p:blipFill>
-        <p:spPr>
-          <a:xfrm>
-            <a:off x="8843619" y="3108960"/>
-            <a:ext cx="475488" cy="475488"/>
-          </a:xfrm>
-          <a:prstGeom prst="rect">
-            <a:avLst/>
-          </a:prstGeom>
-        </p:spPr>
-      </p:pic>
-      <p:sp>
-        <p:nvSpPr>
-          <p:cNvPr id="25" name="TextBox 24"/>
-          <p:cNvSpPr txBox="1"/>
-          <p:nvPr/>
-        </p:nvSpPr>
-        <p:spPr>
-          <a:xfrm>
-            <a:off x="7050024" y="3721608"/>
-            <a:ext cx="4062679" cy="1481328"/>
-          </a:xfrm>
-          <a:prstGeom prst="rect">
-            <a:avLst/>
-          </a:prstGeom>
-          <a:noFill/>
-        </p:spPr>
-        <p:txBody>
-          <a:bodyPr wrap="square" anchor="t" lIns="0" rIns="0" tIns="0" bIns="0">
-            <a:spAutoFit/>
-          </a:bodyPr>
-          <a:lstStyle/>
-          <a:p>
-            <a:pPr algn="l">
-              <a:lnSpc>
-                <a:spcPct val="120000"/>
-              </a:lnSpc>
-              <a:spcBef>
-                <a:spcPts val="0"/>
-              </a:spcBef>
-              <a:spcAft>
-                <a:spcPts val="0"/>
-              </a:spcAft>
-            </a:pPr>
-            <a:r>
-              <a:rPr sz="950" b="0">
-                <a:solidFill>
-                  <a:srgbClr val="8A9099"/>
-                </a:solidFill>
-                <a:latin typeface="Red Hat Text"/>
-              </a:rPr>
-              <a:t>Numbered arc strip: trace/break-fix → Route → default-deny/allow/prove → UDN reveal; footnote pointer to the Service Mesh module for the mTLS/L7/L4 layer.</a:t>
             </a:r>
           </a:p>
         </p:txBody>
